--- a/docs/persona-decks/mentible-for-physicians.pptx
+++ b/docs/persona-decks/mentible-for-physicians.pptx
@@ -3110,7 +3110,7 @@
             <a:avLst/>
           </a:prstGeom>
           <a:solidFill>
-            <a:srgbClr val="FBFAF9"/>
+            <a:srgbClr val="F4F6F5"/>
           </a:solidFill>
           <a:ln>
             <a:noFill/>
@@ -3148,7 +3148,558 @@
         <p:spPr>
           <a:xfrm>
             <a:off x="0" y="0"/>
-            <a:ext cx="274320" cy="6858000"/>
+            <a:ext cx="12191695" cy="658368"/>
+          </a:xfrm>
+          <a:prstGeom prst="rect">
+            <a:avLst/>
+          </a:prstGeom>
+          <a:solidFill>
+            <a:srgbClr val="E4F0F1"/>
+          </a:solidFill>
+          <a:ln>
+            <a:noFill/>
+          </a:ln>
+          <a:effectLst/>
+        </p:spPr>
+        <p:style>
+          <a:lnRef idx="1">
+            <a:schemeClr val="accent1"/>
+          </a:lnRef>
+          <a:fillRef idx="3">
+            <a:schemeClr val="accent1"/>
+          </a:fillRef>
+          <a:effectRef idx="2">
+            <a:schemeClr val="accent1"/>
+          </a:effectRef>
+          <a:fontRef idx="minor">
+            <a:schemeClr val="lt1"/>
+          </a:fontRef>
+        </p:style>
+        <p:txBody>
+          <a:bodyPr rtlCol="0" anchor="ctr"/>
+          <a:lstStyle/>
+          <a:p>
+            <a:pPr algn="ctr"/>
+          </a:p>
+        </p:txBody>
+      </p:sp>
+      <p:sp>
+        <p:nvSpPr>
+          <p:cNvPr id="4" name="Rectangle 3"/>
+          <p:cNvSpPr/>
+          <p:nvPr/>
+        </p:nvSpPr>
+        <p:spPr>
+          <a:xfrm>
+            <a:off x="0" y="658368"/>
+            <a:ext cx="12191695" cy="18288"/>
+          </a:xfrm>
+          <a:prstGeom prst="rect">
+            <a:avLst/>
+          </a:prstGeom>
+          <a:solidFill>
+            <a:srgbClr val="BEDDDF"/>
+          </a:solidFill>
+          <a:ln>
+            <a:noFill/>
+          </a:ln>
+          <a:effectLst/>
+        </p:spPr>
+        <p:style>
+          <a:lnRef idx="1">
+            <a:schemeClr val="accent1"/>
+          </a:lnRef>
+          <a:fillRef idx="3">
+            <a:schemeClr val="accent1"/>
+          </a:fillRef>
+          <a:effectRef idx="2">
+            <a:schemeClr val="accent1"/>
+          </a:effectRef>
+          <a:fontRef idx="minor">
+            <a:schemeClr val="lt1"/>
+          </a:fontRef>
+        </p:style>
+        <p:txBody>
+          <a:bodyPr rtlCol="0" anchor="ctr"/>
+          <a:lstStyle/>
+          <a:p>
+            <a:pPr algn="ctr"/>
+          </a:p>
+        </p:txBody>
+      </p:sp>
+      <p:sp>
+        <p:nvSpPr>
+          <p:cNvPr id="5" name="TextBox 4"/>
+          <p:cNvSpPr txBox="1"/>
+          <p:nvPr/>
+        </p:nvSpPr>
+        <p:spPr>
+          <a:xfrm>
+            <a:off x="822960" y="0"/>
+            <a:ext cx="4572000" cy="658368"/>
+          </a:xfrm>
+          <a:prstGeom prst="rect">
+            <a:avLst/>
+          </a:prstGeom>
+          <a:noFill/>
+        </p:spPr>
+        <p:txBody>
+          <a:bodyPr wrap="square" anchor="ctr" lIns="0" rIns="0" tIns="0" bIns="0">
+            <a:spAutoFit/>
+          </a:bodyPr>
+          <a:lstStyle/>
+          <a:p>
+            <a:pPr algn="l">
+              <a:spcAft>
+                <a:spcPts val="0"/>
+              </a:spcAft>
+            </a:pPr>
+            <a:r>
+              <a:rPr sz="1100" b="1" i="0">
+                <a:solidFill>
+                  <a:srgbClr val="1F5C6B"/>
+                </a:solidFill>
+                <a:latin typeface="Consolas"/>
+              </a:rPr>
+              <a:t>MENTIBLE CLINICAL</a:t>
+            </a:r>
+          </a:p>
+        </p:txBody>
+      </p:sp>
+      <p:sp>
+        <p:nvSpPr>
+          <p:cNvPr id="6" name="TextBox 5"/>
+          <p:cNvSpPr txBox="1"/>
+          <p:nvPr/>
+        </p:nvSpPr>
+        <p:spPr>
+          <a:xfrm>
+            <a:off x="4206240" y="0"/>
+            <a:ext cx="5394960" cy="658368"/>
+          </a:xfrm>
+          <a:prstGeom prst="rect">
+            <a:avLst/>
+          </a:prstGeom>
+          <a:noFill/>
+        </p:spPr>
+        <p:txBody>
+          <a:bodyPr wrap="square" anchor="ctr" lIns="0" rIns="0" tIns="0" bIns="0">
+            <a:spAutoFit/>
+          </a:bodyPr>
+          <a:lstStyle/>
+          <a:p>
+            <a:pPr algn="r">
+              <a:spcAft>
+                <a:spcPts val="0"/>
+              </a:spcAft>
+            </a:pPr>
+            <a:r>
+              <a:rPr sz="1100" b="0" i="0">
+                <a:solidFill>
+                  <a:srgbClr val="5A6A72"/>
+                </a:solidFill>
+                <a:latin typeface="Consolas"/>
+              </a:rPr>
+              <a:t>PATIENT CHART · INTAKE</a:t>
+            </a:r>
+          </a:p>
+        </p:txBody>
+      </p:sp>
+      <p:cxnSp>
+        <p:nvCxnSpPr>
+          <p:cNvPr id="7" name="Connector 6"/>
+          <p:cNvCxnSpPr/>
+          <p:nvPr/>
+        </p:nvCxnSpPr>
+        <p:spPr>
+          <a:xfrm>
+            <a:off x="10058400" y="329184"/>
+            <a:ext cx="590702" cy="0"/>
+          </a:xfrm>
+          <a:prstGeom prst="line">
+            <a:avLst/>
+          </a:prstGeom>
+          <a:ln w="22225">
+            <a:solidFill>
+              <a:srgbClr val="C0483C"/>
+            </a:solidFill>
+          </a:ln>
+          <a:effectLst/>
+        </p:spPr>
+        <p:style>
+          <a:lnRef idx="2">
+            <a:schemeClr val="accent1"/>
+          </a:lnRef>
+          <a:fillRef idx="0">
+            <a:schemeClr val="accent1"/>
+          </a:fillRef>
+          <a:effectRef idx="1">
+            <a:schemeClr val="accent1"/>
+          </a:effectRef>
+          <a:fontRef idx="minor">
+            <a:schemeClr val="tx1"/>
+          </a:fontRef>
+        </p:style>
+      </p:cxnSp>
+      <p:cxnSp>
+        <p:nvCxnSpPr>
+          <p:cNvPr id="8" name="Connector 7"/>
+          <p:cNvCxnSpPr/>
+          <p:nvPr/>
+        </p:nvCxnSpPr>
+        <p:spPr>
+          <a:xfrm>
+            <a:off x="10649102" y="329184"/>
+            <a:ext cx="104242" cy="91439"/>
+          </a:xfrm>
+          <a:prstGeom prst="line">
+            <a:avLst/>
+          </a:prstGeom>
+          <a:ln w="22225">
+            <a:solidFill>
+              <a:srgbClr val="C0483C"/>
+            </a:solidFill>
+          </a:ln>
+          <a:effectLst/>
+        </p:spPr>
+        <p:style>
+          <a:lnRef idx="2">
+            <a:schemeClr val="accent1"/>
+          </a:lnRef>
+          <a:fillRef idx="0">
+            <a:schemeClr val="accent1"/>
+          </a:fillRef>
+          <a:effectRef idx="1">
+            <a:schemeClr val="accent1"/>
+          </a:effectRef>
+          <a:fontRef idx="minor">
+            <a:schemeClr val="tx1"/>
+          </a:fontRef>
+        </p:style>
+      </p:cxnSp>
+      <p:cxnSp>
+        <p:nvCxnSpPr>
+          <p:cNvPr id="9" name="Connector 8"/>
+          <p:cNvCxnSpPr/>
+          <p:nvPr/>
+        </p:nvCxnSpPr>
+        <p:spPr>
+          <a:xfrm flipV="1">
+            <a:off x="10753344" y="310896"/>
+            <a:ext cx="86868" cy="109727"/>
+          </a:xfrm>
+          <a:prstGeom prst="line">
+            <a:avLst/>
+          </a:prstGeom>
+          <a:ln w="22225">
+            <a:solidFill>
+              <a:srgbClr val="C0483C"/>
+            </a:solidFill>
+          </a:ln>
+          <a:effectLst/>
+        </p:spPr>
+        <p:style>
+          <a:lnRef idx="2">
+            <a:schemeClr val="accent1"/>
+          </a:lnRef>
+          <a:fillRef idx="0">
+            <a:schemeClr val="accent1"/>
+          </a:fillRef>
+          <a:effectRef idx="1">
+            <a:schemeClr val="accent1"/>
+          </a:effectRef>
+          <a:fontRef idx="minor">
+            <a:schemeClr val="tx1"/>
+          </a:fontRef>
+        </p:style>
+      </p:cxnSp>
+      <p:cxnSp>
+        <p:nvCxnSpPr>
+          <p:cNvPr id="10" name="Connector 9"/>
+          <p:cNvCxnSpPr/>
+          <p:nvPr/>
+        </p:nvCxnSpPr>
+        <p:spPr>
+          <a:xfrm flipV="1">
+            <a:off x="10840212" y="18287"/>
+            <a:ext cx="69494" cy="292609"/>
+          </a:xfrm>
+          <a:prstGeom prst="line">
+            <a:avLst/>
+          </a:prstGeom>
+          <a:ln w="22225">
+            <a:solidFill>
+              <a:srgbClr val="C0483C"/>
+            </a:solidFill>
+          </a:ln>
+          <a:effectLst/>
+        </p:spPr>
+        <p:style>
+          <a:lnRef idx="2">
+            <a:schemeClr val="accent1"/>
+          </a:lnRef>
+          <a:fillRef idx="0">
+            <a:schemeClr val="accent1"/>
+          </a:fillRef>
+          <a:effectRef idx="1">
+            <a:schemeClr val="accent1"/>
+          </a:effectRef>
+          <a:fontRef idx="minor">
+            <a:schemeClr val="tx1"/>
+          </a:fontRef>
+        </p:style>
+      </p:cxnSp>
+      <p:cxnSp>
+        <p:nvCxnSpPr>
+          <p:cNvPr id="11" name="Connector 10"/>
+          <p:cNvCxnSpPr/>
+          <p:nvPr/>
+        </p:nvCxnSpPr>
+        <p:spPr>
+          <a:xfrm>
+            <a:off x="10909706" y="18287"/>
+            <a:ext cx="86868" cy="438913"/>
+          </a:xfrm>
+          <a:prstGeom prst="line">
+            <a:avLst/>
+          </a:prstGeom>
+          <a:ln w="22225">
+            <a:solidFill>
+              <a:srgbClr val="C0483C"/>
+            </a:solidFill>
+          </a:ln>
+          <a:effectLst/>
+        </p:spPr>
+        <p:style>
+          <a:lnRef idx="2">
+            <a:schemeClr val="accent1"/>
+          </a:lnRef>
+          <a:fillRef idx="0">
+            <a:schemeClr val="accent1"/>
+          </a:fillRef>
+          <a:effectRef idx="1">
+            <a:schemeClr val="accent1"/>
+          </a:effectRef>
+          <a:fontRef idx="minor">
+            <a:schemeClr val="tx1"/>
+          </a:fontRef>
+        </p:style>
+      </p:cxnSp>
+      <p:cxnSp>
+        <p:nvCxnSpPr>
+          <p:cNvPr id="12" name="Connector 11"/>
+          <p:cNvCxnSpPr/>
+          <p:nvPr/>
+        </p:nvCxnSpPr>
+        <p:spPr>
+          <a:xfrm flipV="1">
+            <a:off x="10996574" y="329184"/>
+            <a:ext cx="86868" cy="128016"/>
+          </a:xfrm>
+          <a:prstGeom prst="line">
+            <a:avLst/>
+          </a:prstGeom>
+          <a:ln w="22225">
+            <a:solidFill>
+              <a:srgbClr val="C0483C"/>
+            </a:solidFill>
+          </a:ln>
+          <a:effectLst/>
+        </p:spPr>
+        <p:style>
+          <a:lnRef idx="2">
+            <a:schemeClr val="accent1"/>
+          </a:lnRef>
+          <a:fillRef idx="0">
+            <a:schemeClr val="accent1"/>
+          </a:fillRef>
+          <a:effectRef idx="1">
+            <a:schemeClr val="accent1"/>
+          </a:effectRef>
+          <a:fontRef idx="minor">
+            <a:schemeClr val="tx1"/>
+          </a:fontRef>
+        </p:style>
+      </p:cxnSp>
+      <p:cxnSp>
+        <p:nvCxnSpPr>
+          <p:cNvPr id="13" name="Connector 12"/>
+          <p:cNvCxnSpPr/>
+          <p:nvPr/>
+        </p:nvCxnSpPr>
+        <p:spPr>
+          <a:xfrm>
+            <a:off x="11083442" y="329184"/>
+            <a:ext cx="712318" cy="0"/>
+          </a:xfrm>
+          <a:prstGeom prst="line">
+            <a:avLst/>
+          </a:prstGeom>
+          <a:ln w="22225">
+            <a:solidFill>
+              <a:srgbClr val="C0483C"/>
+            </a:solidFill>
+          </a:ln>
+          <a:effectLst/>
+        </p:spPr>
+        <p:style>
+          <a:lnRef idx="2">
+            <a:schemeClr val="accent1"/>
+          </a:lnRef>
+          <a:fillRef idx="0">
+            <a:schemeClr val="accent1"/>
+          </a:fillRef>
+          <a:effectRef idx="1">
+            <a:schemeClr val="accent1"/>
+          </a:effectRef>
+          <a:fontRef idx="minor">
+            <a:schemeClr val="tx1"/>
+          </a:fontRef>
+        </p:style>
+      </p:cxnSp>
+      <p:sp>
+        <p:nvSpPr>
+          <p:cNvPr id="14" name="TextBox 13"/>
+          <p:cNvSpPr txBox="1"/>
+          <p:nvPr/>
+        </p:nvSpPr>
+        <p:spPr>
+          <a:xfrm>
+            <a:off x="822960" y="1097280"/>
+            <a:ext cx="10515600" cy="1463040"/>
+          </a:xfrm>
+          <a:prstGeom prst="rect">
+            <a:avLst/>
+          </a:prstGeom>
+          <a:noFill/>
+        </p:spPr>
+        <p:txBody>
+          <a:bodyPr wrap="square" anchor="t" lIns="0" rIns="0" tIns="0" bIns="0">
+            <a:spAutoFit/>
+          </a:bodyPr>
+          <a:lstStyle/>
+          <a:p>
+            <a:pPr algn="l">
+              <a:lnSpc>
+                <a:spcPct val="102000"/>
+              </a:lnSpc>
+              <a:spcAft>
+                <a:spcPts val="0"/>
+              </a:spcAft>
+            </a:pPr>
+            <a:r>
+              <a:rPr sz="3800" b="1" i="0">
+                <a:solidFill>
+                  <a:srgbClr val="17242E"/>
+                </a:solidFill>
+                <a:latin typeface="Georgia"/>
+              </a:rPr>
+              <a:t>Hi, Dr. Anaya.
+I'm Mentible.</a:t>
+            </a:r>
+          </a:p>
+        </p:txBody>
+      </p:sp>
+      <p:sp>
+        <p:nvSpPr>
+          <p:cNvPr id="15" name="TextBox 14"/>
+          <p:cNvSpPr txBox="1"/>
+          <p:nvPr/>
+        </p:nvSpPr>
+        <p:spPr>
+          <a:xfrm>
+            <a:off x="822960" y="2971800"/>
+            <a:ext cx="9875520" cy="822960"/>
+          </a:xfrm>
+          <a:prstGeom prst="rect">
+            <a:avLst/>
+          </a:prstGeom>
+          <a:noFill/>
+        </p:spPr>
+        <p:txBody>
+          <a:bodyPr wrap="square" anchor="t" lIns="0" rIns="0" tIns="0" bIns="0">
+            <a:spAutoFit/>
+          </a:bodyPr>
+          <a:lstStyle/>
+          <a:p>
+            <a:pPr algn="l">
+              <a:lnSpc>
+                <a:spcPct val="110000"/>
+              </a:lnSpc>
+              <a:spcAft>
+                <a:spcPts val="0"/>
+              </a:spcAft>
+            </a:pPr>
+            <a:r>
+              <a:rPr sz="1500" b="0" i="0">
+                <a:solidFill>
+                  <a:srgbClr val="5A6A72"/>
+                </a:solidFill>
+                <a:latin typeface="Georgia"/>
+              </a:rPr>
+              <a:t>Your papers, the notes you trust, your guidance — I'll write and answer from them, in your evidence, never a chatbot's guesses.</a:t>
+            </a:r>
+          </a:p>
+        </p:txBody>
+      </p:sp>
+      <p:sp>
+        <p:nvSpPr>
+          <p:cNvPr id="16" name="Rounded Rectangle 15"/>
+          <p:cNvSpPr/>
+          <p:nvPr/>
+        </p:nvSpPr>
+        <p:spPr>
+          <a:xfrm>
+            <a:off x="822960" y="3977639"/>
+            <a:ext cx="10515600" cy="1051560"/>
+          </a:xfrm>
+          <a:prstGeom prst="roundRect">
+            <a:avLst>
+              <a:gd name="adj" fmla="val 8000"/>
+            </a:avLst>
+          </a:prstGeom>
+          <a:solidFill>
+            <a:srgbClr val="FFFFFF"/>
+          </a:solidFill>
+          <a:ln w="15875">
+            <a:solidFill>
+              <a:srgbClr val="BEDDDF"/>
+            </a:solidFill>
+          </a:ln>
+          <a:effectLst/>
+        </p:spPr>
+        <p:style>
+          <a:lnRef idx="1">
+            <a:schemeClr val="accent1"/>
+          </a:lnRef>
+          <a:fillRef idx="3">
+            <a:schemeClr val="accent1"/>
+          </a:fillRef>
+          <a:effectRef idx="2">
+            <a:schemeClr val="accent1"/>
+          </a:effectRef>
+          <a:fontRef idx="minor">
+            <a:schemeClr val="lt1"/>
+          </a:fontRef>
+        </p:style>
+        <p:txBody>
+          <a:bodyPr rtlCol="0" anchor="ctr"/>
+          <a:lstStyle/>
+          <a:p>
+            <a:pPr algn="ctr"/>
+          </a:p>
+        </p:txBody>
+      </p:sp>
+      <p:sp>
+        <p:nvSpPr>
+          <p:cNvPr id="17" name="Rectangle 16"/>
+          <p:cNvSpPr/>
+          <p:nvPr/>
+        </p:nvSpPr>
+        <p:spPr>
+          <a:xfrm>
+            <a:off x="822960" y="3977639"/>
+            <a:ext cx="91440" cy="1051560"/>
           </a:xfrm>
           <a:prstGeom prst="rect">
             <a:avLst/>
@@ -3185,62 +3736,14 @@
       </p:sp>
       <p:sp>
         <p:nvSpPr>
-          <p:cNvPr id="4" name="Rounded Rectangle 3"/>
-          <p:cNvSpPr/>
-          <p:nvPr/>
-        </p:nvSpPr>
-        <p:spPr>
-          <a:xfrm>
-            <a:off x="914400" y="777240"/>
-            <a:ext cx="3017520" cy="457200"/>
-          </a:xfrm>
-          <a:prstGeom prst="roundRect">
-            <a:avLst>
-              <a:gd name="adj" fmla="val 50000"/>
-            </a:avLst>
-          </a:prstGeom>
-          <a:solidFill>
-            <a:srgbClr val="E4F0F1"/>
-          </a:solidFill>
-          <a:ln w="12700">
-            <a:solidFill>
-              <a:srgbClr val="BEDDDF"/>
-            </a:solidFill>
-          </a:ln>
-          <a:effectLst/>
-        </p:spPr>
-        <p:style>
-          <a:lnRef idx="1">
-            <a:schemeClr val="accent1"/>
-          </a:lnRef>
-          <a:fillRef idx="3">
-            <a:schemeClr val="accent1"/>
-          </a:fillRef>
-          <a:effectRef idx="2">
-            <a:schemeClr val="accent1"/>
-          </a:effectRef>
-          <a:fontRef idx="minor">
-            <a:schemeClr val="lt1"/>
-          </a:fontRef>
-        </p:style>
-        <p:txBody>
-          <a:bodyPr rtlCol="0" anchor="ctr"/>
-          <a:lstStyle/>
-          <a:p>
-            <a:pPr algn="ctr"/>
-          </a:p>
-        </p:txBody>
-      </p:sp>
-      <p:sp>
-        <p:nvSpPr>
-          <p:cNvPr id="5" name="TextBox 4"/>
+          <p:cNvPr id="18" name="TextBox 17"/>
           <p:cNvSpPr txBox="1"/>
           <p:nvPr/>
         </p:nvSpPr>
         <p:spPr>
           <a:xfrm>
-            <a:off x="1143000" y="777240"/>
-            <a:ext cx="2834640" cy="457200"/>
+            <a:off x="1143000" y="4160520"/>
+            <a:ext cx="9966960" cy="274320"/>
           </a:xfrm>
           <a:prstGeom prst="rect">
             <a:avLst/>
@@ -3248,7 +3751,7 @@
           <a:noFill/>
         </p:spPr>
         <p:txBody>
-          <a:bodyPr wrap="square" anchor="ctr" lIns="0" rIns="0" tIns="0" bIns="0">
+          <a:bodyPr wrap="square" anchor="t" lIns="0" rIns="0" tIns="0" bIns="0">
             <a:spAutoFit/>
           </a:bodyPr>
           <a:lstStyle/>
@@ -3259,70 +3762,27 @@
               </a:spcAft>
             </a:pPr>
             <a:r>
-              <a:rPr sz="1150" b="1" i="0">
+              <a:rPr sz="1000" b="1" i="0">
                 <a:solidFill>
                   <a:srgbClr val="1F5C6B"/>
                 </a:solidFill>
                 <a:latin typeface="Consolas"/>
               </a:rPr>
-              <a:t>MENTIBLE FOR PHYSICIANS</a:t>
-            </a:r>
-          </a:p>
-        </p:txBody>
-      </p:sp>
-      <p:sp>
-        <p:nvSpPr>
-          <p:cNvPr id="6" name="TextBox 5"/>
+              <a:t>NOTE — MENTIBLE</a:t>
+            </a:r>
+          </a:p>
+        </p:txBody>
+      </p:sp>
+      <p:sp>
+        <p:nvSpPr>
+          <p:cNvPr id="19" name="TextBox 18"/>
           <p:cNvSpPr txBox="1"/>
           <p:nvPr/>
         </p:nvSpPr>
         <p:spPr>
           <a:xfrm>
-            <a:off x="914400" y="1783080"/>
-            <a:ext cx="10241280" cy="1554480"/>
-          </a:xfrm>
-          <a:prstGeom prst="rect">
-            <a:avLst/>
-          </a:prstGeom>
-          <a:noFill/>
-        </p:spPr>
-        <p:txBody>
-          <a:bodyPr wrap="square" anchor="t" lIns="0" rIns="0" tIns="0" bIns="0">
-            <a:spAutoFit/>
-          </a:bodyPr>
-          <a:lstStyle/>
-          <a:p>
-            <a:pPr algn="l">
-              <a:lnSpc>
-                <a:spcPct val="103000"/>
-              </a:lnSpc>
-              <a:spcAft>
-                <a:spcPts val="0"/>
-              </a:spcAft>
-            </a:pPr>
-            <a:r>
-              <a:rPr sz="4000" b="1" i="0">
-                <a:solidFill>
-                  <a:srgbClr val="17242E"/>
-                </a:solidFill>
-                <a:latin typeface="Georgia"/>
-              </a:rPr>
-              <a:t>Hi, Dr. Anaya.
-I'm Mentible.</a:t>
-            </a:r>
-          </a:p>
-        </p:txBody>
-      </p:sp>
-      <p:sp>
-        <p:nvSpPr>
-          <p:cNvPr id="7" name="TextBox 6"/>
-          <p:cNvSpPr txBox="1"/>
-          <p:nvPr/>
-        </p:nvSpPr>
-        <p:spPr>
-          <a:xfrm>
-            <a:off x="914400" y="3657600"/>
-            <a:ext cx="9875520" cy="1005840"/>
+            <a:off x="1143000" y="4480559"/>
+            <a:ext cx="9921240" cy="411479"/>
           </a:xfrm>
           <a:prstGeom prst="rect">
             <a:avLst/>
@@ -3344,161 +3804,27 @@
               </a:spcAft>
             </a:pPr>
             <a:r>
-              <a:rPr sz="1600" b="0" i="0">
-                <a:solidFill>
-                  <a:srgbClr val="566572"/>
-                </a:solidFill>
-                <a:latin typeface="Calibri"/>
+              <a:rPr sz="1500" b="0" i="0">
+                <a:solidFill>
+                  <a:srgbClr val="17242E"/>
+                </a:solidFill>
+                <a:latin typeface="Georgia"/>
               </a:rPr>
-              <a:t>Your papers, the notes you trust, your guidance — I'll write and answer from them, in your evidence, never a chatbot's guesses. Here's how we'd work together.</a:t>
-            </a:r>
-          </a:p>
-        </p:txBody>
-      </p:sp>
-      <p:sp>
-        <p:nvSpPr>
-          <p:cNvPr id="8" name="Oval 7"/>
-          <p:cNvSpPr/>
-          <p:nvPr/>
-        </p:nvSpPr>
-        <p:spPr>
-          <a:xfrm>
-            <a:off x="914400" y="5074920"/>
-            <a:ext cx="685800" cy="685800"/>
-          </a:xfrm>
-          <a:prstGeom prst="ellipse">
-            <a:avLst/>
-          </a:prstGeom>
-          <a:solidFill>
-            <a:srgbClr val="E4F0F1"/>
-          </a:solidFill>
-          <a:ln w="12700">
-            <a:solidFill>
-              <a:srgbClr val="BEDDDF"/>
-            </a:solidFill>
-          </a:ln>
-          <a:effectLst/>
-        </p:spPr>
-        <p:style>
-          <a:lnRef idx="1">
-            <a:schemeClr val="accent1"/>
-          </a:lnRef>
-          <a:fillRef idx="3">
-            <a:schemeClr val="accent1"/>
-          </a:fillRef>
-          <a:effectRef idx="2">
-            <a:schemeClr val="accent1"/>
-          </a:effectRef>
-          <a:fontRef idx="minor">
-            <a:schemeClr val="lt1"/>
-          </a:fontRef>
-        </p:style>
-        <p:txBody>
-          <a:bodyPr rtlCol="0" anchor="ctr"/>
-          <a:lstStyle/>
-          <a:p>
-            <a:pPr algn="ctr"/>
-          </a:p>
-        </p:txBody>
-      </p:sp>
-      <p:sp>
-        <p:nvSpPr>
-          <p:cNvPr id="9" name="Oval 8"/>
-          <p:cNvSpPr/>
-          <p:nvPr/>
-        </p:nvSpPr>
-        <p:spPr>
-          <a:xfrm>
-            <a:off x="1133856" y="5221224"/>
-            <a:ext cx="246888" cy="246888"/>
-          </a:xfrm>
-          <a:prstGeom prst="ellipse">
-            <a:avLst/>
-          </a:prstGeom>
-          <a:solidFill>
-            <a:srgbClr val="1F5C6B"/>
-          </a:solidFill>
-          <a:ln>
-            <a:noFill/>
-          </a:ln>
-          <a:effectLst/>
-        </p:spPr>
-        <p:style>
-          <a:lnRef idx="1">
-            <a:schemeClr val="accent1"/>
-          </a:lnRef>
-          <a:fillRef idx="3">
-            <a:schemeClr val="accent1"/>
-          </a:fillRef>
-          <a:effectRef idx="2">
-            <a:schemeClr val="accent1"/>
-          </a:effectRef>
-          <a:fontRef idx="minor">
-            <a:schemeClr val="lt1"/>
-          </a:fontRef>
-        </p:style>
-        <p:txBody>
-          <a:bodyPr rtlCol="0" anchor="ctr"/>
-          <a:lstStyle/>
-          <a:p>
-            <a:pPr algn="ctr"/>
-          </a:p>
-        </p:txBody>
-      </p:sp>
-      <p:sp>
-        <p:nvSpPr>
-          <p:cNvPr id="10" name="Oval 9"/>
-          <p:cNvSpPr/>
-          <p:nvPr/>
-        </p:nvSpPr>
-        <p:spPr>
-          <a:xfrm>
-            <a:off x="1014984" y="5486400"/>
-            <a:ext cx="484632" cy="310896"/>
-          </a:xfrm>
-          <a:prstGeom prst="ellipse">
-            <a:avLst/>
-          </a:prstGeom>
-          <a:solidFill>
-            <a:srgbClr val="1F5C6B"/>
-          </a:solidFill>
-          <a:ln>
-            <a:noFill/>
-          </a:ln>
-          <a:effectLst/>
-        </p:spPr>
-        <p:style>
-          <a:lnRef idx="1">
-            <a:schemeClr val="accent1"/>
-          </a:lnRef>
-          <a:fillRef idx="3">
-            <a:schemeClr val="accent1"/>
-          </a:fillRef>
-          <a:effectRef idx="2">
-            <a:schemeClr val="accent1"/>
-          </a:effectRef>
-          <a:fontRef idx="minor">
-            <a:schemeClr val="lt1"/>
-          </a:fontRef>
-        </p:style>
-        <p:txBody>
-          <a:bodyPr rtlCol="0" anchor="ctr"/>
-          <a:lstStyle/>
-          <a:p>
-            <a:pPr algn="ctr"/>
-          </a:p>
-        </p:txBody>
-      </p:sp>
-      <p:sp>
-        <p:nvSpPr>
-          <p:cNvPr id="11" name="TextBox 10"/>
+              <a:t>I read only what you trust, and I cite it back to you. No guessing near a patient.</a:t>
+            </a:r>
+          </a:p>
+        </p:txBody>
+      </p:sp>
+      <p:sp>
+        <p:nvSpPr>
+          <p:cNvPr id="20" name="TextBox 19"/>
           <p:cNvSpPr txBox="1"/>
           <p:nvPr/>
         </p:nvSpPr>
         <p:spPr>
           <a:xfrm>
-            <a:off x="1783080" y="5120640"/>
-            <a:ext cx="8686800" cy="365760"/>
+            <a:off x="822960" y="5257800"/>
+            <a:ext cx="10515600" cy="320040"/>
           </a:xfrm>
           <a:prstGeom prst="rect">
             <a:avLst/>
@@ -3517,27 +3843,27 @@
               </a:spcAft>
             </a:pPr>
             <a:r>
-              <a:rPr sz="1500" b="1" i="0">
-                <a:solidFill>
-                  <a:srgbClr val="17242E"/>
-                </a:solidFill>
-                <a:latin typeface="Calibri"/>
+              <a:rPr sz="950" b="0" i="0">
+                <a:solidFill>
+                  <a:srgbClr val="5A6A72"/>
+                </a:solidFill>
+                <a:latin typeface="Consolas"/>
               </a:rPr>
-              <a:t>Talking to: Dr. Anaya</a:t>
-            </a:r>
-          </a:p>
-        </p:txBody>
-      </p:sp>
-      <p:sp>
-        <p:nvSpPr>
-          <p:cNvPr id="12" name="TextBox 11"/>
+              <a:t>PATIENT</a:t>
+            </a:r>
+          </a:p>
+        </p:txBody>
+      </p:sp>
+      <p:sp>
+        <p:nvSpPr>
+          <p:cNvPr id="21" name="TextBox 20"/>
           <p:cNvSpPr txBox="1"/>
           <p:nvPr/>
         </p:nvSpPr>
         <p:spPr>
           <a:xfrm>
-            <a:off x="1801368" y="5486400"/>
-            <a:ext cx="8686800" cy="365760"/>
+            <a:off x="822960" y="5532120"/>
+            <a:ext cx="10515600" cy="365760"/>
           </a:xfrm>
           <a:prstGeom prst="rect">
             <a:avLst/>
@@ -3556,13 +3882,22 @@
               </a:spcAft>
             </a:pPr>
             <a:r>
+              <a:rPr sz="1500" b="1" i="0">
+                <a:solidFill>
+                  <a:srgbClr val="17242E"/>
+                </a:solidFill>
+                <a:latin typeface="Georgia"/>
+              </a:rPr>
+              <a:t>Dr. Anaya</a:t>
+            </a:r>
+            <a:r>
               <a:rPr sz="1200" b="0" i="0">
                 <a:solidFill>
-                  <a:srgbClr val="566572"/>
-                </a:solidFill>
-                <a:latin typeface="Calibri"/>
+                  <a:srgbClr val="5A6A72"/>
+                </a:solidFill>
+                <a:latin typeface="Consolas"/>
               </a:rPr>
-              <a:t>Internal-medicine physician</a:t>
+              <a:t>   internal-medicine physician</a:t>
             </a:r>
           </a:p>
         </p:txBody>
@@ -3600,7 +3935,7 @@
             <a:avLst/>
           </a:prstGeom>
           <a:solidFill>
-            <a:srgbClr val="FBFAF9"/>
+            <a:srgbClr val="F4F6F5"/>
           </a:solidFill>
           <a:ln>
             <a:noFill/>
@@ -3631,27 +3966,23 @@
       </p:sp>
       <p:sp>
         <p:nvSpPr>
-          <p:cNvPr id="3" name="Rounded Rectangle 2"/>
+          <p:cNvPr id="3" name="Rectangle 2"/>
           <p:cNvSpPr/>
           <p:nvPr/>
         </p:nvSpPr>
         <p:spPr>
           <a:xfrm>
-            <a:off x="914400" y="566928"/>
-            <a:ext cx="457200" cy="457200"/>
-          </a:xfrm>
-          <a:prstGeom prst="roundRect">
-            <a:avLst>
-              <a:gd name="adj" fmla="val 28000"/>
-            </a:avLst>
+            <a:off x="0" y="0"/>
+            <a:ext cx="12191695" cy="658368"/>
+          </a:xfrm>
+          <a:prstGeom prst="rect">
+            <a:avLst/>
           </a:prstGeom>
           <a:solidFill>
             <a:srgbClr val="E4F0F1"/>
           </a:solidFill>
-          <a:ln w="12700">
-            <a:solidFill>
-              <a:srgbClr val="BEDDDF"/>
-            </a:solidFill>
+          <a:ln>
+            <a:noFill/>
           </a:ln>
           <a:effectLst/>
         </p:spPr>
@@ -3679,40 +4010,45 @@
       </p:sp>
       <p:sp>
         <p:nvSpPr>
-          <p:cNvPr id="4" name="TextBox 3"/>
-          <p:cNvSpPr txBox="1"/>
-          <p:nvPr/>
-        </p:nvSpPr>
-        <p:spPr>
-          <a:xfrm>
-            <a:off x="914400" y="566928"/>
-            <a:ext cx="457200" cy="457200"/>
-          </a:xfrm>
-          <a:prstGeom prst="rect">
-            <a:avLst/>
-          </a:prstGeom>
-          <a:noFill/>
-        </p:spPr>
-        <p:txBody>
-          <a:bodyPr wrap="square" anchor="ctr" lIns="0" rIns="0" tIns="0" bIns="0">
-            <a:spAutoFit/>
-          </a:bodyPr>
-          <a:lstStyle/>
-          <a:p>
-            <a:pPr algn="ctr">
-              <a:spcAft>
-                <a:spcPts val="0"/>
-              </a:spcAft>
-            </a:pPr>
-            <a:r>
-              <a:rPr sz="1500" b="1" i="0">
-                <a:solidFill>
-                  <a:srgbClr val="1F5C6B"/>
-                </a:solidFill>
-                <a:latin typeface="Consolas"/>
-              </a:rPr>
-              <a:t>1</a:t>
-            </a:r>
+          <p:cNvPr id="4" name="Rectangle 3"/>
+          <p:cNvSpPr/>
+          <p:nvPr/>
+        </p:nvSpPr>
+        <p:spPr>
+          <a:xfrm>
+            <a:off x="0" y="658368"/>
+            <a:ext cx="12191695" cy="18288"/>
+          </a:xfrm>
+          <a:prstGeom prst="rect">
+            <a:avLst/>
+          </a:prstGeom>
+          <a:solidFill>
+            <a:srgbClr val="BEDDDF"/>
+          </a:solidFill>
+          <a:ln>
+            <a:noFill/>
+          </a:ln>
+          <a:effectLst/>
+        </p:spPr>
+        <p:style>
+          <a:lnRef idx="1">
+            <a:schemeClr val="accent1"/>
+          </a:lnRef>
+          <a:fillRef idx="3">
+            <a:schemeClr val="accent1"/>
+          </a:fillRef>
+          <a:effectRef idx="2">
+            <a:schemeClr val="accent1"/>
+          </a:effectRef>
+          <a:fontRef idx="minor">
+            <a:schemeClr val="lt1"/>
+          </a:fontRef>
+        </p:style>
+        <p:txBody>
+          <a:bodyPr rtlCol="0" anchor="ctr"/>
+          <a:lstStyle/>
+          <a:p>
+            <a:pPr algn="ctr"/>
           </a:p>
         </p:txBody>
       </p:sp>
@@ -3724,8 +4060,8 @@
         </p:nvSpPr>
         <p:spPr>
           <a:xfrm>
-            <a:off x="1508760" y="548640"/>
-            <a:ext cx="9601200" cy="320040"/>
+            <a:off x="822960" y="0"/>
+            <a:ext cx="4572000" cy="658368"/>
           </a:xfrm>
           <a:prstGeom prst="rect">
             <a:avLst/>
@@ -3744,13 +4080,13 @@
               </a:spcAft>
             </a:pPr>
             <a:r>
-              <a:rPr sz="1050" b="0" i="0">
-                <a:solidFill>
-                  <a:srgbClr val="566572"/>
+              <a:rPr sz="1100" b="1" i="0">
+                <a:solidFill>
+                  <a:srgbClr val="1F5C6B"/>
                 </a:solidFill>
                 <a:latin typeface="Consolas"/>
               </a:rPr>
-              <a:t>FIRST — I KNOW YOUR PROBLEM</a:t>
+              <a:t>MENTIBLE CLINICAL</a:t>
             </a:r>
           </a:p>
         </p:txBody>
@@ -3763,8 +4099,8 @@
         </p:nvSpPr>
         <p:spPr>
           <a:xfrm>
-            <a:off x="1508760" y="868680"/>
-            <a:ext cx="9692640" cy="320040"/>
+            <a:off x="4206240" y="0"/>
+            <a:ext cx="5394960" cy="658368"/>
           </a:xfrm>
           <a:prstGeom prst="rect">
             <a:avLst/>
@@ -3772,38 +4108,290 @@
           <a:noFill/>
         </p:spPr>
         <p:txBody>
-          <a:bodyPr wrap="square" anchor="t" lIns="0" rIns="0" tIns="0" bIns="0">
+          <a:bodyPr wrap="square" anchor="ctr" lIns="0" rIns="0" tIns="0" bIns="0">
             <a:spAutoFit/>
           </a:bodyPr>
           <a:lstStyle/>
           <a:p>
-            <a:pPr algn="l">
+            <a:pPr algn="r">
               <a:spcAft>
                 <a:spcPts val="0"/>
               </a:spcAft>
             </a:pPr>
             <a:r>
-              <a:rPr sz="600" b="0" i="0">
-                <a:solidFill>
-                  <a:srgbClr val="17242E"/>
-                </a:solidFill>
-                <a:latin typeface="Calibri"/>
+              <a:rPr sz="1100" b="0" i="0">
+                <a:solidFill>
+                  <a:srgbClr val="5A6A72"/>
+                </a:solidFill>
+                <a:latin typeface="Consolas"/>
               </a:rPr>
-              <a:t/>
-            </a:r>
-          </a:p>
-        </p:txBody>
-      </p:sp>
-      <p:sp>
-        <p:nvSpPr>
-          <p:cNvPr id="7" name="TextBox 6"/>
+              <a:t>SECTION 01 — PROBLEM LIST</a:t>
+            </a:r>
+          </a:p>
+        </p:txBody>
+      </p:sp>
+      <p:cxnSp>
+        <p:nvCxnSpPr>
+          <p:cNvPr id="7" name="Connector 6"/>
+          <p:cNvCxnSpPr/>
+          <p:nvPr/>
+        </p:nvCxnSpPr>
+        <p:spPr>
+          <a:xfrm>
+            <a:off x="10058400" y="329184"/>
+            <a:ext cx="590702" cy="0"/>
+          </a:xfrm>
+          <a:prstGeom prst="line">
+            <a:avLst/>
+          </a:prstGeom>
+          <a:ln w="22225">
+            <a:solidFill>
+              <a:srgbClr val="C0483C"/>
+            </a:solidFill>
+          </a:ln>
+          <a:effectLst/>
+        </p:spPr>
+        <p:style>
+          <a:lnRef idx="2">
+            <a:schemeClr val="accent1"/>
+          </a:lnRef>
+          <a:fillRef idx="0">
+            <a:schemeClr val="accent1"/>
+          </a:fillRef>
+          <a:effectRef idx="1">
+            <a:schemeClr val="accent1"/>
+          </a:effectRef>
+          <a:fontRef idx="minor">
+            <a:schemeClr val="tx1"/>
+          </a:fontRef>
+        </p:style>
+      </p:cxnSp>
+      <p:cxnSp>
+        <p:nvCxnSpPr>
+          <p:cNvPr id="8" name="Connector 7"/>
+          <p:cNvCxnSpPr/>
+          <p:nvPr/>
+        </p:nvCxnSpPr>
+        <p:spPr>
+          <a:xfrm>
+            <a:off x="10649102" y="329184"/>
+            <a:ext cx="104242" cy="91439"/>
+          </a:xfrm>
+          <a:prstGeom prst="line">
+            <a:avLst/>
+          </a:prstGeom>
+          <a:ln w="22225">
+            <a:solidFill>
+              <a:srgbClr val="C0483C"/>
+            </a:solidFill>
+          </a:ln>
+          <a:effectLst/>
+        </p:spPr>
+        <p:style>
+          <a:lnRef idx="2">
+            <a:schemeClr val="accent1"/>
+          </a:lnRef>
+          <a:fillRef idx="0">
+            <a:schemeClr val="accent1"/>
+          </a:fillRef>
+          <a:effectRef idx="1">
+            <a:schemeClr val="accent1"/>
+          </a:effectRef>
+          <a:fontRef idx="minor">
+            <a:schemeClr val="tx1"/>
+          </a:fontRef>
+        </p:style>
+      </p:cxnSp>
+      <p:cxnSp>
+        <p:nvCxnSpPr>
+          <p:cNvPr id="9" name="Connector 8"/>
+          <p:cNvCxnSpPr/>
+          <p:nvPr/>
+        </p:nvCxnSpPr>
+        <p:spPr>
+          <a:xfrm flipV="1">
+            <a:off x="10753344" y="310896"/>
+            <a:ext cx="86868" cy="109727"/>
+          </a:xfrm>
+          <a:prstGeom prst="line">
+            <a:avLst/>
+          </a:prstGeom>
+          <a:ln w="22225">
+            <a:solidFill>
+              <a:srgbClr val="C0483C"/>
+            </a:solidFill>
+          </a:ln>
+          <a:effectLst/>
+        </p:spPr>
+        <p:style>
+          <a:lnRef idx="2">
+            <a:schemeClr val="accent1"/>
+          </a:lnRef>
+          <a:fillRef idx="0">
+            <a:schemeClr val="accent1"/>
+          </a:fillRef>
+          <a:effectRef idx="1">
+            <a:schemeClr val="accent1"/>
+          </a:effectRef>
+          <a:fontRef idx="minor">
+            <a:schemeClr val="tx1"/>
+          </a:fontRef>
+        </p:style>
+      </p:cxnSp>
+      <p:cxnSp>
+        <p:nvCxnSpPr>
+          <p:cNvPr id="10" name="Connector 9"/>
+          <p:cNvCxnSpPr/>
+          <p:nvPr/>
+        </p:nvCxnSpPr>
+        <p:spPr>
+          <a:xfrm flipV="1">
+            <a:off x="10840212" y="18287"/>
+            <a:ext cx="69494" cy="292609"/>
+          </a:xfrm>
+          <a:prstGeom prst="line">
+            <a:avLst/>
+          </a:prstGeom>
+          <a:ln w="22225">
+            <a:solidFill>
+              <a:srgbClr val="C0483C"/>
+            </a:solidFill>
+          </a:ln>
+          <a:effectLst/>
+        </p:spPr>
+        <p:style>
+          <a:lnRef idx="2">
+            <a:schemeClr val="accent1"/>
+          </a:lnRef>
+          <a:fillRef idx="0">
+            <a:schemeClr val="accent1"/>
+          </a:fillRef>
+          <a:effectRef idx="1">
+            <a:schemeClr val="accent1"/>
+          </a:effectRef>
+          <a:fontRef idx="minor">
+            <a:schemeClr val="tx1"/>
+          </a:fontRef>
+        </p:style>
+      </p:cxnSp>
+      <p:cxnSp>
+        <p:nvCxnSpPr>
+          <p:cNvPr id="11" name="Connector 10"/>
+          <p:cNvCxnSpPr/>
+          <p:nvPr/>
+        </p:nvCxnSpPr>
+        <p:spPr>
+          <a:xfrm>
+            <a:off x="10909706" y="18287"/>
+            <a:ext cx="86868" cy="438913"/>
+          </a:xfrm>
+          <a:prstGeom prst="line">
+            <a:avLst/>
+          </a:prstGeom>
+          <a:ln w="22225">
+            <a:solidFill>
+              <a:srgbClr val="C0483C"/>
+            </a:solidFill>
+          </a:ln>
+          <a:effectLst/>
+        </p:spPr>
+        <p:style>
+          <a:lnRef idx="2">
+            <a:schemeClr val="accent1"/>
+          </a:lnRef>
+          <a:fillRef idx="0">
+            <a:schemeClr val="accent1"/>
+          </a:fillRef>
+          <a:effectRef idx="1">
+            <a:schemeClr val="accent1"/>
+          </a:effectRef>
+          <a:fontRef idx="minor">
+            <a:schemeClr val="tx1"/>
+          </a:fontRef>
+        </p:style>
+      </p:cxnSp>
+      <p:cxnSp>
+        <p:nvCxnSpPr>
+          <p:cNvPr id="12" name="Connector 11"/>
+          <p:cNvCxnSpPr/>
+          <p:nvPr/>
+        </p:nvCxnSpPr>
+        <p:spPr>
+          <a:xfrm flipV="1">
+            <a:off x="10996574" y="329184"/>
+            <a:ext cx="86868" cy="128016"/>
+          </a:xfrm>
+          <a:prstGeom prst="line">
+            <a:avLst/>
+          </a:prstGeom>
+          <a:ln w="22225">
+            <a:solidFill>
+              <a:srgbClr val="C0483C"/>
+            </a:solidFill>
+          </a:ln>
+          <a:effectLst/>
+        </p:spPr>
+        <p:style>
+          <a:lnRef idx="2">
+            <a:schemeClr val="accent1"/>
+          </a:lnRef>
+          <a:fillRef idx="0">
+            <a:schemeClr val="accent1"/>
+          </a:fillRef>
+          <a:effectRef idx="1">
+            <a:schemeClr val="accent1"/>
+          </a:effectRef>
+          <a:fontRef idx="minor">
+            <a:schemeClr val="tx1"/>
+          </a:fontRef>
+        </p:style>
+      </p:cxnSp>
+      <p:cxnSp>
+        <p:nvCxnSpPr>
+          <p:cNvPr id="13" name="Connector 12"/>
+          <p:cNvCxnSpPr/>
+          <p:nvPr/>
+        </p:nvCxnSpPr>
+        <p:spPr>
+          <a:xfrm>
+            <a:off x="11083442" y="329184"/>
+            <a:ext cx="712318" cy="0"/>
+          </a:xfrm>
+          <a:prstGeom prst="line">
+            <a:avLst/>
+          </a:prstGeom>
+          <a:ln w="22225">
+            <a:solidFill>
+              <a:srgbClr val="C0483C"/>
+            </a:solidFill>
+          </a:ln>
+          <a:effectLst/>
+        </p:spPr>
+        <p:style>
+          <a:lnRef idx="2">
+            <a:schemeClr val="accent1"/>
+          </a:lnRef>
+          <a:fillRef idx="0">
+            <a:schemeClr val="accent1"/>
+          </a:fillRef>
+          <a:effectRef idx="1">
+            <a:schemeClr val="accent1"/>
+          </a:effectRef>
+          <a:fontRef idx="minor">
+            <a:schemeClr val="tx1"/>
+          </a:fontRef>
+        </p:style>
+      </p:cxnSp>
+      <p:sp>
+        <p:nvSpPr>
+          <p:cNvPr id="14" name="TextBox 13"/>
           <p:cNvSpPr txBox="1"/>
           <p:nvPr/>
         </p:nvSpPr>
         <p:spPr>
           <a:xfrm>
-            <a:off x="914400" y="1234440"/>
-            <a:ext cx="10424160" cy="822960"/>
+            <a:off x="822960" y="960120"/>
+            <a:ext cx="10607040" cy="914400"/>
           </a:xfrm>
           <a:prstGeom prst="rect">
             <a:avLst/>
@@ -3825,7 +4413,7 @@
               </a:spcAft>
             </a:pPr>
             <a:r>
-              <a:rPr sz="2500" b="1" i="0">
+              <a:rPr sz="2400" b="1" i="0">
                 <a:solidFill>
                   <a:srgbClr val="17242E"/>
                 </a:solidFill>
@@ -3838,27 +4426,23 @@
       </p:sp>
       <p:sp>
         <p:nvSpPr>
-          <p:cNvPr id="8" name="Rounded Rectangle 7"/>
+          <p:cNvPr id="15" name="Rectangle 14"/>
           <p:cNvSpPr/>
           <p:nvPr/>
         </p:nvSpPr>
         <p:spPr>
           <a:xfrm>
-            <a:off x="914400" y="2286000"/>
-            <a:ext cx="10360152" cy="2651760"/>
-          </a:xfrm>
-          <a:prstGeom prst="roundRect">
-            <a:avLst>
-              <a:gd name="adj" fmla="val 5000"/>
-            </a:avLst>
+            <a:off x="822960" y="2286000"/>
+            <a:ext cx="54864" cy="1901952"/>
+          </a:xfrm>
+          <a:prstGeom prst="rect">
+            <a:avLst/>
           </a:prstGeom>
           <a:solidFill>
-            <a:srgbClr val="FFFFFF"/>
+            <a:srgbClr val="C0483C"/>
           </a:solidFill>
-          <a:ln w="12700">
-            <a:solidFill>
-              <a:srgbClr val="DDDFDD"/>
-            </a:solidFill>
+          <a:ln>
+            <a:noFill/>
           </a:ln>
           <a:effectLst/>
         </p:spPr>
@@ -3886,58 +4470,14 @@
       </p:sp>
       <p:sp>
         <p:nvSpPr>
-          <p:cNvPr id="9" name="Rectangle 8"/>
-          <p:cNvSpPr/>
-          <p:nvPr/>
-        </p:nvSpPr>
-        <p:spPr>
-          <a:xfrm>
-            <a:off x="914400" y="2286000"/>
-            <a:ext cx="73152" cy="2651760"/>
-          </a:xfrm>
-          <a:prstGeom prst="rect">
-            <a:avLst/>
-          </a:prstGeom>
-          <a:solidFill>
-            <a:srgbClr val="B5822E"/>
-          </a:solidFill>
-          <a:ln>
-            <a:noFill/>
-          </a:ln>
-          <a:effectLst/>
-        </p:spPr>
-        <p:style>
-          <a:lnRef idx="1">
-            <a:schemeClr val="accent1"/>
-          </a:lnRef>
-          <a:fillRef idx="3">
-            <a:schemeClr val="accent1"/>
-          </a:fillRef>
-          <a:effectRef idx="2">
-            <a:schemeClr val="accent1"/>
-          </a:effectRef>
-          <a:fontRef idx="minor">
-            <a:schemeClr val="lt1"/>
-          </a:fontRef>
-        </p:style>
-        <p:txBody>
-          <a:bodyPr rtlCol="0" anchor="ctr"/>
-          <a:lstStyle/>
-          <a:p>
-            <a:pPr algn="ctr"/>
-          </a:p>
-        </p:txBody>
-      </p:sp>
-      <p:sp>
-        <p:nvSpPr>
-          <p:cNvPr id="10" name="TextBox 9"/>
+          <p:cNvPr id="16" name="TextBox 15"/>
           <p:cNvSpPr txBox="1"/>
           <p:nvPr/>
         </p:nvSpPr>
         <p:spPr>
           <a:xfrm>
-            <a:off x="1280160" y="2606040"/>
-            <a:ext cx="9720072" cy="2103120"/>
+            <a:off x="1097280" y="2340864"/>
+            <a:ext cx="10241280" cy="566928"/>
           </a:xfrm>
           <a:prstGeom prst="rect">
             <a:avLst/>
@@ -3951,113 +4491,159 @@
           <a:lstStyle/>
           <a:p>
             <a:pPr algn="l">
-              <a:spcBef>
-                <a:spcPts val="0"/>
-              </a:spcBef>
+              <a:lnSpc>
+                <a:spcPct val="105000"/>
+              </a:lnSpc>
               <a:spcAft>
                 <a:spcPts val="0"/>
               </a:spcAft>
             </a:pPr>
             <a:r>
+              <a:rPr sz="1300" b="1" i="0">
+                <a:solidFill>
+                  <a:srgbClr val="C0483C"/>
+                </a:solidFill>
+                <a:latin typeface="Consolas"/>
+              </a:rPr>
+              <a:t>▪ </a:t>
+            </a:r>
+            <a:r>
               <a:rPr sz="1400" b="1" i="0">
                 <a:solidFill>
-                  <a:srgbClr val="B5822E"/>
-                </a:solidFill>
-                <a:latin typeface="Calibri"/>
-              </a:rPr>
-              <a:t>•  </a:t>
-            </a:r>
-            <a:r>
-              <a:rPr sz="1400" b="1" i="0">
-                <a:solidFill>
                   <a:srgbClr val="17242E"/>
                 </a:solidFill>
-                <a:latin typeface="Calibri"/>
+                <a:latin typeface="Georgia"/>
               </a:rPr>
               <a:t>Your evidence lives everywhere.  </a:t>
             </a:r>
             <a:r>
-              <a:rPr sz="1300" b="0" i="0">
-                <a:solidFill>
-                  <a:srgbClr val="566572"/>
-                </a:solidFill>
-                <a:latin typeface="Calibri"/>
+              <a:rPr sz="1250" b="0" i="0">
+                <a:solidFill>
+                  <a:srgbClr val="5A6A72"/>
+                </a:solidFill>
+                <a:latin typeface="Georgia"/>
               </a:rPr>
-              <a:t>Guideline PDFs, bookmarked papers, a drug reference, years of your notes — none of it talks to each other.</a:t>
-            </a:r>
-          </a:p>
+              <a:t>Guideline PDFs, papers, a drug reference, years of your notes — none of it talks to each other.</a:t>
+            </a:r>
+          </a:p>
+        </p:txBody>
+      </p:sp>
+      <p:sp>
+        <p:nvSpPr>
+          <p:cNvPr id="17" name="TextBox 16"/>
+          <p:cNvSpPr txBox="1"/>
+          <p:nvPr/>
+        </p:nvSpPr>
+        <p:spPr>
+          <a:xfrm>
+            <a:off x="1097280" y="2944368"/>
+            <a:ext cx="10241280" cy="566928"/>
+          </a:xfrm>
+          <a:prstGeom prst="rect">
+            <a:avLst/>
+          </a:prstGeom>
+          <a:noFill/>
+        </p:spPr>
+        <p:txBody>
+          <a:bodyPr wrap="square" anchor="t" lIns="0" rIns="0" tIns="0" bIns="0">
+            <a:spAutoFit/>
+          </a:bodyPr>
+          <a:lstStyle/>
           <a:p>
             <a:pPr algn="l">
-              <a:spcBef>
-                <a:spcPts val="1200"/>
-              </a:spcBef>
+              <a:lnSpc>
+                <a:spcPct val="105000"/>
+              </a:lnSpc>
               <a:spcAft>
                 <a:spcPts val="0"/>
               </a:spcAft>
             </a:pPr>
             <a:r>
+              <a:rPr sz="1300" b="1" i="0">
+                <a:solidFill>
+                  <a:srgbClr val="C0483C"/>
+                </a:solidFill>
+                <a:latin typeface="Consolas"/>
+              </a:rPr>
+              <a:t>▪ </a:t>
+            </a:r>
+            <a:r>
               <a:rPr sz="1400" b="1" i="0">
                 <a:solidFill>
-                  <a:srgbClr val="B5822E"/>
-                </a:solidFill>
-                <a:latin typeface="Calibri"/>
-              </a:rPr>
-              <a:t>•  </a:t>
-            </a:r>
-            <a:r>
-              <a:rPr sz="1400" b="1" i="0">
-                <a:solidFill>
                   <a:srgbClr val="17242E"/>
                 </a:solidFill>
-                <a:latin typeface="Calibri"/>
+                <a:latin typeface="Georgia"/>
               </a:rPr>
               <a:t>You have no time.  </a:t>
             </a:r>
             <a:r>
-              <a:rPr sz="1300" b="0" i="0">
-                <a:solidFill>
-                  <a:srgbClr val="566572"/>
-                </a:solidFill>
-                <a:latin typeface="Calibri"/>
+              <a:rPr sz="1250" b="0" i="0">
+                <a:solidFill>
+                  <a:srgbClr val="5A6A72"/>
+                </a:solidFill>
+                <a:latin typeface="Georgia"/>
               </a:rPr>
-              <a:t>Writing a patient handout or checking a protocol means digging through all of it, by hand.</a:t>
-            </a:r>
-          </a:p>
+              <a:t>Writing a handout or checking a protocol means digging through all of it, by hand.</a:t>
+            </a:r>
+          </a:p>
+        </p:txBody>
+      </p:sp>
+      <p:sp>
+        <p:nvSpPr>
+          <p:cNvPr id="18" name="TextBox 17"/>
+          <p:cNvSpPr txBox="1"/>
+          <p:nvPr/>
+        </p:nvSpPr>
+        <p:spPr>
+          <a:xfrm>
+            <a:off x="1097280" y="3547872"/>
+            <a:ext cx="10241280" cy="566928"/>
+          </a:xfrm>
+          <a:prstGeom prst="rect">
+            <a:avLst/>
+          </a:prstGeom>
+          <a:noFill/>
+        </p:spPr>
+        <p:txBody>
+          <a:bodyPr wrap="square" anchor="t" lIns="0" rIns="0" tIns="0" bIns="0">
+            <a:spAutoFit/>
+          </a:bodyPr>
+          <a:lstStyle/>
           <a:p>
             <a:pPr algn="l">
-              <a:spcBef>
-                <a:spcPts val="1200"/>
-              </a:spcBef>
+              <a:lnSpc>
+                <a:spcPct val="105000"/>
+              </a:lnSpc>
               <a:spcAft>
                 <a:spcPts val="0"/>
               </a:spcAft>
             </a:pPr>
             <a:r>
+              <a:rPr sz="1300" b="1" i="0">
+                <a:solidFill>
+                  <a:srgbClr val="C0483C"/>
+                </a:solidFill>
+                <a:latin typeface="Consolas"/>
+              </a:rPr>
+              <a:t>▪ </a:t>
+            </a:r>
+            <a:r>
               <a:rPr sz="1400" b="1" i="0">
                 <a:solidFill>
-                  <a:srgbClr val="B5822E"/>
-                </a:solidFill>
-                <a:latin typeface="Calibri"/>
-              </a:rPr>
-              <a:t>•  </a:t>
-            </a:r>
-            <a:r>
-              <a:rPr sz="1400" b="1" i="0">
-                <a:solidFill>
                   <a:srgbClr val="17242E"/>
                 </a:solidFill>
-                <a:latin typeface="Calibri"/>
+                <a:latin typeface="Georgia"/>
               </a:rPr>
               <a:t>The generic chatbots?  </a:t>
             </a:r>
             <a:r>
-              <a:rPr sz="1300" b="0" i="0">
-                <a:solidFill>
-                  <a:srgbClr val="566572"/>
-                </a:solidFill>
-                <a:latin typeface="Calibri"/>
+              <a:rPr sz="1250" b="0" i="0">
+                <a:solidFill>
+                  <a:srgbClr val="5A6A72"/>
+                </a:solidFill>
+                <a:latin typeface="Georgia"/>
               </a:rPr>
-              <a:t>They sound certain, invent citations, and don't answer from your sources. I wouldn't trust them near a patient either.</a:t>
+              <a:t>They sound certain, invent citations, don't answer from your sources. Not safe near a patient.</a:t>
             </a:r>
           </a:p>
         </p:txBody>
@@ -4095,7 +4681,7 @@
             <a:avLst/>
           </a:prstGeom>
           <a:solidFill>
-            <a:srgbClr val="FBFAF9"/>
+            <a:srgbClr val="F4F6F5"/>
           </a:solidFill>
           <a:ln>
             <a:noFill/>
@@ -4126,18 +4712,1150 @@
       </p:sp>
       <p:sp>
         <p:nvSpPr>
-          <p:cNvPr id="3" name="Rounded Rectangle 2"/>
+          <p:cNvPr id="3" name="Rectangle 2"/>
           <p:cNvSpPr/>
           <p:nvPr/>
         </p:nvSpPr>
         <p:spPr>
           <a:xfrm>
-            <a:off x="914400" y="566928"/>
-            <a:ext cx="457200" cy="457200"/>
+            <a:off x="0" y="0"/>
+            <a:ext cx="12191695" cy="658368"/>
+          </a:xfrm>
+          <a:prstGeom prst="rect">
+            <a:avLst/>
+          </a:prstGeom>
+          <a:solidFill>
+            <a:srgbClr val="E4F0F1"/>
+          </a:solidFill>
+          <a:ln>
+            <a:noFill/>
+          </a:ln>
+          <a:effectLst/>
+        </p:spPr>
+        <p:style>
+          <a:lnRef idx="1">
+            <a:schemeClr val="accent1"/>
+          </a:lnRef>
+          <a:fillRef idx="3">
+            <a:schemeClr val="accent1"/>
+          </a:fillRef>
+          <a:effectRef idx="2">
+            <a:schemeClr val="accent1"/>
+          </a:effectRef>
+          <a:fontRef idx="minor">
+            <a:schemeClr val="lt1"/>
+          </a:fontRef>
+        </p:style>
+        <p:txBody>
+          <a:bodyPr rtlCol="0" anchor="ctr"/>
+          <a:lstStyle/>
+          <a:p>
+            <a:pPr algn="ctr"/>
+          </a:p>
+        </p:txBody>
+      </p:sp>
+      <p:sp>
+        <p:nvSpPr>
+          <p:cNvPr id="4" name="Rectangle 3"/>
+          <p:cNvSpPr/>
+          <p:nvPr/>
+        </p:nvSpPr>
+        <p:spPr>
+          <a:xfrm>
+            <a:off x="0" y="658368"/>
+            <a:ext cx="12191695" cy="18288"/>
+          </a:xfrm>
+          <a:prstGeom prst="rect">
+            <a:avLst/>
+          </a:prstGeom>
+          <a:solidFill>
+            <a:srgbClr val="BEDDDF"/>
+          </a:solidFill>
+          <a:ln>
+            <a:noFill/>
+          </a:ln>
+          <a:effectLst/>
+        </p:spPr>
+        <p:style>
+          <a:lnRef idx="1">
+            <a:schemeClr val="accent1"/>
+          </a:lnRef>
+          <a:fillRef idx="3">
+            <a:schemeClr val="accent1"/>
+          </a:fillRef>
+          <a:effectRef idx="2">
+            <a:schemeClr val="accent1"/>
+          </a:effectRef>
+          <a:fontRef idx="minor">
+            <a:schemeClr val="lt1"/>
+          </a:fontRef>
+        </p:style>
+        <p:txBody>
+          <a:bodyPr rtlCol="0" anchor="ctr"/>
+          <a:lstStyle/>
+          <a:p>
+            <a:pPr algn="ctr"/>
+          </a:p>
+        </p:txBody>
+      </p:sp>
+      <p:sp>
+        <p:nvSpPr>
+          <p:cNvPr id="5" name="TextBox 4"/>
+          <p:cNvSpPr txBox="1"/>
+          <p:nvPr/>
+        </p:nvSpPr>
+        <p:spPr>
+          <a:xfrm>
+            <a:off x="822960" y="0"/>
+            <a:ext cx="4572000" cy="658368"/>
+          </a:xfrm>
+          <a:prstGeom prst="rect">
+            <a:avLst/>
+          </a:prstGeom>
+          <a:noFill/>
+        </p:spPr>
+        <p:txBody>
+          <a:bodyPr wrap="square" anchor="ctr" lIns="0" rIns="0" tIns="0" bIns="0">
+            <a:spAutoFit/>
+          </a:bodyPr>
+          <a:lstStyle/>
+          <a:p>
+            <a:pPr algn="l">
+              <a:spcAft>
+                <a:spcPts val="0"/>
+              </a:spcAft>
+            </a:pPr>
+            <a:r>
+              <a:rPr sz="1100" b="1" i="0">
+                <a:solidFill>
+                  <a:srgbClr val="1F5C6B"/>
+                </a:solidFill>
+                <a:latin typeface="Consolas"/>
+              </a:rPr>
+              <a:t>MENTIBLE CLINICAL</a:t>
+            </a:r>
+          </a:p>
+        </p:txBody>
+      </p:sp>
+      <p:sp>
+        <p:nvSpPr>
+          <p:cNvPr id="6" name="TextBox 5"/>
+          <p:cNvSpPr txBox="1"/>
+          <p:nvPr/>
+        </p:nvSpPr>
+        <p:spPr>
+          <a:xfrm>
+            <a:off x="4206240" y="0"/>
+            <a:ext cx="5394960" cy="658368"/>
+          </a:xfrm>
+          <a:prstGeom prst="rect">
+            <a:avLst/>
+          </a:prstGeom>
+          <a:noFill/>
+        </p:spPr>
+        <p:txBody>
+          <a:bodyPr wrap="square" anchor="ctr" lIns="0" rIns="0" tIns="0" bIns="0">
+            <a:spAutoFit/>
+          </a:bodyPr>
+          <a:lstStyle/>
+          <a:p>
+            <a:pPr algn="r">
+              <a:spcAft>
+                <a:spcPts val="0"/>
+              </a:spcAft>
+            </a:pPr>
+            <a:r>
+              <a:rPr sz="1100" b="0" i="0">
+                <a:solidFill>
+                  <a:srgbClr val="5A6A72"/>
+                </a:solidFill>
+                <a:latin typeface="Consolas"/>
+              </a:rPr>
+              <a:t>SECTION 02 — GETTING STARTED · FREE</a:t>
+            </a:r>
+          </a:p>
+        </p:txBody>
+      </p:sp>
+      <p:cxnSp>
+        <p:nvCxnSpPr>
+          <p:cNvPr id="7" name="Connector 6"/>
+          <p:cNvCxnSpPr/>
+          <p:nvPr/>
+        </p:nvCxnSpPr>
+        <p:spPr>
+          <a:xfrm>
+            <a:off x="10058400" y="329184"/>
+            <a:ext cx="590702" cy="0"/>
+          </a:xfrm>
+          <a:prstGeom prst="line">
+            <a:avLst/>
+          </a:prstGeom>
+          <a:ln w="22225">
+            <a:solidFill>
+              <a:srgbClr val="C0483C"/>
+            </a:solidFill>
+          </a:ln>
+          <a:effectLst/>
+        </p:spPr>
+        <p:style>
+          <a:lnRef idx="2">
+            <a:schemeClr val="accent1"/>
+          </a:lnRef>
+          <a:fillRef idx="0">
+            <a:schemeClr val="accent1"/>
+          </a:fillRef>
+          <a:effectRef idx="1">
+            <a:schemeClr val="accent1"/>
+          </a:effectRef>
+          <a:fontRef idx="minor">
+            <a:schemeClr val="tx1"/>
+          </a:fontRef>
+        </p:style>
+      </p:cxnSp>
+      <p:cxnSp>
+        <p:nvCxnSpPr>
+          <p:cNvPr id="8" name="Connector 7"/>
+          <p:cNvCxnSpPr/>
+          <p:nvPr/>
+        </p:nvCxnSpPr>
+        <p:spPr>
+          <a:xfrm>
+            <a:off x="10649102" y="329184"/>
+            <a:ext cx="104242" cy="91439"/>
+          </a:xfrm>
+          <a:prstGeom prst="line">
+            <a:avLst/>
+          </a:prstGeom>
+          <a:ln w="22225">
+            <a:solidFill>
+              <a:srgbClr val="C0483C"/>
+            </a:solidFill>
+          </a:ln>
+          <a:effectLst/>
+        </p:spPr>
+        <p:style>
+          <a:lnRef idx="2">
+            <a:schemeClr val="accent1"/>
+          </a:lnRef>
+          <a:fillRef idx="0">
+            <a:schemeClr val="accent1"/>
+          </a:fillRef>
+          <a:effectRef idx="1">
+            <a:schemeClr val="accent1"/>
+          </a:effectRef>
+          <a:fontRef idx="minor">
+            <a:schemeClr val="tx1"/>
+          </a:fontRef>
+        </p:style>
+      </p:cxnSp>
+      <p:cxnSp>
+        <p:nvCxnSpPr>
+          <p:cNvPr id="9" name="Connector 8"/>
+          <p:cNvCxnSpPr/>
+          <p:nvPr/>
+        </p:nvCxnSpPr>
+        <p:spPr>
+          <a:xfrm flipV="1">
+            <a:off x="10753344" y="310896"/>
+            <a:ext cx="86868" cy="109727"/>
+          </a:xfrm>
+          <a:prstGeom prst="line">
+            <a:avLst/>
+          </a:prstGeom>
+          <a:ln w="22225">
+            <a:solidFill>
+              <a:srgbClr val="C0483C"/>
+            </a:solidFill>
+          </a:ln>
+          <a:effectLst/>
+        </p:spPr>
+        <p:style>
+          <a:lnRef idx="2">
+            <a:schemeClr val="accent1"/>
+          </a:lnRef>
+          <a:fillRef idx="0">
+            <a:schemeClr val="accent1"/>
+          </a:fillRef>
+          <a:effectRef idx="1">
+            <a:schemeClr val="accent1"/>
+          </a:effectRef>
+          <a:fontRef idx="minor">
+            <a:schemeClr val="tx1"/>
+          </a:fontRef>
+        </p:style>
+      </p:cxnSp>
+      <p:cxnSp>
+        <p:nvCxnSpPr>
+          <p:cNvPr id="10" name="Connector 9"/>
+          <p:cNvCxnSpPr/>
+          <p:nvPr/>
+        </p:nvCxnSpPr>
+        <p:spPr>
+          <a:xfrm flipV="1">
+            <a:off x="10840212" y="18287"/>
+            <a:ext cx="69494" cy="292609"/>
+          </a:xfrm>
+          <a:prstGeom prst="line">
+            <a:avLst/>
+          </a:prstGeom>
+          <a:ln w="22225">
+            <a:solidFill>
+              <a:srgbClr val="C0483C"/>
+            </a:solidFill>
+          </a:ln>
+          <a:effectLst/>
+        </p:spPr>
+        <p:style>
+          <a:lnRef idx="2">
+            <a:schemeClr val="accent1"/>
+          </a:lnRef>
+          <a:fillRef idx="0">
+            <a:schemeClr val="accent1"/>
+          </a:fillRef>
+          <a:effectRef idx="1">
+            <a:schemeClr val="accent1"/>
+          </a:effectRef>
+          <a:fontRef idx="minor">
+            <a:schemeClr val="tx1"/>
+          </a:fontRef>
+        </p:style>
+      </p:cxnSp>
+      <p:cxnSp>
+        <p:nvCxnSpPr>
+          <p:cNvPr id="11" name="Connector 10"/>
+          <p:cNvCxnSpPr/>
+          <p:nvPr/>
+        </p:nvCxnSpPr>
+        <p:spPr>
+          <a:xfrm>
+            <a:off x="10909706" y="18287"/>
+            <a:ext cx="86868" cy="438913"/>
+          </a:xfrm>
+          <a:prstGeom prst="line">
+            <a:avLst/>
+          </a:prstGeom>
+          <a:ln w="22225">
+            <a:solidFill>
+              <a:srgbClr val="C0483C"/>
+            </a:solidFill>
+          </a:ln>
+          <a:effectLst/>
+        </p:spPr>
+        <p:style>
+          <a:lnRef idx="2">
+            <a:schemeClr val="accent1"/>
+          </a:lnRef>
+          <a:fillRef idx="0">
+            <a:schemeClr val="accent1"/>
+          </a:fillRef>
+          <a:effectRef idx="1">
+            <a:schemeClr val="accent1"/>
+          </a:effectRef>
+          <a:fontRef idx="minor">
+            <a:schemeClr val="tx1"/>
+          </a:fontRef>
+        </p:style>
+      </p:cxnSp>
+      <p:cxnSp>
+        <p:nvCxnSpPr>
+          <p:cNvPr id="12" name="Connector 11"/>
+          <p:cNvCxnSpPr/>
+          <p:nvPr/>
+        </p:nvCxnSpPr>
+        <p:spPr>
+          <a:xfrm flipV="1">
+            <a:off x="10996574" y="329184"/>
+            <a:ext cx="86868" cy="128016"/>
+          </a:xfrm>
+          <a:prstGeom prst="line">
+            <a:avLst/>
+          </a:prstGeom>
+          <a:ln w="22225">
+            <a:solidFill>
+              <a:srgbClr val="C0483C"/>
+            </a:solidFill>
+          </a:ln>
+          <a:effectLst/>
+        </p:spPr>
+        <p:style>
+          <a:lnRef idx="2">
+            <a:schemeClr val="accent1"/>
+          </a:lnRef>
+          <a:fillRef idx="0">
+            <a:schemeClr val="accent1"/>
+          </a:fillRef>
+          <a:effectRef idx="1">
+            <a:schemeClr val="accent1"/>
+          </a:effectRef>
+          <a:fontRef idx="minor">
+            <a:schemeClr val="tx1"/>
+          </a:fontRef>
+        </p:style>
+      </p:cxnSp>
+      <p:cxnSp>
+        <p:nvCxnSpPr>
+          <p:cNvPr id="13" name="Connector 12"/>
+          <p:cNvCxnSpPr/>
+          <p:nvPr/>
+        </p:nvCxnSpPr>
+        <p:spPr>
+          <a:xfrm>
+            <a:off x="11083442" y="329184"/>
+            <a:ext cx="712318" cy="0"/>
+          </a:xfrm>
+          <a:prstGeom prst="line">
+            <a:avLst/>
+          </a:prstGeom>
+          <a:ln w="22225">
+            <a:solidFill>
+              <a:srgbClr val="C0483C"/>
+            </a:solidFill>
+          </a:ln>
+          <a:effectLst/>
+        </p:spPr>
+        <p:style>
+          <a:lnRef idx="2">
+            <a:schemeClr val="accent1"/>
+          </a:lnRef>
+          <a:fillRef idx="0">
+            <a:schemeClr val="accent1"/>
+          </a:fillRef>
+          <a:effectRef idx="1">
+            <a:schemeClr val="accent1"/>
+          </a:effectRef>
+          <a:fontRef idx="minor">
+            <a:schemeClr val="tx1"/>
+          </a:fontRef>
+        </p:style>
+      </p:cxnSp>
+      <p:sp>
+        <p:nvSpPr>
+          <p:cNvPr id="14" name="TextBox 13"/>
+          <p:cNvSpPr txBox="1"/>
+          <p:nvPr/>
+        </p:nvSpPr>
+        <p:spPr>
+          <a:xfrm>
+            <a:off x="822960" y="960120"/>
+            <a:ext cx="10607040" cy="640080"/>
+          </a:xfrm>
+          <a:prstGeom prst="rect">
+            <a:avLst/>
+          </a:prstGeom>
+          <a:noFill/>
+        </p:spPr>
+        <p:txBody>
+          <a:bodyPr wrap="square" anchor="t" lIns="0" rIns="0" tIns="0" bIns="0">
+            <a:spAutoFit/>
+          </a:bodyPr>
+          <a:lstStyle/>
+          <a:p>
+            <a:pPr algn="l">
+              <a:spcAft>
+                <a:spcPts val="0"/>
+              </a:spcAft>
+            </a:pPr>
+            <a:r>
+              <a:rPr sz="2400" b="1" i="0">
+                <a:solidFill>
+                  <a:srgbClr val="17242E"/>
+                </a:solidFill>
+                <a:latin typeface="Georgia"/>
+              </a:rPr>
+              <a:t>No sign-up. Nothing leaves your laptop.</a:t>
+            </a:r>
+          </a:p>
+        </p:txBody>
+      </p:sp>
+      <p:sp>
+        <p:nvSpPr>
+          <p:cNvPr id="15" name="TextBox 14"/>
+          <p:cNvSpPr txBox="1"/>
+          <p:nvPr/>
+        </p:nvSpPr>
+        <p:spPr>
+          <a:xfrm>
+            <a:off x="822960" y="1645920"/>
+            <a:ext cx="10424160" cy="457200"/>
+          </a:xfrm>
+          <a:prstGeom prst="rect">
+            <a:avLst/>
+          </a:prstGeom>
+          <a:noFill/>
+        </p:spPr>
+        <p:txBody>
+          <a:bodyPr wrap="square" anchor="t" lIns="0" rIns="0" tIns="0" bIns="0">
+            <a:spAutoFit/>
+          </a:bodyPr>
+          <a:lstStyle/>
+          <a:p>
+            <a:pPr algn="l">
+              <a:spcAft>
+                <a:spcPts val="0"/>
+              </a:spcAft>
+            </a:pPr>
+            <a:r>
+              <a:rPr sz="1350" b="0" i="0">
+                <a:solidFill>
+                  <a:srgbClr val="5A6A72"/>
+                </a:solidFill>
+                <a:latin typeface="Georgia"/>
+              </a:rPr>
+              <a:t>Install me, point me at the material you trust, and we begin — everything stays on your own device.</a:t>
+            </a:r>
+          </a:p>
+        </p:txBody>
+      </p:sp>
+      <p:sp>
+        <p:nvSpPr>
+          <p:cNvPr id="16" name="Rounded Rectangle 15"/>
+          <p:cNvSpPr/>
+          <p:nvPr/>
+        </p:nvSpPr>
+        <p:spPr>
+          <a:xfrm>
+            <a:off x="636879" y="2514600"/>
+            <a:ext cx="3383280" cy="1783080"/>
           </a:xfrm>
           <a:prstGeom prst="roundRect">
             <a:avLst>
-              <a:gd name="adj" fmla="val 28000"/>
+              <a:gd name="adj" fmla="val 5000"/>
+            </a:avLst>
+          </a:prstGeom>
+          <a:solidFill>
+            <a:srgbClr val="FFFFFF"/>
+          </a:solidFill>
+          <a:ln w="12700">
+            <a:solidFill>
+              <a:srgbClr val="D9E0DE"/>
+            </a:solidFill>
+          </a:ln>
+          <a:effectLst/>
+        </p:spPr>
+        <p:style>
+          <a:lnRef idx="1">
+            <a:schemeClr val="accent1"/>
+          </a:lnRef>
+          <a:fillRef idx="3">
+            <a:schemeClr val="accent1"/>
+          </a:fillRef>
+          <a:effectRef idx="2">
+            <a:schemeClr val="accent1"/>
+          </a:effectRef>
+          <a:fontRef idx="minor">
+            <a:schemeClr val="lt1"/>
+          </a:fontRef>
+        </p:style>
+        <p:txBody>
+          <a:bodyPr rtlCol="0" anchor="ctr"/>
+          <a:lstStyle/>
+          <a:p>
+            <a:pPr algn="ctr"/>
+          </a:p>
+        </p:txBody>
+      </p:sp>
+      <p:sp>
+        <p:nvSpPr>
+          <p:cNvPr id="17" name="Rectangle 16"/>
+          <p:cNvSpPr/>
+          <p:nvPr/>
+        </p:nvSpPr>
+        <p:spPr>
+          <a:xfrm>
+            <a:off x="636879" y="2514600"/>
+            <a:ext cx="3383280" cy="54864"/>
+          </a:xfrm>
+          <a:prstGeom prst="rect">
+            <a:avLst/>
+          </a:prstGeom>
+          <a:solidFill>
+            <a:srgbClr val="1F5C6B"/>
+          </a:solidFill>
+          <a:ln>
+            <a:noFill/>
+          </a:ln>
+          <a:effectLst/>
+        </p:spPr>
+        <p:style>
+          <a:lnRef idx="1">
+            <a:schemeClr val="accent1"/>
+          </a:lnRef>
+          <a:fillRef idx="3">
+            <a:schemeClr val="accent1"/>
+          </a:fillRef>
+          <a:effectRef idx="2">
+            <a:schemeClr val="accent1"/>
+          </a:effectRef>
+          <a:fontRef idx="minor">
+            <a:schemeClr val="lt1"/>
+          </a:fontRef>
+        </p:style>
+        <p:txBody>
+          <a:bodyPr rtlCol="0" anchor="ctr"/>
+          <a:lstStyle/>
+          <a:p>
+            <a:pPr algn="ctr"/>
+          </a:p>
+        </p:txBody>
+      </p:sp>
+      <p:sp>
+        <p:nvSpPr>
+          <p:cNvPr id="18" name="TextBox 17"/>
+          <p:cNvSpPr txBox="1"/>
+          <p:nvPr/>
+        </p:nvSpPr>
+        <p:spPr>
+          <a:xfrm>
+            <a:off x="911199" y="2743200"/>
+            <a:ext cx="2834640" cy="274320"/>
+          </a:xfrm>
+          <a:prstGeom prst="rect">
+            <a:avLst/>
+          </a:prstGeom>
+          <a:noFill/>
+        </p:spPr>
+        <p:txBody>
+          <a:bodyPr wrap="square" anchor="t" lIns="0" rIns="0" tIns="0" bIns="0">
+            <a:spAutoFit/>
+          </a:bodyPr>
+          <a:lstStyle/>
+          <a:p>
+            <a:pPr algn="l">
+              <a:spcAft>
+                <a:spcPts val="0"/>
+              </a:spcAft>
+            </a:pPr>
+            <a:r>
+              <a:rPr sz="1050" b="1" i="0">
+                <a:solidFill>
+                  <a:srgbClr val="1F5C6B"/>
+                </a:solidFill>
+                <a:latin typeface="Consolas"/>
+              </a:rPr>
+              <a:t>STEP 1</a:t>
+            </a:r>
+          </a:p>
+        </p:txBody>
+      </p:sp>
+      <p:sp>
+        <p:nvSpPr>
+          <p:cNvPr id="19" name="TextBox 18"/>
+          <p:cNvSpPr txBox="1"/>
+          <p:nvPr/>
+        </p:nvSpPr>
+        <p:spPr>
+          <a:xfrm>
+            <a:off x="911199" y="3063240"/>
+            <a:ext cx="2834640" cy="365760"/>
+          </a:xfrm>
+          <a:prstGeom prst="rect">
+            <a:avLst/>
+          </a:prstGeom>
+          <a:noFill/>
+        </p:spPr>
+        <p:txBody>
+          <a:bodyPr wrap="square" anchor="t" lIns="0" rIns="0" tIns="0" bIns="0">
+            <a:spAutoFit/>
+          </a:bodyPr>
+          <a:lstStyle/>
+          <a:p>
+            <a:pPr algn="l">
+              <a:spcAft>
+                <a:spcPts val="0"/>
+              </a:spcAft>
+            </a:pPr>
+            <a:r>
+              <a:rPr sz="1500" b="1" i="0">
+                <a:solidFill>
+                  <a:srgbClr val="17242E"/>
+                </a:solidFill>
+                <a:latin typeface="Georgia"/>
+              </a:rPr>
+              <a:t>Open me up</a:t>
+            </a:r>
+          </a:p>
+        </p:txBody>
+      </p:sp>
+      <p:sp>
+        <p:nvSpPr>
+          <p:cNvPr id="20" name="TextBox 19"/>
+          <p:cNvSpPr txBox="1"/>
+          <p:nvPr/>
+        </p:nvSpPr>
+        <p:spPr>
+          <a:xfrm>
+            <a:off x="911199" y="3474720"/>
+            <a:ext cx="2834640" cy="731520"/>
+          </a:xfrm>
+          <a:prstGeom prst="rect">
+            <a:avLst/>
+          </a:prstGeom>
+          <a:noFill/>
+        </p:spPr>
+        <p:txBody>
+          <a:bodyPr wrap="square" anchor="t" lIns="0" rIns="0" tIns="0" bIns="0">
+            <a:spAutoFit/>
+          </a:bodyPr>
+          <a:lstStyle/>
+          <a:p>
+            <a:pPr algn="l">
+              <a:lnSpc>
+                <a:spcPct val="105000"/>
+              </a:lnSpc>
+              <a:spcAft>
+                <a:spcPts val="0"/>
+              </a:spcAft>
+            </a:pPr>
+            <a:r>
+              <a:rPr sz="1150" b="0" i="0">
+                <a:solidFill>
+                  <a:srgbClr val="5A6A72"/>
+                </a:solidFill>
+                <a:latin typeface="Georgia"/>
+              </a:rPr>
+              <a:t>Free to start. No account, works offline.</a:t>
+            </a:r>
+          </a:p>
+        </p:txBody>
+      </p:sp>
+      <p:sp>
+        <p:nvSpPr>
+          <p:cNvPr id="21" name="Rounded Rectangle 20"/>
+          <p:cNvSpPr/>
+          <p:nvPr/>
+        </p:nvSpPr>
+        <p:spPr>
+          <a:xfrm>
+            <a:off x="4404207" y="2514600"/>
+            <a:ext cx="3383280" cy="1783080"/>
+          </a:xfrm>
+          <a:prstGeom prst="roundRect">
+            <a:avLst>
+              <a:gd name="adj" fmla="val 5000"/>
+            </a:avLst>
+          </a:prstGeom>
+          <a:solidFill>
+            <a:srgbClr val="FFFFFF"/>
+          </a:solidFill>
+          <a:ln w="12700">
+            <a:solidFill>
+              <a:srgbClr val="D9E0DE"/>
+            </a:solidFill>
+          </a:ln>
+          <a:effectLst/>
+        </p:spPr>
+        <p:style>
+          <a:lnRef idx="1">
+            <a:schemeClr val="accent1"/>
+          </a:lnRef>
+          <a:fillRef idx="3">
+            <a:schemeClr val="accent1"/>
+          </a:fillRef>
+          <a:effectRef idx="2">
+            <a:schemeClr val="accent1"/>
+          </a:effectRef>
+          <a:fontRef idx="minor">
+            <a:schemeClr val="lt1"/>
+          </a:fontRef>
+        </p:style>
+        <p:txBody>
+          <a:bodyPr rtlCol="0" anchor="ctr"/>
+          <a:lstStyle/>
+          <a:p>
+            <a:pPr algn="ctr"/>
+          </a:p>
+        </p:txBody>
+      </p:sp>
+      <p:sp>
+        <p:nvSpPr>
+          <p:cNvPr id="22" name="Rectangle 21"/>
+          <p:cNvSpPr/>
+          <p:nvPr/>
+        </p:nvSpPr>
+        <p:spPr>
+          <a:xfrm>
+            <a:off x="4404207" y="2514600"/>
+            <a:ext cx="3383280" cy="54864"/>
+          </a:xfrm>
+          <a:prstGeom prst="rect">
+            <a:avLst/>
+          </a:prstGeom>
+          <a:solidFill>
+            <a:srgbClr val="1F5C6B"/>
+          </a:solidFill>
+          <a:ln>
+            <a:noFill/>
+          </a:ln>
+          <a:effectLst/>
+        </p:spPr>
+        <p:style>
+          <a:lnRef idx="1">
+            <a:schemeClr val="accent1"/>
+          </a:lnRef>
+          <a:fillRef idx="3">
+            <a:schemeClr val="accent1"/>
+          </a:fillRef>
+          <a:effectRef idx="2">
+            <a:schemeClr val="accent1"/>
+          </a:effectRef>
+          <a:fontRef idx="minor">
+            <a:schemeClr val="lt1"/>
+          </a:fontRef>
+        </p:style>
+        <p:txBody>
+          <a:bodyPr rtlCol="0" anchor="ctr"/>
+          <a:lstStyle/>
+          <a:p>
+            <a:pPr algn="ctr"/>
+          </a:p>
+        </p:txBody>
+      </p:sp>
+      <p:sp>
+        <p:nvSpPr>
+          <p:cNvPr id="23" name="TextBox 22"/>
+          <p:cNvSpPr txBox="1"/>
+          <p:nvPr/>
+        </p:nvSpPr>
+        <p:spPr>
+          <a:xfrm>
+            <a:off x="4678527" y="2743200"/>
+            <a:ext cx="2834640" cy="274320"/>
+          </a:xfrm>
+          <a:prstGeom prst="rect">
+            <a:avLst/>
+          </a:prstGeom>
+          <a:noFill/>
+        </p:spPr>
+        <p:txBody>
+          <a:bodyPr wrap="square" anchor="t" lIns="0" rIns="0" tIns="0" bIns="0">
+            <a:spAutoFit/>
+          </a:bodyPr>
+          <a:lstStyle/>
+          <a:p>
+            <a:pPr algn="l">
+              <a:spcAft>
+                <a:spcPts val="0"/>
+              </a:spcAft>
+            </a:pPr>
+            <a:r>
+              <a:rPr sz="1050" b="1" i="0">
+                <a:solidFill>
+                  <a:srgbClr val="1F5C6B"/>
+                </a:solidFill>
+                <a:latin typeface="Consolas"/>
+              </a:rPr>
+              <a:t>STEP 2</a:t>
+            </a:r>
+          </a:p>
+        </p:txBody>
+      </p:sp>
+      <p:sp>
+        <p:nvSpPr>
+          <p:cNvPr id="24" name="TextBox 23"/>
+          <p:cNvSpPr txBox="1"/>
+          <p:nvPr/>
+        </p:nvSpPr>
+        <p:spPr>
+          <a:xfrm>
+            <a:off x="4678527" y="3063240"/>
+            <a:ext cx="2834640" cy="365760"/>
+          </a:xfrm>
+          <a:prstGeom prst="rect">
+            <a:avLst/>
+          </a:prstGeom>
+          <a:noFill/>
+        </p:spPr>
+        <p:txBody>
+          <a:bodyPr wrap="square" anchor="t" lIns="0" rIns="0" tIns="0" bIns="0">
+            <a:spAutoFit/>
+          </a:bodyPr>
+          <a:lstStyle/>
+          <a:p>
+            <a:pPr algn="l">
+              <a:spcAft>
+                <a:spcPts val="0"/>
+              </a:spcAft>
+            </a:pPr>
+            <a:r>
+              <a:rPr sz="1500" b="1" i="0">
+                <a:solidFill>
+                  <a:srgbClr val="17242E"/>
+                </a:solidFill>
+                <a:latin typeface="Georgia"/>
+              </a:rPr>
+              <a:t>Hand me your sources</a:t>
+            </a:r>
+          </a:p>
+        </p:txBody>
+      </p:sp>
+      <p:sp>
+        <p:nvSpPr>
+          <p:cNvPr id="25" name="TextBox 24"/>
+          <p:cNvSpPr txBox="1"/>
+          <p:nvPr/>
+        </p:nvSpPr>
+        <p:spPr>
+          <a:xfrm>
+            <a:off x="4678527" y="3474720"/>
+            <a:ext cx="2834640" cy="731520"/>
+          </a:xfrm>
+          <a:prstGeom prst="rect">
+            <a:avLst/>
+          </a:prstGeom>
+          <a:noFill/>
+        </p:spPr>
+        <p:txBody>
+          <a:bodyPr wrap="square" anchor="t" lIns="0" rIns="0" tIns="0" bIns="0">
+            <a:spAutoFit/>
+          </a:bodyPr>
+          <a:lstStyle/>
+          <a:p>
+            <a:pPr algn="l">
+              <a:lnSpc>
+                <a:spcPct val="105000"/>
+              </a:lnSpc>
+              <a:spcAft>
+                <a:spcPts val="0"/>
+              </a:spcAft>
+            </a:pPr>
+            <a:r>
+              <a:rPr sz="1150" b="0" i="0">
+                <a:solidFill>
+                  <a:srgbClr val="5A6A72"/>
+                </a:solidFill>
+                <a:latin typeface="Georgia"/>
+              </a:rPr>
+              <a:t>Guidelines, papers, drug ref, notes — they become your knowledge library.</a:t>
+            </a:r>
+          </a:p>
+        </p:txBody>
+      </p:sp>
+      <p:sp>
+        <p:nvSpPr>
+          <p:cNvPr id="26" name="Rounded Rectangle 25"/>
+          <p:cNvSpPr/>
+          <p:nvPr/>
+        </p:nvSpPr>
+        <p:spPr>
+          <a:xfrm>
+            <a:off x="8171535" y="2514600"/>
+            <a:ext cx="3383280" cy="1783080"/>
+          </a:xfrm>
+          <a:prstGeom prst="roundRect">
+            <a:avLst>
+              <a:gd name="adj" fmla="val 5000"/>
+            </a:avLst>
+          </a:prstGeom>
+          <a:solidFill>
+            <a:srgbClr val="FFFFFF"/>
+          </a:solidFill>
+          <a:ln w="12700">
+            <a:solidFill>
+              <a:srgbClr val="D9E0DE"/>
+            </a:solidFill>
+          </a:ln>
+          <a:effectLst/>
+        </p:spPr>
+        <p:style>
+          <a:lnRef idx="1">
+            <a:schemeClr val="accent1"/>
+          </a:lnRef>
+          <a:fillRef idx="3">
+            <a:schemeClr val="accent1"/>
+          </a:fillRef>
+          <a:effectRef idx="2">
+            <a:schemeClr val="accent1"/>
+          </a:effectRef>
+          <a:fontRef idx="minor">
+            <a:schemeClr val="lt1"/>
+          </a:fontRef>
+        </p:style>
+        <p:txBody>
+          <a:bodyPr rtlCol="0" anchor="ctr"/>
+          <a:lstStyle/>
+          <a:p>
+            <a:pPr algn="ctr"/>
+          </a:p>
+        </p:txBody>
+      </p:sp>
+      <p:sp>
+        <p:nvSpPr>
+          <p:cNvPr id="27" name="Rectangle 26"/>
+          <p:cNvSpPr/>
+          <p:nvPr/>
+        </p:nvSpPr>
+        <p:spPr>
+          <a:xfrm>
+            <a:off x="8171535" y="2514600"/>
+            <a:ext cx="3383280" cy="54864"/>
+          </a:xfrm>
+          <a:prstGeom prst="rect">
+            <a:avLst/>
+          </a:prstGeom>
+          <a:solidFill>
+            <a:srgbClr val="1F5C6B"/>
+          </a:solidFill>
+          <a:ln>
+            <a:noFill/>
+          </a:ln>
+          <a:effectLst/>
+        </p:spPr>
+        <p:style>
+          <a:lnRef idx="1">
+            <a:schemeClr val="accent1"/>
+          </a:lnRef>
+          <a:fillRef idx="3">
+            <a:schemeClr val="accent1"/>
+          </a:fillRef>
+          <a:effectRef idx="2">
+            <a:schemeClr val="accent1"/>
+          </a:effectRef>
+          <a:fontRef idx="minor">
+            <a:schemeClr val="lt1"/>
+          </a:fontRef>
+        </p:style>
+        <p:txBody>
+          <a:bodyPr rtlCol="0" anchor="ctr"/>
+          <a:lstStyle/>
+          <a:p>
+            <a:pPr algn="ctr"/>
+          </a:p>
+        </p:txBody>
+      </p:sp>
+      <p:sp>
+        <p:nvSpPr>
+          <p:cNvPr id="28" name="TextBox 27"/>
+          <p:cNvSpPr txBox="1"/>
+          <p:nvPr/>
+        </p:nvSpPr>
+        <p:spPr>
+          <a:xfrm>
+            <a:off x="8445855" y="2743200"/>
+            <a:ext cx="2834640" cy="274320"/>
+          </a:xfrm>
+          <a:prstGeom prst="rect">
+            <a:avLst/>
+          </a:prstGeom>
+          <a:noFill/>
+        </p:spPr>
+        <p:txBody>
+          <a:bodyPr wrap="square" anchor="t" lIns="0" rIns="0" tIns="0" bIns="0">
+            <a:spAutoFit/>
+          </a:bodyPr>
+          <a:lstStyle/>
+          <a:p>
+            <a:pPr algn="l">
+              <a:spcAft>
+                <a:spcPts val="0"/>
+              </a:spcAft>
+            </a:pPr>
+            <a:r>
+              <a:rPr sz="1050" b="1" i="0">
+                <a:solidFill>
+                  <a:srgbClr val="1F5C6B"/>
+                </a:solidFill>
+                <a:latin typeface="Consolas"/>
+              </a:rPr>
+              <a:t>STEP 3</a:t>
+            </a:r>
+          </a:p>
+        </p:txBody>
+      </p:sp>
+      <p:sp>
+        <p:nvSpPr>
+          <p:cNvPr id="29" name="TextBox 28"/>
+          <p:cNvSpPr txBox="1"/>
+          <p:nvPr/>
+        </p:nvSpPr>
+        <p:spPr>
+          <a:xfrm>
+            <a:off x="8445855" y="3063240"/>
+            <a:ext cx="2834640" cy="365760"/>
+          </a:xfrm>
+          <a:prstGeom prst="rect">
+            <a:avLst/>
+          </a:prstGeom>
+          <a:noFill/>
+        </p:spPr>
+        <p:txBody>
+          <a:bodyPr wrap="square" anchor="t" lIns="0" rIns="0" tIns="0" bIns="0">
+            <a:spAutoFit/>
+          </a:bodyPr>
+          <a:lstStyle/>
+          <a:p>
+            <a:pPr algn="l">
+              <a:spcAft>
+                <a:spcPts val="0"/>
+              </a:spcAft>
+            </a:pPr>
+            <a:r>
+              <a:rPr sz="1500" b="1" i="0">
+                <a:solidFill>
+                  <a:srgbClr val="17242E"/>
+                </a:solidFill>
+                <a:latin typeface="Georgia"/>
+              </a:rPr>
+              <a:t>Ask, or hand me a draft</a:t>
+            </a:r>
+          </a:p>
+        </p:txBody>
+      </p:sp>
+      <p:sp>
+        <p:nvSpPr>
+          <p:cNvPr id="30" name="TextBox 29"/>
+          <p:cNvSpPr txBox="1"/>
+          <p:nvPr/>
+        </p:nvSpPr>
+        <p:spPr>
+          <a:xfrm>
+            <a:off x="8445855" y="3474720"/>
+            <a:ext cx="2834640" cy="731520"/>
+          </a:xfrm>
+          <a:prstGeom prst="rect">
+            <a:avLst/>
+          </a:prstGeom>
+          <a:noFill/>
+        </p:spPr>
+        <p:txBody>
+          <a:bodyPr wrap="square" anchor="t" lIns="0" rIns="0" tIns="0" bIns="0">
+            <a:spAutoFit/>
+          </a:bodyPr>
+          <a:lstStyle/>
+          <a:p>
+            <a:pPr algn="l">
+              <a:lnSpc>
+                <a:spcPct val="105000"/>
+              </a:lnSpc>
+              <a:spcAft>
+                <a:spcPts val="0"/>
+              </a:spcAft>
+            </a:pPr>
+            <a:r>
+              <a:rPr sz="1150" b="0" i="0">
+                <a:solidFill>
+                  <a:srgbClr val="5A6A72"/>
+                </a:solidFill>
+                <a:latin typeface="Georgia"/>
+              </a:rPr>
+              <a:t>I answer and write from your own evidence.</a:t>
+            </a:r>
+          </a:p>
+        </p:txBody>
+      </p:sp>
+      <p:sp>
+        <p:nvSpPr>
+          <p:cNvPr id="31" name="Rounded Rectangle 30"/>
+          <p:cNvSpPr/>
+          <p:nvPr/>
+        </p:nvSpPr>
+        <p:spPr>
+          <a:xfrm>
+            <a:off x="822960" y="4663440"/>
+            <a:ext cx="10515600" cy="658368"/>
+          </a:xfrm>
+          <a:prstGeom prst="roundRect">
+            <a:avLst>
+              <a:gd name="adj" fmla="val 20000"/>
             </a:avLst>
           </a:prstGeom>
           <a:solidFill>
@@ -4174,53 +5892,14 @@
       </p:sp>
       <p:sp>
         <p:nvSpPr>
-          <p:cNvPr id="4" name="TextBox 3"/>
+          <p:cNvPr id="32" name="TextBox 31"/>
           <p:cNvSpPr txBox="1"/>
           <p:nvPr/>
         </p:nvSpPr>
         <p:spPr>
           <a:xfrm>
-            <a:off x="914400" y="566928"/>
-            <a:ext cx="457200" cy="457200"/>
-          </a:xfrm>
-          <a:prstGeom prst="rect">
-            <a:avLst/>
-          </a:prstGeom>
-          <a:noFill/>
-        </p:spPr>
-        <p:txBody>
-          <a:bodyPr wrap="square" anchor="ctr" lIns="0" rIns="0" tIns="0" bIns="0">
-            <a:spAutoFit/>
-          </a:bodyPr>
-          <a:lstStyle/>
-          <a:p>
-            <a:pPr algn="ctr">
-              <a:spcAft>
-                <a:spcPts val="0"/>
-              </a:spcAft>
-            </a:pPr>
-            <a:r>
-              <a:rPr sz="1500" b="1" i="0">
-                <a:solidFill>
-                  <a:srgbClr val="1F5C6B"/>
-                </a:solidFill>
-                <a:latin typeface="Consolas"/>
-              </a:rPr>
-              <a:t>2</a:t>
-            </a:r>
-          </a:p>
-        </p:txBody>
-      </p:sp>
-      <p:sp>
-        <p:nvSpPr>
-          <p:cNvPr id="5" name="TextBox 4"/>
-          <p:cNvSpPr txBox="1"/>
-          <p:nvPr/>
-        </p:nvSpPr>
-        <p:spPr>
-          <a:xfrm>
-            <a:off x="1508760" y="548640"/>
-            <a:ext cx="9601200" cy="320040"/>
+            <a:off x="1143000" y="4663440"/>
+            <a:ext cx="9875520" cy="658368"/>
           </a:xfrm>
           <a:prstGeom prst="rect">
             <a:avLst/>
@@ -4239,875 +5918,20 @@
               </a:spcAft>
             </a:pPr>
             <a:r>
-              <a:rPr sz="1050" b="0" i="0">
-                <a:solidFill>
-                  <a:srgbClr val="566572"/>
+              <a:rPr sz="1300" b="1" i="0">
+                <a:solidFill>
+                  <a:srgbClr val="1F5C6B"/>
                 </a:solidFill>
                 <a:latin typeface="Consolas"/>
               </a:rPr>
-              <a:t>START WITH ME — FREE, ON YOUR DEVICE</a:t>
-            </a:r>
-          </a:p>
-        </p:txBody>
-      </p:sp>
-      <p:sp>
-        <p:nvSpPr>
-          <p:cNvPr id="6" name="TextBox 5"/>
-          <p:cNvSpPr txBox="1"/>
-          <p:nvPr/>
-        </p:nvSpPr>
-        <p:spPr>
-          <a:xfrm>
-            <a:off x="1508760" y="868680"/>
-            <a:ext cx="9692640" cy="320040"/>
-          </a:xfrm>
-          <a:prstGeom prst="rect">
-            <a:avLst/>
-          </a:prstGeom>
-          <a:noFill/>
-        </p:spPr>
-        <p:txBody>
-          <a:bodyPr wrap="square" anchor="t" lIns="0" rIns="0" tIns="0" bIns="0">
-            <a:spAutoFit/>
-          </a:bodyPr>
-          <a:lstStyle/>
-          <a:p>
-            <a:pPr algn="l">
-              <a:spcAft>
-                <a:spcPts val="0"/>
-              </a:spcAft>
-            </a:pPr>
-            <a:r>
-              <a:rPr sz="600" b="0" i="0">
+              <a:t>✓ On the free tier I live entirely on your device. </a:t>
+            </a:r>
+            <a:r>
+              <a:rPr sz="1300" b="0" i="0">
                 <a:solidFill>
                   <a:srgbClr val="17242E"/>
                 </a:solidFill>
-                <a:latin typeface="Calibri"/>
-              </a:rPr>
-              <a:t/>
-            </a:r>
-          </a:p>
-        </p:txBody>
-      </p:sp>
-      <p:sp>
-        <p:nvSpPr>
-          <p:cNvPr id="7" name="TextBox 6"/>
-          <p:cNvSpPr txBox="1"/>
-          <p:nvPr/>
-        </p:nvSpPr>
-        <p:spPr>
-          <a:xfrm>
-            <a:off x="914400" y="1234440"/>
-            <a:ext cx="10424160" cy="822960"/>
-          </a:xfrm>
-          <a:prstGeom prst="rect">
-            <a:avLst/>
-          </a:prstGeom>
-          <a:noFill/>
-        </p:spPr>
-        <p:txBody>
-          <a:bodyPr wrap="square" anchor="t" lIns="0" rIns="0" tIns="0" bIns="0">
-            <a:spAutoFit/>
-          </a:bodyPr>
-          <a:lstStyle/>
-          <a:p>
-            <a:pPr algn="l">
-              <a:lnSpc>
-                <a:spcPct val="100000"/>
-              </a:lnSpc>
-              <a:spcAft>
-                <a:spcPts val="0"/>
-              </a:spcAft>
-            </a:pPr>
-            <a:r>
-              <a:rPr sz="2500" b="1" i="0">
-                <a:solidFill>
-                  <a:srgbClr val="17242E"/>
-                </a:solidFill>
                 <a:latin typeface="Georgia"/>
-              </a:rPr>
-              <a:t>No sign-up. Nothing leaves your laptop.</a:t>
-            </a:r>
-          </a:p>
-        </p:txBody>
-      </p:sp>
-      <p:sp>
-        <p:nvSpPr>
-          <p:cNvPr id="8" name="TextBox 7"/>
-          <p:cNvSpPr txBox="1"/>
-          <p:nvPr/>
-        </p:nvSpPr>
-        <p:spPr>
-          <a:xfrm>
-            <a:off x="914400" y="2103120"/>
-            <a:ext cx="10241280" cy="457200"/>
-          </a:xfrm>
-          <a:prstGeom prst="rect">
-            <a:avLst/>
-          </a:prstGeom>
-          <a:noFill/>
-        </p:spPr>
-        <p:txBody>
-          <a:bodyPr wrap="square" anchor="t" lIns="0" rIns="0" tIns="0" bIns="0">
-            <a:spAutoFit/>
-          </a:bodyPr>
-          <a:lstStyle/>
-          <a:p>
-            <a:pPr algn="l">
-              <a:spcAft>
-                <a:spcPts val="0"/>
-              </a:spcAft>
-            </a:pPr>
-            <a:r>
-              <a:rPr sz="1350" b="0" i="0">
-                <a:solidFill>
-                  <a:srgbClr val="566572"/>
-                </a:solidFill>
-                <a:latin typeface="Calibri"/>
-              </a:rPr>
-              <a:t>Install me, point me at the material you trust, and we begin — everything stays on your own device.</a:t>
-            </a:r>
-          </a:p>
-        </p:txBody>
-      </p:sp>
-      <p:sp>
-        <p:nvSpPr>
-          <p:cNvPr id="9" name="Rounded Rectangle 8"/>
-          <p:cNvSpPr/>
-          <p:nvPr/>
-        </p:nvSpPr>
-        <p:spPr>
-          <a:xfrm>
-            <a:off x="655167" y="2788920"/>
-            <a:ext cx="3383280" cy="1828800"/>
-          </a:xfrm>
-          <a:prstGeom prst="roundRect">
-            <a:avLst>
-              <a:gd name="adj" fmla="val 6000"/>
-            </a:avLst>
-          </a:prstGeom>
-          <a:solidFill>
-            <a:srgbClr val="FFFFFF"/>
-          </a:solidFill>
-          <a:ln w="12700">
-            <a:solidFill>
-              <a:srgbClr val="DDDFDD"/>
-            </a:solidFill>
-          </a:ln>
-          <a:effectLst/>
-        </p:spPr>
-        <p:style>
-          <a:lnRef idx="1">
-            <a:schemeClr val="accent1"/>
-          </a:lnRef>
-          <a:fillRef idx="3">
-            <a:schemeClr val="accent1"/>
-          </a:fillRef>
-          <a:effectRef idx="2">
-            <a:schemeClr val="accent1"/>
-          </a:effectRef>
-          <a:fontRef idx="minor">
-            <a:schemeClr val="lt1"/>
-          </a:fontRef>
-        </p:style>
-        <p:txBody>
-          <a:bodyPr rtlCol="0" anchor="ctr"/>
-          <a:lstStyle/>
-          <a:p>
-            <a:pPr algn="ctr"/>
-          </a:p>
-        </p:txBody>
-      </p:sp>
-      <p:sp>
-        <p:nvSpPr>
-          <p:cNvPr id="10" name="Rounded Rectangle 9"/>
-          <p:cNvSpPr/>
-          <p:nvPr/>
-        </p:nvSpPr>
-        <p:spPr>
-          <a:xfrm>
-            <a:off x="929487" y="3017520"/>
-            <a:ext cx="548640" cy="548640"/>
-          </a:xfrm>
-          <a:prstGeom prst="roundRect">
-            <a:avLst>
-              <a:gd name="adj" fmla="val 25000"/>
-            </a:avLst>
-          </a:prstGeom>
-          <a:solidFill>
-            <a:srgbClr val="E7F1EF"/>
-          </a:solidFill>
-          <a:ln w="12700">
-            <a:solidFill>
-              <a:srgbClr val="BFDDD8"/>
-            </a:solidFill>
-          </a:ln>
-          <a:effectLst/>
-        </p:spPr>
-        <p:style>
-          <a:lnRef idx="1">
-            <a:schemeClr val="accent1"/>
-          </a:lnRef>
-          <a:fillRef idx="3">
-            <a:schemeClr val="accent1"/>
-          </a:fillRef>
-          <a:effectRef idx="2">
-            <a:schemeClr val="accent1"/>
-          </a:effectRef>
-          <a:fontRef idx="minor">
-            <a:schemeClr val="lt1"/>
-          </a:fontRef>
-        </p:style>
-        <p:txBody>
-          <a:bodyPr rtlCol="0" anchor="ctr"/>
-          <a:lstStyle/>
-          <a:p>
-            <a:pPr algn="ctr"/>
-          </a:p>
-        </p:txBody>
-      </p:sp>
-      <p:sp>
-        <p:nvSpPr>
-          <p:cNvPr id="11" name="TextBox 10"/>
-          <p:cNvSpPr txBox="1"/>
-          <p:nvPr/>
-        </p:nvSpPr>
-        <p:spPr>
-          <a:xfrm>
-            <a:off x="929487" y="3017520"/>
-            <a:ext cx="548640" cy="548640"/>
-          </a:xfrm>
-          <a:prstGeom prst="rect">
-            <a:avLst/>
-          </a:prstGeom>
-          <a:noFill/>
-        </p:spPr>
-        <p:txBody>
-          <a:bodyPr wrap="square" anchor="ctr" lIns="0" rIns="0" tIns="0" bIns="0">
-            <a:spAutoFit/>
-          </a:bodyPr>
-          <a:lstStyle/>
-          <a:p>
-            <a:pPr algn="ctr">
-              <a:spcAft>
-                <a:spcPts val="0"/>
-              </a:spcAft>
-            </a:pPr>
-            <a:r>
-              <a:rPr sz="1600" b="1" i="0">
-                <a:solidFill>
-                  <a:srgbClr val="2F8F83"/>
-                </a:solidFill>
-                <a:latin typeface="Consolas"/>
-              </a:rPr>
-              <a:t>1</a:t>
-            </a:r>
-          </a:p>
-        </p:txBody>
-      </p:sp>
-      <p:sp>
-        <p:nvSpPr>
-          <p:cNvPr id="12" name="TextBox 11"/>
-          <p:cNvSpPr txBox="1"/>
-          <p:nvPr/>
-        </p:nvSpPr>
-        <p:spPr>
-          <a:xfrm>
-            <a:off x="929487" y="3703320"/>
-            <a:ext cx="2834640" cy="365760"/>
-          </a:xfrm>
-          <a:prstGeom prst="rect">
-            <a:avLst/>
-          </a:prstGeom>
-          <a:noFill/>
-        </p:spPr>
-        <p:txBody>
-          <a:bodyPr wrap="square" anchor="t" lIns="0" rIns="0" tIns="0" bIns="0">
-            <a:spAutoFit/>
-          </a:bodyPr>
-          <a:lstStyle/>
-          <a:p>
-            <a:pPr algn="l">
-              <a:spcAft>
-                <a:spcPts val="0"/>
-              </a:spcAft>
-            </a:pPr>
-            <a:r>
-              <a:rPr sz="1500" b="1" i="0">
-                <a:solidFill>
-                  <a:srgbClr val="17242E"/>
-                </a:solidFill>
-                <a:latin typeface="Calibri"/>
-              </a:rPr>
-              <a:t>Open me up</a:t>
-            </a:r>
-          </a:p>
-        </p:txBody>
-      </p:sp>
-      <p:sp>
-        <p:nvSpPr>
-          <p:cNvPr id="13" name="TextBox 12"/>
-          <p:cNvSpPr txBox="1"/>
-          <p:nvPr/>
-        </p:nvSpPr>
-        <p:spPr>
-          <a:xfrm>
-            <a:off x="929487" y="4114800"/>
-            <a:ext cx="2834640" cy="457200"/>
-          </a:xfrm>
-          <a:prstGeom prst="rect">
-            <a:avLst/>
-          </a:prstGeom>
-          <a:noFill/>
-        </p:spPr>
-        <p:txBody>
-          <a:bodyPr wrap="square" anchor="t" lIns="0" rIns="0" tIns="0" bIns="0">
-            <a:spAutoFit/>
-          </a:bodyPr>
-          <a:lstStyle/>
-          <a:p>
-            <a:pPr algn="l">
-              <a:lnSpc>
-                <a:spcPct val="105000"/>
-              </a:lnSpc>
-              <a:spcAft>
-                <a:spcPts val="0"/>
-              </a:spcAft>
-            </a:pPr>
-            <a:r>
-              <a:rPr sz="1150" b="0" i="0">
-                <a:solidFill>
-                  <a:srgbClr val="566572"/>
-                </a:solidFill>
-                <a:latin typeface="Calibri"/>
-              </a:rPr>
-              <a:t>Free to start. No account, works offline.</a:t>
-            </a:r>
-          </a:p>
-        </p:txBody>
-      </p:sp>
-      <p:sp>
-        <p:nvSpPr>
-          <p:cNvPr id="14" name="Rounded Rectangle 13"/>
-          <p:cNvSpPr/>
-          <p:nvPr/>
-        </p:nvSpPr>
-        <p:spPr>
-          <a:xfrm>
-            <a:off x="4404207" y="2788920"/>
-            <a:ext cx="3383280" cy="1828800"/>
-          </a:xfrm>
-          <a:prstGeom prst="roundRect">
-            <a:avLst>
-              <a:gd name="adj" fmla="val 6000"/>
-            </a:avLst>
-          </a:prstGeom>
-          <a:solidFill>
-            <a:srgbClr val="FFFFFF"/>
-          </a:solidFill>
-          <a:ln w="12700">
-            <a:solidFill>
-              <a:srgbClr val="DDDFDD"/>
-            </a:solidFill>
-          </a:ln>
-          <a:effectLst/>
-        </p:spPr>
-        <p:style>
-          <a:lnRef idx="1">
-            <a:schemeClr val="accent1"/>
-          </a:lnRef>
-          <a:fillRef idx="3">
-            <a:schemeClr val="accent1"/>
-          </a:fillRef>
-          <a:effectRef idx="2">
-            <a:schemeClr val="accent1"/>
-          </a:effectRef>
-          <a:fontRef idx="minor">
-            <a:schemeClr val="lt1"/>
-          </a:fontRef>
-        </p:style>
-        <p:txBody>
-          <a:bodyPr rtlCol="0" anchor="ctr"/>
-          <a:lstStyle/>
-          <a:p>
-            <a:pPr algn="ctr"/>
-          </a:p>
-        </p:txBody>
-      </p:sp>
-      <p:sp>
-        <p:nvSpPr>
-          <p:cNvPr id="15" name="Rounded Rectangle 14"/>
-          <p:cNvSpPr/>
-          <p:nvPr/>
-        </p:nvSpPr>
-        <p:spPr>
-          <a:xfrm>
-            <a:off x="4678527" y="3017520"/>
-            <a:ext cx="548640" cy="548640"/>
-          </a:xfrm>
-          <a:prstGeom prst="roundRect">
-            <a:avLst>
-              <a:gd name="adj" fmla="val 25000"/>
-            </a:avLst>
-          </a:prstGeom>
-          <a:solidFill>
-            <a:srgbClr val="E7F1EF"/>
-          </a:solidFill>
-          <a:ln w="12700">
-            <a:solidFill>
-              <a:srgbClr val="BFDDD8"/>
-            </a:solidFill>
-          </a:ln>
-          <a:effectLst/>
-        </p:spPr>
-        <p:style>
-          <a:lnRef idx="1">
-            <a:schemeClr val="accent1"/>
-          </a:lnRef>
-          <a:fillRef idx="3">
-            <a:schemeClr val="accent1"/>
-          </a:fillRef>
-          <a:effectRef idx="2">
-            <a:schemeClr val="accent1"/>
-          </a:effectRef>
-          <a:fontRef idx="minor">
-            <a:schemeClr val="lt1"/>
-          </a:fontRef>
-        </p:style>
-        <p:txBody>
-          <a:bodyPr rtlCol="0" anchor="ctr"/>
-          <a:lstStyle/>
-          <a:p>
-            <a:pPr algn="ctr"/>
-          </a:p>
-        </p:txBody>
-      </p:sp>
-      <p:sp>
-        <p:nvSpPr>
-          <p:cNvPr id="16" name="TextBox 15"/>
-          <p:cNvSpPr txBox="1"/>
-          <p:nvPr/>
-        </p:nvSpPr>
-        <p:spPr>
-          <a:xfrm>
-            <a:off x="4678527" y="3017520"/>
-            <a:ext cx="548640" cy="548640"/>
-          </a:xfrm>
-          <a:prstGeom prst="rect">
-            <a:avLst/>
-          </a:prstGeom>
-          <a:noFill/>
-        </p:spPr>
-        <p:txBody>
-          <a:bodyPr wrap="square" anchor="ctr" lIns="0" rIns="0" tIns="0" bIns="0">
-            <a:spAutoFit/>
-          </a:bodyPr>
-          <a:lstStyle/>
-          <a:p>
-            <a:pPr algn="ctr">
-              <a:spcAft>
-                <a:spcPts val="0"/>
-              </a:spcAft>
-            </a:pPr>
-            <a:r>
-              <a:rPr sz="1600" b="1" i="0">
-                <a:solidFill>
-                  <a:srgbClr val="2F8F83"/>
-                </a:solidFill>
-                <a:latin typeface="Consolas"/>
-              </a:rPr>
-              <a:t>2</a:t>
-            </a:r>
-          </a:p>
-        </p:txBody>
-      </p:sp>
-      <p:sp>
-        <p:nvSpPr>
-          <p:cNvPr id="17" name="TextBox 16"/>
-          <p:cNvSpPr txBox="1"/>
-          <p:nvPr/>
-        </p:nvSpPr>
-        <p:spPr>
-          <a:xfrm>
-            <a:off x="4678527" y="3703320"/>
-            <a:ext cx="2834640" cy="365760"/>
-          </a:xfrm>
-          <a:prstGeom prst="rect">
-            <a:avLst/>
-          </a:prstGeom>
-          <a:noFill/>
-        </p:spPr>
-        <p:txBody>
-          <a:bodyPr wrap="square" anchor="t" lIns="0" rIns="0" tIns="0" bIns="0">
-            <a:spAutoFit/>
-          </a:bodyPr>
-          <a:lstStyle/>
-          <a:p>
-            <a:pPr algn="l">
-              <a:spcAft>
-                <a:spcPts val="0"/>
-              </a:spcAft>
-            </a:pPr>
-            <a:r>
-              <a:rPr sz="1500" b="1" i="0">
-                <a:solidFill>
-                  <a:srgbClr val="17242E"/>
-                </a:solidFill>
-                <a:latin typeface="Calibri"/>
-              </a:rPr>
-              <a:t>Hand me your sources</a:t>
-            </a:r>
-          </a:p>
-        </p:txBody>
-      </p:sp>
-      <p:sp>
-        <p:nvSpPr>
-          <p:cNvPr id="18" name="TextBox 17"/>
-          <p:cNvSpPr txBox="1"/>
-          <p:nvPr/>
-        </p:nvSpPr>
-        <p:spPr>
-          <a:xfrm>
-            <a:off x="4678527" y="4114800"/>
-            <a:ext cx="2834640" cy="457200"/>
-          </a:xfrm>
-          <a:prstGeom prst="rect">
-            <a:avLst/>
-          </a:prstGeom>
-          <a:noFill/>
-        </p:spPr>
-        <p:txBody>
-          <a:bodyPr wrap="square" anchor="t" lIns="0" rIns="0" tIns="0" bIns="0">
-            <a:spAutoFit/>
-          </a:bodyPr>
-          <a:lstStyle/>
-          <a:p>
-            <a:pPr algn="l">
-              <a:lnSpc>
-                <a:spcPct val="105000"/>
-              </a:lnSpc>
-              <a:spcAft>
-                <a:spcPts val="0"/>
-              </a:spcAft>
-            </a:pPr>
-            <a:r>
-              <a:rPr sz="1150" b="0" i="0">
-                <a:solidFill>
-                  <a:srgbClr val="566572"/>
-                </a:solidFill>
-                <a:latin typeface="Calibri"/>
-              </a:rPr>
-              <a:t>Guidelines, papers, drug reference, notes — they become your knowledge library.</a:t>
-            </a:r>
-          </a:p>
-        </p:txBody>
-      </p:sp>
-      <p:sp>
-        <p:nvSpPr>
-          <p:cNvPr id="19" name="Rounded Rectangle 18"/>
-          <p:cNvSpPr/>
-          <p:nvPr/>
-        </p:nvSpPr>
-        <p:spPr>
-          <a:xfrm>
-            <a:off x="8153247" y="2788920"/>
-            <a:ext cx="3383280" cy="1828800"/>
-          </a:xfrm>
-          <a:prstGeom prst="roundRect">
-            <a:avLst>
-              <a:gd name="adj" fmla="val 6000"/>
-            </a:avLst>
-          </a:prstGeom>
-          <a:solidFill>
-            <a:srgbClr val="FFFFFF"/>
-          </a:solidFill>
-          <a:ln w="12700">
-            <a:solidFill>
-              <a:srgbClr val="DDDFDD"/>
-            </a:solidFill>
-          </a:ln>
-          <a:effectLst/>
-        </p:spPr>
-        <p:style>
-          <a:lnRef idx="1">
-            <a:schemeClr val="accent1"/>
-          </a:lnRef>
-          <a:fillRef idx="3">
-            <a:schemeClr val="accent1"/>
-          </a:fillRef>
-          <a:effectRef idx="2">
-            <a:schemeClr val="accent1"/>
-          </a:effectRef>
-          <a:fontRef idx="minor">
-            <a:schemeClr val="lt1"/>
-          </a:fontRef>
-        </p:style>
-        <p:txBody>
-          <a:bodyPr rtlCol="0" anchor="ctr"/>
-          <a:lstStyle/>
-          <a:p>
-            <a:pPr algn="ctr"/>
-          </a:p>
-        </p:txBody>
-      </p:sp>
-      <p:sp>
-        <p:nvSpPr>
-          <p:cNvPr id="20" name="Rounded Rectangle 19"/>
-          <p:cNvSpPr/>
-          <p:nvPr/>
-        </p:nvSpPr>
-        <p:spPr>
-          <a:xfrm>
-            <a:off x="8427567" y="3017520"/>
-            <a:ext cx="548640" cy="548640"/>
-          </a:xfrm>
-          <a:prstGeom prst="roundRect">
-            <a:avLst>
-              <a:gd name="adj" fmla="val 25000"/>
-            </a:avLst>
-          </a:prstGeom>
-          <a:solidFill>
-            <a:srgbClr val="E7F1EF"/>
-          </a:solidFill>
-          <a:ln w="12700">
-            <a:solidFill>
-              <a:srgbClr val="BFDDD8"/>
-            </a:solidFill>
-          </a:ln>
-          <a:effectLst/>
-        </p:spPr>
-        <p:style>
-          <a:lnRef idx="1">
-            <a:schemeClr val="accent1"/>
-          </a:lnRef>
-          <a:fillRef idx="3">
-            <a:schemeClr val="accent1"/>
-          </a:fillRef>
-          <a:effectRef idx="2">
-            <a:schemeClr val="accent1"/>
-          </a:effectRef>
-          <a:fontRef idx="minor">
-            <a:schemeClr val="lt1"/>
-          </a:fontRef>
-        </p:style>
-        <p:txBody>
-          <a:bodyPr rtlCol="0" anchor="ctr"/>
-          <a:lstStyle/>
-          <a:p>
-            <a:pPr algn="ctr"/>
-          </a:p>
-        </p:txBody>
-      </p:sp>
-      <p:sp>
-        <p:nvSpPr>
-          <p:cNvPr id="21" name="TextBox 20"/>
-          <p:cNvSpPr txBox="1"/>
-          <p:nvPr/>
-        </p:nvSpPr>
-        <p:spPr>
-          <a:xfrm>
-            <a:off x="8427567" y="3017520"/>
-            <a:ext cx="548640" cy="548640"/>
-          </a:xfrm>
-          <a:prstGeom prst="rect">
-            <a:avLst/>
-          </a:prstGeom>
-          <a:noFill/>
-        </p:spPr>
-        <p:txBody>
-          <a:bodyPr wrap="square" anchor="ctr" lIns="0" rIns="0" tIns="0" bIns="0">
-            <a:spAutoFit/>
-          </a:bodyPr>
-          <a:lstStyle/>
-          <a:p>
-            <a:pPr algn="ctr">
-              <a:spcAft>
-                <a:spcPts val="0"/>
-              </a:spcAft>
-            </a:pPr>
-            <a:r>
-              <a:rPr sz="1600" b="1" i="0">
-                <a:solidFill>
-                  <a:srgbClr val="2F8F83"/>
-                </a:solidFill>
-                <a:latin typeface="Consolas"/>
-              </a:rPr>
-              <a:t>3</a:t>
-            </a:r>
-          </a:p>
-        </p:txBody>
-      </p:sp>
-      <p:sp>
-        <p:nvSpPr>
-          <p:cNvPr id="22" name="TextBox 21"/>
-          <p:cNvSpPr txBox="1"/>
-          <p:nvPr/>
-        </p:nvSpPr>
-        <p:spPr>
-          <a:xfrm>
-            <a:off x="8427567" y="3703320"/>
-            <a:ext cx="2834640" cy="365760"/>
-          </a:xfrm>
-          <a:prstGeom prst="rect">
-            <a:avLst/>
-          </a:prstGeom>
-          <a:noFill/>
-        </p:spPr>
-        <p:txBody>
-          <a:bodyPr wrap="square" anchor="t" lIns="0" rIns="0" tIns="0" bIns="0">
-            <a:spAutoFit/>
-          </a:bodyPr>
-          <a:lstStyle/>
-          <a:p>
-            <a:pPr algn="l">
-              <a:spcAft>
-                <a:spcPts val="0"/>
-              </a:spcAft>
-            </a:pPr>
-            <a:r>
-              <a:rPr sz="1500" b="1" i="0">
-                <a:solidFill>
-                  <a:srgbClr val="17242E"/>
-                </a:solidFill>
-                <a:latin typeface="Calibri"/>
-              </a:rPr>
-              <a:t>Ask, or hand me a draft</a:t>
-            </a:r>
-          </a:p>
-        </p:txBody>
-      </p:sp>
-      <p:sp>
-        <p:nvSpPr>
-          <p:cNvPr id="23" name="TextBox 22"/>
-          <p:cNvSpPr txBox="1"/>
-          <p:nvPr/>
-        </p:nvSpPr>
-        <p:spPr>
-          <a:xfrm>
-            <a:off x="8427567" y="4114800"/>
-            <a:ext cx="2834640" cy="457200"/>
-          </a:xfrm>
-          <a:prstGeom prst="rect">
-            <a:avLst/>
-          </a:prstGeom>
-          <a:noFill/>
-        </p:spPr>
-        <p:txBody>
-          <a:bodyPr wrap="square" anchor="t" lIns="0" rIns="0" tIns="0" bIns="0">
-            <a:spAutoFit/>
-          </a:bodyPr>
-          <a:lstStyle/>
-          <a:p>
-            <a:pPr algn="l">
-              <a:lnSpc>
-                <a:spcPct val="105000"/>
-              </a:lnSpc>
-              <a:spcAft>
-                <a:spcPts val="0"/>
-              </a:spcAft>
-            </a:pPr>
-            <a:r>
-              <a:rPr sz="1150" b="0" i="0">
-                <a:solidFill>
-                  <a:srgbClr val="566572"/>
-                </a:solidFill>
-                <a:latin typeface="Calibri"/>
-              </a:rPr>
-              <a:t>I answer and write from your own evidence.</a:t>
-            </a:r>
-          </a:p>
-        </p:txBody>
-      </p:sp>
-      <p:sp>
-        <p:nvSpPr>
-          <p:cNvPr id="24" name="Rounded Rectangle 23"/>
-          <p:cNvSpPr/>
-          <p:nvPr/>
-        </p:nvSpPr>
-        <p:spPr>
-          <a:xfrm>
-            <a:off x="914400" y="4937760"/>
-            <a:ext cx="10360152" cy="685800"/>
-          </a:xfrm>
-          <a:prstGeom prst="roundRect">
-            <a:avLst>
-              <a:gd name="adj" fmla="val 20000"/>
-            </a:avLst>
-          </a:prstGeom>
-          <a:solidFill>
-            <a:srgbClr val="E7F1EF"/>
-          </a:solidFill>
-          <a:ln w="12700">
-            <a:solidFill>
-              <a:srgbClr val="BFDDD8"/>
-            </a:solidFill>
-          </a:ln>
-          <a:effectLst/>
-        </p:spPr>
-        <p:style>
-          <a:lnRef idx="1">
-            <a:schemeClr val="accent1"/>
-          </a:lnRef>
-          <a:fillRef idx="3">
-            <a:schemeClr val="accent1"/>
-          </a:fillRef>
-          <a:effectRef idx="2">
-            <a:schemeClr val="accent1"/>
-          </a:effectRef>
-          <a:fontRef idx="minor">
-            <a:schemeClr val="lt1"/>
-          </a:fontRef>
-        </p:style>
-        <p:txBody>
-          <a:bodyPr rtlCol="0" anchor="ctr"/>
-          <a:lstStyle/>
-          <a:p>
-            <a:pPr algn="ctr"/>
-          </a:p>
-        </p:txBody>
-      </p:sp>
-      <p:sp>
-        <p:nvSpPr>
-          <p:cNvPr id="25" name="TextBox 24"/>
-          <p:cNvSpPr txBox="1"/>
-          <p:nvPr/>
-        </p:nvSpPr>
-        <p:spPr>
-          <a:xfrm>
-            <a:off x="1280160" y="4937760"/>
-            <a:ext cx="9692640" cy="685800"/>
-          </a:xfrm>
-          <a:prstGeom prst="rect">
-            <a:avLst/>
-          </a:prstGeom>
-          <a:noFill/>
-        </p:spPr>
-        <p:txBody>
-          <a:bodyPr wrap="square" anchor="ctr" lIns="0" rIns="0" tIns="0" bIns="0">
-            <a:spAutoFit/>
-          </a:bodyPr>
-          <a:lstStyle/>
-          <a:p>
-            <a:pPr algn="l">
-              <a:spcAft>
-                <a:spcPts val="0"/>
-              </a:spcAft>
-            </a:pPr>
-            <a:r>
-              <a:rPr sz="1350" b="1" i="0">
-                <a:solidFill>
-                  <a:srgbClr val="2F8F83"/>
-                </a:solidFill>
-                <a:latin typeface="Calibri"/>
-              </a:rPr>
-              <a:t>✓  On the free tier I live entirely on your device. </a:t>
-            </a:r>
-            <a:r>
-              <a:rPr sz="1350" b="0" i="0">
-                <a:solidFill>
-                  <a:srgbClr val="17242E"/>
-                </a:solidFill>
-                <a:latin typeface="Calibri"/>
               </a:rPr>
               <a:t>I can't see your library — and neither can anyone else.</a:t>
             </a:r>
@@ -5147,7 +5971,7 @@
             <a:avLst/>
           </a:prstGeom>
           <a:solidFill>
-            <a:srgbClr val="FBFAF9"/>
+            <a:srgbClr val="F4F6F5"/>
           </a:solidFill>
           <a:ln>
             <a:noFill/>
@@ -5178,27 +6002,23 @@
       </p:sp>
       <p:sp>
         <p:nvSpPr>
-          <p:cNvPr id="3" name="Rounded Rectangle 2"/>
+          <p:cNvPr id="3" name="Rectangle 2"/>
           <p:cNvSpPr/>
           <p:nvPr/>
         </p:nvSpPr>
         <p:spPr>
           <a:xfrm>
-            <a:off x="914400" y="566928"/>
-            <a:ext cx="457200" cy="457200"/>
-          </a:xfrm>
-          <a:prstGeom prst="roundRect">
-            <a:avLst>
-              <a:gd name="adj" fmla="val 28000"/>
-            </a:avLst>
+            <a:off x="0" y="0"/>
+            <a:ext cx="12191695" cy="658368"/>
+          </a:xfrm>
+          <a:prstGeom prst="rect">
+            <a:avLst/>
           </a:prstGeom>
           <a:solidFill>
             <a:srgbClr val="E4F0F1"/>
           </a:solidFill>
-          <a:ln w="12700">
-            <a:solidFill>
-              <a:srgbClr val="BEDDDF"/>
-            </a:solidFill>
+          <a:ln>
+            <a:noFill/>
           </a:ln>
           <a:effectLst/>
         </p:spPr>
@@ -5226,40 +6046,45 @@
       </p:sp>
       <p:sp>
         <p:nvSpPr>
-          <p:cNvPr id="4" name="TextBox 3"/>
-          <p:cNvSpPr txBox="1"/>
-          <p:nvPr/>
-        </p:nvSpPr>
-        <p:spPr>
-          <a:xfrm>
-            <a:off x="914400" y="566928"/>
-            <a:ext cx="457200" cy="457200"/>
-          </a:xfrm>
-          <a:prstGeom prst="rect">
-            <a:avLst/>
-          </a:prstGeom>
-          <a:noFill/>
-        </p:spPr>
-        <p:txBody>
-          <a:bodyPr wrap="square" anchor="ctr" lIns="0" rIns="0" tIns="0" bIns="0">
-            <a:spAutoFit/>
-          </a:bodyPr>
-          <a:lstStyle/>
-          <a:p>
-            <a:pPr algn="ctr">
-              <a:spcAft>
-                <a:spcPts val="0"/>
-              </a:spcAft>
-            </a:pPr>
-            <a:r>
-              <a:rPr sz="1500" b="1" i="0">
-                <a:solidFill>
-                  <a:srgbClr val="1F5C6B"/>
-                </a:solidFill>
-                <a:latin typeface="Consolas"/>
-              </a:rPr>
-              <a:t>3</a:t>
-            </a:r>
+          <p:cNvPr id="4" name="Rectangle 3"/>
+          <p:cNvSpPr/>
+          <p:nvPr/>
+        </p:nvSpPr>
+        <p:spPr>
+          <a:xfrm>
+            <a:off x="0" y="658368"/>
+            <a:ext cx="12191695" cy="18288"/>
+          </a:xfrm>
+          <a:prstGeom prst="rect">
+            <a:avLst/>
+          </a:prstGeom>
+          <a:solidFill>
+            <a:srgbClr val="BEDDDF"/>
+          </a:solidFill>
+          <a:ln>
+            <a:noFill/>
+          </a:ln>
+          <a:effectLst/>
+        </p:spPr>
+        <p:style>
+          <a:lnRef idx="1">
+            <a:schemeClr val="accent1"/>
+          </a:lnRef>
+          <a:fillRef idx="3">
+            <a:schemeClr val="accent1"/>
+          </a:fillRef>
+          <a:effectRef idx="2">
+            <a:schemeClr val="accent1"/>
+          </a:effectRef>
+          <a:fontRef idx="minor">
+            <a:schemeClr val="lt1"/>
+          </a:fontRef>
+        </p:style>
+        <p:txBody>
+          <a:bodyPr rtlCol="0" anchor="ctr"/>
+          <a:lstStyle/>
+          <a:p>
+            <a:pPr algn="ctr"/>
           </a:p>
         </p:txBody>
       </p:sp>
@@ -5271,8 +6096,8 @@
         </p:nvSpPr>
         <p:spPr>
           <a:xfrm>
-            <a:off x="1508760" y="548640"/>
-            <a:ext cx="9601200" cy="320040"/>
+            <a:off x="822960" y="0"/>
+            <a:ext cx="4572000" cy="658368"/>
           </a:xfrm>
           <a:prstGeom prst="rect">
             <a:avLst/>
@@ -5291,13 +6116,13 @@
               </a:spcAft>
             </a:pPr>
             <a:r>
-              <a:rPr sz="1050" b="0" i="0">
-                <a:solidFill>
-                  <a:srgbClr val="566572"/>
+              <a:rPr sz="1100" b="1" i="0">
+                <a:solidFill>
+                  <a:srgbClr val="1F5C6B"/>
                 </a:solidFill>
                 <a:latin typeface="Consolas"/>
               </a:rPr>
-              <a:t>THE HEART OF HOW WE WORK</a:t>
+              <a:t>MENTIBLE CLINICAL</a:t>
             </a:r>
           </a:p>
         </p:txBody>
@@ -5310,8 +6135,299 @@
         </p:nvSpPr>
         <p:spPr>
           <a:xfrm>
-            <a:off x="1508760" y="868680"/>
-            <a:ext cx="9692640" cy="320040"/>
+            <a:off x="4206240" y="0"/>
+            <a:ext cx="5394960" cy="658368"/>
+          </a:xfrm>
+          <a:prstGeom prst="rect">
+            <a:avLst/>
+          </a:prstGeom>
+          <a:noFill/>
+        </p:spPr>
+        <p:txBody>
+          <a:bodyPr wrap="square" anchor="ctr" lIns="0" rIns="0" tIns="0" bIns="0">
+            <a:spAutoFit/>
+          </a:bodyPr>
+          <a:lstStyle/>
+          <a:p>
+            <a:pPr algn="r">
+              <a:spcAft>
+                <a:spcPts val="0"/>
+              </a:spcAft>
+            </a:pPr>
+            <a:r>
+              <a:rPr sz="1100" b="0" i="0">
+                <a:solidFill>
+                  <a:srgbClr val="5A6A72"/>
+                </a:solidFill>
+                <a:latin typeface="Consolas"/>
+              </a:rPr>
+              <a:t>SECTION 03 — YOUR KNOWLEDGE LIBRARY</a:t>
+            </a:r>
+          </a:p>
+        </p:txBody>
+      </p:sp>
+      <p:cxnSp>
+        <p:nvCxnSpPr>
+          <p:cNvPr id="7" name="Connector 6"/>
+          <p:cNvCxnSpPr/>
+          <p:nvPr/>
+        </p:nvCxnSpPr>
+        <p:spPr>
+          <a:xfrm>
+            <a:off x="10058400" y="329184"/>
+            <a:ext cx="590702" cy="0"/>
+          </a:xfrm>
+          <a:prstGeom prst="line">
+            <a:avLst/>
+          </a:prstGeom>
+          <a:ln w="22225">
+            <a:solidFill>
+              <a:srgbClr val="C0483C"/>
+            </a:solidFill>
+          </a:ln>
+          <a:effectLst/>
+        </p:spPr>
+        <p:style>
+          <a:lnRef idx="2">
+            <a:schemeClr val="accent1"/>
+          </a:lnRef>
+          <a:fillRef idx="0">
+            <a:schemeClr val="accent1"/>
+          </a:fillRef>
+          <a:effectRef idx="1">
+            <a:schemeClr val="accent1"/>
+          </a:effectRef>
+          <a:fontRef idx="minor">
+            <a:schemeClr val="tx1"/>
+          </a:fontRef>
+        </p:style>
+      </p:cxnSp>
+      <p:cxnSp>
+        <p:nvCxnSpPr>
+          <p:cNvPr id="8" name="Connector 7"/>
+          <p:cNvCxnSpPr/>
+          <p:nvPr/>
+        </p:nvCxnSpPr>
+        <p:spPr>
+          <a:xfrm>
+            <a:off x="10649102" y="329184"/>
+            <a:ext cx="104242" cy="91439"/>
+          </a:xfrm>
+          <a:prstGeom prst="line">
+            <a:avLst/>
+          </a:prstGeom>
+          <a:ln w="22225">
+            <a:solidFill>
+              <a:srgbClr val="C0483C"/>
+            </a:solidFill>
+          </a:ln>
+          <a:effectLst/>
+        </p:spPr>
+        <p:style>
+          <a:lnRef idx="2">
+            <a:schemeClr val="accent1"/>
+          </a:lnRef>
+          <a:fillRef idx="0">
+            <a:schemeClr val="accent1"/>
+          </a:fillRef>
+          <a:effectRef idx="1">
+            <a:schemeClr val="accent1"/>
+          </a:effectRef>
+          <a:fontRef idx="minor">
+            <a:schemeClr val="tx1"/>
+          </a:fontRef>
+        </p:style>
+      </p:cxnSp>
+      <p:cxnSp>
+        <p:nvCxnSpPr>
+          <p:cNvPr id="9" name="Connector 8"/>
+          <p:cNvCxnSpPr/>
+          <p:nvPr/>
+        </p:nvCxnSpPr>
+        <p:spPr>
+          <a:xfrm flipV="1">
+            <a:off x="10753344" y="310896"/>
+            <a:ext cx="86868" cy="109727"/>
+          </a:xfrm>
+          <a:prstGeom prst="line">
+            <a:avLst/>
+          </a:prstGeom>
+          <a:ln w="22225">
+            <a:solidFill>
+              <a:srgbClr val="C0483C"/>
+            </a:solidFill>
+          </a:ln>
+          <a:effectLst/>
+        </p:spPr>
+        <p:style>
+          <a:lnRef idx="2">
+            <a:schemeClr val="accent1"/>
+          </a:lnRef>
+          <a:fillRef idx="0">
+            <a:schemeClr val="accent1"/>
+          </a:fillRef>
+          <a:effectRef idx="1">
+            <a:schemeClr val="accent1"/>
+          </a:effectRef>
+          <a:fontRef idx="minor">
+            <a:schemeClr val="tx1"/>
+          </a:fontRef>
+        </p:style>
+      </p:cxnSp>
+      <p:cxnSp>
+        <p:nvCxnSpPr>
+          <p:cNvPr id="10" name="Connector 9"/>
+          <p:cNvCxnSpPr/>
+          <p:nvPr/>
+        </p:nvCxnSpPr>
+        <p:spPr>
+          <a:xfrm flipV="1">
+            <a:off x="10840212" y="18287"/>
+            <a:ext cx="69494" cy="292609"/>
+          </a:xfrm>
+          <a:prstGeom prst="line">
+            <a:avLst/>
+          </a:prstGeom>
+          <a:ln w="22225">
+            <a:solidFill>
+              <a:srgbClr val="C0483C"/>
+            </a:solidFill>
+          </a:ln>
+          <a:effectLst/>
+        </p:spPr>
+        <p:style>
+          <a:lnRef idx="2">
+            <a:schemeClr val="accent1"/>
+          </a:lnRef>
+          <a:fillRef idx="0">
+            <a:schemeClr val="accent1"/>
+          </a:fillRef>
+          <a:effectRef idx="1">
+            <a:schemeClr val="accent1"/>
+          </a:effectRef>
+          <a:fontRef idx="minor">
+            <a:schemeClr val="tx1"/>
+          </a:fontRef>
+        </p:style>
+      </p:cxnSp>
+      <p:cxnSp>
+        <p:nvCxnSpPr>
+          <p:cNvPr id="11" name="Connector 10"/>
+          <p:cNvCxnSpPr/>
+          <p:nvPr/>
+        </p:nvCxnSpPr>
+        <p:spPr>
+          <a:xfrm>
+            <a:off x="10909706" y="18287"/>
+            <a:ext cx="86868" cy="438913"/>
+          </a:xfrm>
+          <a:prstGeom prst="line">
+            <a:avLst/>
+          </a:prstGeom>
+          <a:ln w="22225">
+            <a:solidFill>
+              <a:srgbClr val="C0483C"/>
+            </a:solidFill>
+          </a:ln>
+          <a:effectLst/>
+        </p:spPr>
+        <p:style>
+          <a:lnRef idx="2">
+            <a:schemeClr val="accent1"/>
+          </a:lnRef>
+          <a:fillRef idx="0">
+            <a:schemeClr val="accent1"/>
+          </a:fillRef>
+          <a:effectRef idx="1">
+            <a:schemeClr val="accent1"/>
+          </a:effectRef>
+          <a:fontRef idx="minor">
+            <a:schemeClr val="tx1"/>
+          </a:fontRef>
+        </p:style>
+      </p:cxnSp>
+      <p:cxnSp>
+        <p:nvCxnSpPr>
+          <p:cNvPr id="12" name="Connector 11"/>
+          <p:cNvCxnSpPr/>
+          <p:nvPr/>
+        </p:nvCxnSpPr>
+        <p:spPr>
+          <a:xfrm flipV="1">
+            <a:off x="10996574" y="329184"/>
+            <a:ext cx="86868" cy="128016"/>
+          </a:xfrm>
+          <a:prstGeom prst="line">
+            <a:avLst/>
+          </a:prstGeom>
+          <a:ln w="22225">
+            <a:solidFill>
+              <a:srgbClr val="C0483C"/>
+            </a:solidFill>
+          </a:ln>
+          <a:effectLst/>
+        </p:spPr>
+        <p:style>
+          <a:lnRef idx="2">
+            <a:schemeClr val="accent1"/>
+          </a:lnRef>
+          <a:fillRef idx="0">
+            <a:schemeClr val="accent1"/>
+          </a:fillRef>
+          <a:effectRef idx="1">
+            <a:schemeClr val="accent1"/>
+          </a:effectRef>
+          <a:fontRef idx="minor">
+            <a:schemeClr val="tx1"/>
+          </a:fontRef>
+        </p:style>
+      </p:cxnSp>
+      <p:cxnSp>
+        <p:nvCxnSpPr>
+          <p:cNvPr id="13" name="Connector 12"/>
+          <p:cNvCxnSpPr/>
+          <p:nvPr/>
+        </p:nvCxnSpPr>
+        <p:spPr>
+          <a:xfrm>
+            <a:off x="11083442" y="329184"/>
+            <a:ext cx="712318" cy="0"/>
+          </a:xfrm>
+          <a:prstGeom prst="line">
+            <a:avLst/>
+          </a:prstGeom>
+          <a:ln w="22225">
+            <a:solidFill>
+              <a:srgbClr val="C0483C"/>
+            </a:solidFill>
+          </a:ln>
+          <a:effectLst/>
+        </p:spPr>
+        <p:style>
+          <a:lnRef idx="2">
+            <a:schemeClr val="accent1"/>
+          </a:lnRef>
+          <a:fillRef idx="0">
+            <a:schemeClr val="accent1"/>
+          </a:fillRef>
+          <a:effectRef idx="1">
+            <a:schemeClr val="accent1"/>
+          </a:effectRef>
+          <a:fontRef idx="minor">
+            <a:schemeClr val="tx1"/>
+          </a:fontRef>
+        </p:style>
+      </p:cxnSp>
+      <p:sp>
+        <p:nvSpPr>
+          <p:cNvPr id="14" name="TextBox 13"/>
+          <p:cNvSpPr txBox="1"/>
+          <p:nvPr/>
+        </p:nvSpPr>
+        <p:spPr>
+          <a:xfrm>
+            <a:off x="822960" y="960120"/>
+            <a:ext cx="10607040" cy="548640"/>
           </a:xfrm>
           <a:prstGeom prst="rect">
             <a:avLst/>
@@ -5330,27 +6446,27 @@
               </a:spcAft>
             </a:pPr>
             <a:r>
-              <a:rPr sz="600" b="0" i="0">
+              <a:rPr sz="2400" b="1" i="0">
                 <a:solidFill>
                   <a:srgbClr val="17242E"/>
                 </a:solidFill>
-                <a:latin typeface="Calibri"/>
+                <a:latin typeface="Georgia"/>
               </a:rPr>
-              <a:t/>
-            </a:r>
-          </a:p>
-        </p:txBody>
-      </p:sp>
-      <p:sp>
-        <p:nvSpPr>
-          <p:cNvPr id="7" name="TextBox 6"/>
+              <a:t>This becomes your knowledge library</a:t>
+            </a:r>
+          </a:p>
+        </p:txBody>
+      </p:sp>
+      <p:sp>
+        <p:nvSpPr>
+          <p:cNvPr id="15" name="TextBox 14"/>
           <p:cNvSpPr txBox="1"/>
           <p:nvPr/>
         </p:nvSpPr>
         <p:spPr>
           <a:xfrm>
-            <a:off x="914400" y="1234440"/>
-            <a:ext cx="10424160" cy="822960"/>
+            <a:off x="822960" y="1554480"/>
+            <a:ext cx="10424160" cy="548640"/>
           </a:xfrm>
           <a:prstGeom prst="rect">
             <a:avLst/>
@@ -5365,106 +6481,64 @@
           <a:p>
             <a:pPr algn="l">
               <a:lnSpc>
-                <a:spcPct val="100000"/>
+                <a:spcPct val="105000"/>
               </a:lnSpc>
               <a:spcAft>
                 <a:spcPts val="0"/>
               </a:spcAft>
             </a:pPr>
             <a:r>
-              <a:rPr sz="2500" b="1" i="0">
-                <a:solidFill>
-                  <a:srgbClr val="17242E"/>
+              <a:rPr sz="1300" b="0" i="0">
+                <a:solidFill>
+                  <a:srgbClr val="5A6A72"/>
                 </a:solidFill>
                 <a:latin typeface="Georgia"/>
               </a:rPr>
-              <a:t>This becomes your knowledge library</a:t>
-            </a:r>
-          </a:p>
-        </p:txBody>
-      </p:sp>
-      <p:sp>
-        <p:nvSpPr>
-          <p:cNvPr id="8" name="TextBox 7"/>
-          <p:cNvSpPr txBox="1"/>
-          <p:nvPr/>
-        </p:nvSpPr>
-        <p:spPr>
-          <a:xfrm>
-            <a:off x="914400" y="2148840"/>
-            <a:ext cx="10241280" cy="640080"/>
-          </a:xfrm>
-          <a:prstGeom prst="rect">
-            <a:avLst/>
-          </a:prstGeom>
-          <a:noFill/>
-        </p:spPr>
-        <p:txBody>
-          <a:bodyPr wrap="square" anchor="t" lIns="0" rIns="0" tIns="0" bIns="0">
-            <a:spAutoFit/>
-          </a:bodyPr>
-          <a:lstStyle/>
-          <a:p>
-            <a:pPr algn="l">
-              <a:lnSpc>
-                <a:spcPct val="110000"/>
-              </a:lnSpc>
-              <a:spcAft>
-                <a:spcPts val="0"/>
-              </a:spcAft>
-            </a:pPr>
-            <a:r>
-              <a:rPr sz="1400" b="0" i="0">
-                <a:solidFill>
-                  <a:srgbClr val="566572"/>
-                </a:solidFill>
-                <a:latin typeface="Calibri"/>
-              </a:rPr>
               <a:t>Not my memory — </a:t>
             </a:r>
             <a:r>
-              <a:rPr sz="1400" b="1" i="1">
+              <a:rPr sz="1300" b="1" i="1">
                 <a:solidFill>
                   <a:srgbClr val="17242E"/>
                 </a:solidFill>
-                <a:latin typeface="Calibri"/>
+                <a:latin typeface="Georgia"/>
               </a:rPr>
               <a:t>yours</a:t>
             </a:r>
             <a:r>
-              <a:rPr sz="1400" b="0" i="0">
-                <a:solidFill>
-                  <a:srgbClr val="566572"/>
-                </a:solidFill>
-                <a:latin typeface="Calibri"/>
+              <a:rPr sz="1300" b="0" i="0">
+                <a:solidFill>
+                  <a:srgbClr val="5A6A72"/>
+                </a:solidFill>
+                <a:latin typeface="Georgia"/>
               </a:rPr>
-              <a:t>. The specific sources you chose and trust, gathered into one place I've read cover to cover.</a:t>
-            </a:r>
-          </a:p>
-        </p:txBody>
-      </p:sp>
-      <p:sp>
-        <p:nvSpPr>
-          <p:cNvPr id="9" name="Rounded Rectangle 8"/>
+              <a:t>. The sources you chose and trust, filed in one chart I've read cover to cover.</a:t>
+            </a:r>
+          </a:p>
+        </p:txBody>
+      </p:sp>
+      <p:sp>
+        <p:nvSpPr>
+          <p:cNvPr id="16" name="Rounded Rectangle 15"/>
           <p:cNvSpPr/>
           <p:nvPr/>
         </p:nvSpPr>
         <p:spPr>
           <a:xfrm>
-            <a:off x="2194560" y="2971800"/>
-            <a:ext cx="7772400" cy="2103120"/>
+            <a:off x="2011680" y="2468880"/>
+            <a:ext cx="6949440" cy="2468880"/>
           </a:xfrm>
           <a:prstGeom prst="roundRect">
             <a:avLst>
-              <a:gd name="adj" fmla="val 5000"/>
+              <a:gd name="adj" fmla="val 3000"/>
             </a:avLst>
           </a:prstGeom>
           <a:solidFill>
-            <a:srgbClr val="E4F0F1"/>
+            <a:srgbClr val="FFFFFF"/>
           </a:solidFill>
-          <a:ln w="12700">
+          <a:ln w="25400">
             <a:solidFill>
-              <a:srgbClr val="BEDDDF"/>
+              <a:srgbClr val="1F5C6B"/>
             </a:solidFill>
           </a:ln>
           <a:effectLst/>
@@ -5493,18 +6567,101 @@
       </p:sp>
       <p:sp>
         <p:nvSpPr>
-          <p:cNvPr id="10" name="Rounded Rectangle 9"/>
+          <p:cNvPr id="17" name="Rectangle 16"/>
           <p:cNvSpPr/>
           <p:nvPr/>
         </p:nvSpPr>
         <p:spPr>
           <a:xfrm>
-            <a:off x="3589020" y="3291839"/>
-            <a:ext cx="777240" cy="1554480"/>
+            <a:off x="2011680" y="2468880"/>
+            <a:ext cx="6949440" cy="457200"/>
+          </a:xfrm>
+          <a:prstGeom prst="rect">
+            <a:avLst/>
+          </a:prstGeom>
+          <a:solidFill>
+            <a:srgbClr val="E4F0F1"/>
+          </a:solidFill>
+          <a:ln>
+            <a:noFill/>
+          </a:ln>
+          <a:effectLst/>
+        </p:spPr>
+        <p:style>
+          <a:lnRef idx="1">
+            <a:schemeClr val="accent1"/>
+          </a:lnRef>
+          <a:fillRef idx="3">
+            <a:schemeClr val="accent1"/>
+          </a:fillRef>
+          <a:effectRef idx="2">
+            <a:schemeClr val="accent1"/>
+          </a:effectRef>
+          <a:fontRef idx="minor">
+            <a:schemeClr val="lt1"/>
+          </a:fontRef>
+        </p:style>
+        <p:txBody>
+          <a:bodyPr rtlCol="0" anchor="ctr"/>
+          <a:lstStyle/>
+          <a:p>
+            <a:pPr algn="ctr"/>
+          </a:p>
+        </p:txBody>
+      </p:sp>
+      <p:sp>
+        <p:nvSpPr>
+          <p:cNvPr id="18" name="TextBox 17"/>
+          <p:cNvSpPr txBox="1"/>
+          <p:nvPr/>
+        </p:nvSpPr>
+        <p:spPr>
+          <a:xfrm>
+            <a:off x="2286000" y="2468880"/>
+            <a:ext cx="6400800" cy="457200"/>
+          </a:xfrm>
+          <a:prstGeom prst="rect">
+            <a:avLst/>
+          </a:prstGeom>
+          <a:noFill/>
+        </p:spPr>
+        <p:txBody>
+          <a:bodyPr wrap="square" anchor="ctr" lIns="0" rIns="0" tIns="0" bIns="0">
+            <a:spAutoFit/>
+          </a:bodyPr>
+          <a:lstStyle/>
+          <a:p>
+            <a:pPr algn="l">
+              <a:spcAft>
+                <a:spcPts val="0"/>
+              </a:spcAft>
+            </a:pPr>
+            <a:r>
+              <a:rPr sz="1100" b="1" i="0">
+                <a:solidFill>
+                  <a:srgbClr val="1F5C6B"/>
+                </a:solidFill>
+                <a:latin typeface="Consolas"/>
+              </a:rPr>
+              <a:t>CHART — YOUR PRACTICE</a:t>
+            </a:r>
+          </a:p>
+        </p:txBody>
+      </p:sp>
+      <p:sp>
+        <p:nvSpPr>
+          <p:cNvPr id="19" name="Rounded Rectangle 18"/>
+          <p:cNvSpPr/>
+          <p:nvPr/>
+        </p:nvSpPr>
+        <p:spPr>
+          <a:xfrm>
+            <a:off x="8915400" y="3026664"/>
+            <a:ext cx="1737360" cy="256032"/>
           </a:xfrm>
           <a:prstGeom prst="roundRect">
             <a:avLst>
-              <a:gd name="adj" fmla="val 8000"/>
+              <a:gd name="adj" fmla="val 20000"/>
             </a:avLst>
           </a:prstGeom>
           <a:solidFill>
@@ -5539,14 +6696,14 @@
       </p:sp>
       <p:sp>
         <p:nvSpPr>
-          <p:cNvPr id="11" name="TextBox 10"/>
+          <p:cNvPr id="20" name="TextBox 19"/>
           <p:cNvSpPr txBox="1"/>
           <p:nvPr/>
         </p:nvSpPr>
         <p:spPr>
           <a:xfrm>
-            <a:off x="3451860" y="3273551"/>
-            <a:ext cx="1051560" cy="1554480"/>
+            <a:off x="9070848" y="3026664"/>
+            <a:ext cx="1554480" cy="256032"/>
           </a:xfrm>
           <a:prstGeom prst="rect">
             <a:avLst/>
@@ -5554,14 +6711,18 @@
           <a:noFill/>
         </p:spPr>
         <p:txBody>
-          <a:bodyPr wrap="none" anchor="ctr">
+          <a:bodyPr wrap="square" anchor="ctr" lIns="0" rIns="0" tIns="0" bIns="0">
             <a:spAutoFit/>
           </a:bodyPr>
           <a:lstStyle/>
           <a:p>
-            <a:pPr algn="ctr"/>
-            <a:r>
-              <a:rPr sz="1100" b="1">
+            <a:pPr algn="l">
+              <a:spcAft>
+                <a:spcPts val="0"/>
+              </a:spcAft>
+            </a:pPr>
+            <a:r>
+              <a:rPr sz="1100" b="1" i="0">
                 <a:solidFill>
                   <a:srgbClr val="FFFFFF"/>
                 </a:solidFill>
@@ -5574,18 +6735,101 @@
       </p:sp>
       <p:sp>
         <p:nvSpPr>
-          <p:cNvPr id="12" name="Rounded Rectangle 11"/>
+          <p:cNvPr id="21" name="Rectangle 20"/>
           <p:cNvSpPr/>
           <p:nvPr/>
         </p:nvSpPr>
         <p:spPr>
           <a:xfrm>
-            <a:off x="4640579" y="3474720"/>
-            <a:ext cx="777240" cy="1371600"/>
+            <a:off x="2286000" y="3328416"/>
+            <a:ext cx="6400800" cy="13716"/>
+          </a:xfrm>
+          <a:prstGeom prst="rect">
+            <a:avLst/>
+          </a:prstGeom>
+          <a:solidFill>
+            <a:srgbClr val="D9E0DE"/>
+          </a:solidFill>
+          <a:ln>
+            <a:noFill/>
+          </a:ln>
+          <a:effectLst/>
+        </p:spPr>
+        <p:style>
+          <a:lnRef idx="1">
+            <a:schemeClr val="accent1"/>
+          </a:lnRef>
+          <a:fillRef idx="3">
+            <a:schemeClr val="accent1"/>
+          </a:fillRef>
+          <a:effectRef idx="2">
+            <a:schemeClr val="accent1"/>
+          </a:effectRef>
+          <a:fontRef idx="minor">
+            <a:schemeClr val="lt1"/>
+          </a:fontRef>
+        </p:style>
+        <p:txBody>
+          <a:bodyPr rtlCol="0" anchor="ctr"/>
+          <a:lstStyle/>
+          <a:p>
+            <a:pPr algn="ctr"/>
+          </a:p>
+        </p:txBody>
+      </p:sp>
+      <p:sp>
+        <p:nvSpPr>
+          <p:cNvPr id="22" name="TextBox 21"/>
+          <p:cNvSpPr txBox="1"/>
+          <p:nvPr/>
+        </p:nvSpPr>
+        <p:spPr>
+          <a:xfrm>
+            <a:off x="2331720" y="2971800"/>
+            <a:ext cx="6309359" cy="384048"/>
+          </a:xfrm>
+          <a:prstGeom prst="rect">
+            <a:avLst/>
+          </a:prstGeom>
+          <a:noFill/>
+        </p:spPr>
+        <p:txBody>
+          <a:bodyPr wrap="square" anchor="ctr" lIns="0" rIns="0" tIns="0" bIns="0">
+            <a:spAutoFit/>
+          </a:bodyPr>
+          <a:lstStyle/>
+          <a:p>
+            <a:pPr algn="l">
+              <a:spcAft>
+                <a:spcPts val="0"/>
+              </a:spcAft>
+            </a:pPr>
+            <a:r>
+              <a:rPr sz="1200" b="0" i="0">
+                <a:solidFill>
+                  <a:srgbClr val="17242E"/>
+                </a:solidFill>
+                <a:latin typeface="Georgia"/>
+              </a:rPr>
+              <a:t>Guidelines</a:t>
+            </a:r>
+          </a:p>
+        </p:txBody>
+      </p:sp>
+      <p:sp>
+        <p:nvSpPr>
+          <p:cNvPr id="23" name="Rounded Rectangle 22"/>
+          <p:cNvSpPr/>
+          <p:nvPr/>
+        </p:nvSpPr>
+        <p:spPr>
+          <a:xfrm>
+            <a:off x="8915400" y="3410712"/>
+            <a:ext cx="1737360" cy="256032"/>
           </a:xfrm>
           <a:prstGeom prst="roundRect">
             <a:avLst>
-              <a:gd name="adj" fmla="val 8000"/>
+              <a:gd name="adj" fmla="val 20000"/>
             </a:avLst>
           </a:prstGeom>
           <a:solidFill>
@@ -5620,14 +6864,14 @@
       </p:sp>
       <p:sp>
         <p:nvSpPr>
-          <p:cNvPr id="13" name="TextBox 12"/>
+          <p:cNvPr id="24" name="TextBox 23"/>
           <p:cNvSpPr txBox="1"/>
           <p:nvPr/>
         </p:nvSpPr>
         <p:spPr>
           <a:xfrm>
-            <a:off x="4503419" y="3456432"/>
-            <a:ext cx="1051560" cy="1371600"/>
+            <a:off x="9070848" y="3410712"/>
+            <a:ext cx="1554480" cy="256032"/>
           </a:xfrm>
           <a:prstGeom prst="rect">
             <a:avLst/>
@@ -5635,38 +6879,125 @@
           <a:noFill/>
         </p:spPr>
         <p:txBody>
-          <a:bodyPr wrap="none" anchor="ctr">
+          <a:bodyPr wrap="square" anchor="ctr" lIns="0" rIns="0" tIns="0" bIns="0">
             <a:spAutoFit/>
           </a:bodyPr>
           <a:lstStyle/>
           <a:p>
-            <a:pPr algn="ctr"/>
-            <a:r>
-              <a:rPr sz="1100" b="1">
+            <a:pPr algn="l">
+              <a:spcAft>
+                <a:spcPts val="0"/>
+              </a:spcAft>
+            </a:pPr>
+            <a:r>
+              <a:rPr sz="1100" b="1" i="0">
                 <a:solidFill>
                   <a:srgbClr val="FFFFFF"/>
                 </a:solidFill>
                 <a:latin typeface="Calibri"/>
               </a:rPr>
-              <a:t>Papers</a:t>
-            </a:r>
-          </a:p>
-        </p:txBody>
-      </p:sp>
-      <p:sp>
-        <p:nvSpPr>
-          <p:cNvPr id="14" name="Rounded Rectangle 13"/>
+              <a:t>Journal papers</a:t>
+            </a:r>
+          </a:p>
+        </p:txBody>
+      </p:sp>
+      <p:sp>
+        <p:nvSpPr>
+          <p:cNvPr id="25" name="Rectangle 24"/>
           <p:cNvSpPr/>
           <p:nvPr/>
         </p:nvSpPr>
         <p:spPr>
           <a:xfrm>
-            <a:off x="5692140" y="3154679"/>
-            <a:ext cx="777240" cy="1691640"/>
+            <a:off x="2286000" y="3712463"/>
+            <a:ext cx="6400800" cy="13716"/>
+          </a:xfrm>
+          <a:prstGeom prst="rect">
+            <a:avLst/>
+          </a:prstGeom>
+          <a:solidFill>
+            <a:srgbClr val="D9E0DE"/>
+          </a:solidFill>
+          <a:ln>
+            <a:noFill/>
+          </a:ln>
+          <a:effectLst/>
+        </p:spPr>
+        <p:style>
+          <a:lnRef idx="1">
+            <a:schemeClr val="accent1"/>
+          </a:lnRef>
+          <a:fillRef idx="3">
+            <a:schemeClr val="accent1"/>
+          </a:fillRef>
+          <a:effectRef idx="2">
+            <a:schemeClr val="accent1"/>
+          </a:effectRef>
+          <a:fontRef idx="minor">
+            <a:schemeClr val="lt1"/>
+          </a:fontRef>
+        </p:style>
+        <p:txBody>
+          <a:bodyPr rtlCol="0" anchor="ctr"/>
+          <a:lstStyle/>
+          <a:p>
+            <a:pPr algn="ctr"/>
+          </a:p>
+        </p:txBody>
+      </p:sp>
+      <p:sp>
+        <p:nvSpPr>
+          <p:cNvPr id="26" name="TextBox 25"/>
+          <p:cNvSpPr txBox="1"/>
+          <p:nvPr/>
+        </p:nvSpPr>
+        <p:spPr>
+          <a:xfrm>
+            <a:off x="2331720" y="3355848"/>
+            <a:ext cx="6309359" cy="384048"/>
+          </a:xfrm>
+          <a:prstGeom prst="rect">
+            <a:avLst/>
+          </a:prstGeom>
+          <a:noFill/>
+        </p:spPr>
+        <p:txBody>
+          <a:bodyPr wrap="square" anchor="ctr" lIns="0" rIns="0" tIns="0" bIns="0">
+            <a:spAutoFit/>
+          </a:bodyPr>
+          <a:lstStyle/>
+          <a:p>
+            <a:pPr algn="l">
+              <a:spcAft>
+                <a:spcPts val="0"/>
+              </a:spcAft>
+            </a:pPr>
+            <a:r>
+              <a:rPr sz="1200" b="0" i="0">
+                <a:solidFill>
+                  <a:srgbClr val="17242E"/>
+                </a:solidFill>
+                <a:latin typeface="Georgia"/>
+              </a:rPr>
+              <a:t>Journal papers</a:t>
+            </a:r>
+          </a:p>
+        </p:txBody>
+      </p:sp>
+      <p:sp>
+        <p:nvSpPr>
+          <p:cNvPr id="27" name="Rounded Rectangle 26"/>
+          <p:cNvSpPr/>
+          <p:nvPr/>
+        </p:nvSpPr>
+        <p:spPr>
+          <a:xfrm>
+            <a:off x="8915400" y="3794759"/>
+            <a:ext cx="1737360" cy="256032"/>
           </a:xfrm>
           <a:prstGeom prst="roundRect">
             <a:avLst>
-              <a:gd name="adj" fmla="val 8000"/>
+              <a:gd name="adj" fmla="val 20000"/>
             </a:avLst>
           </a:prstGeom>
           <a:solidFill>
@@ -5701,14 +7032,14 @@
       </p:sp>
       <p:sp>
         <p:nvSpPr>
-          <p:cNvPr id="15" name="TextBox 14"/>
+          <p:cNvPr id="28" name="TextBox 27"/>
           <p:cNvSpPr txBox="1"/>
           <p:nvPr/>
         </p:nvSpPr>
         <p:spPr>
           <a:xfrm>
-            <a:off x="5554979" y="3136391"/>
-            <a:ext cx="1051560" cy="1691640"/>
+            <a:off x="9070848" y="3794759"/>
+            <a:ext cx="1554480" cy="256032"/>
           </a:xfrm>
           <a:prstGeom prst="rect">
             <a:avLst/>
@@ -5716,38 +7047,125 @@
           <a:noFill/>
         </p:spPr>
         <p:txBody>
-          <a:bodyPr wrap="none" anchor="ctr">
+          <a:bodyPr wrap="square" anchor="ctr" lIns="0" rIns="0" tIns="0" bIns="0">
             <a:spAutoFit/>
           </a:bodyPr>
           <a:lstStyle/>
           <a:p>
-            <a:pPr algn="ctr"/>
-            <a:r>
-              <a:rPr sz="1100" b="1">
+            <a:pPr algn="l">
+              <a:spcAft>
+                <a:spcPts val="0"/>
+              </a:spcAft>
+            </a:pPr>
+            <a:r>
+              <a:rPr sz="1100" b="1" i="0">
                 <a:solidFill>
                   <a:srgbClr val="FFFFFF"/>
                 </a:solidFill>
                 <a:latin typeface="Calibri"/>
               </a:rPr>
-              <a:t>Drug ref</a:t>
-            </a:r>
-          </a:p>
-        </p:txBody>
-      </p:sp>
-      <p:sp>
-        <p:nvSpPr>
-          <p:cNvPr id="16" name="Rounded Rectangle 15"/>
+              <a:t>Drug reference</a:t>
+            </a:r>
+          </a:p>
+        </p:txBody>
+      </p:sp>
+      <p:sp>
+        <p:nvSpPr>
+          <p:cNvPr id="29" name="Rectangle 28"/>
           <p:cNvSpPr/>
           <p:nvPr/>
         </p:nvSpPr>
         <p:spPr>
           <a:xfrm>
-            <a:off x="6743700" y="3520439"/>
-            <a:ext cx="777240" cy="1325880"/>
+            <a:off x="2286000" y="4096511"/>
+            <a:ext cx="6400800" cy="13716"/>
+          </a:xfrm>
+          <a:prstGeom prst="rect">
+            <a:avLst/>
+          </a:prstGeom>
+          <a:solidFill>
+            <a:srgbClr val="D9E0DE"/>
+          </a:solidFill>
+          <a:ln>
+            <a:noFill/>
+          </a:ln>
+          <a:effectLst/>
+        </p:spPr>
+        <p:style>
+          <a:lnRef idx="1">
+            <a:schemeClr val="accent1"/>
+          </a:lnRef>
+          <a:fillRef idx="3">
+            <a:schemeClr val="accent1"/>
+          </a:fillRef>
+          <a:effectRef idx="2">
+            <a:schemeClr val="accent1"/>
+          </a:effectRef>
+          <a:fontRef idx="minor">
+            <a:schemeClr val="lt1"/>
+          </a:fontRef>
+        </p:style>
+        <p:txBody>
+          <a:bodyPr rtlCol="0" anchor="ctr"/>
+          <a:lstStyle/>
+          <a:p>
+            <a:pPr algn="ctr"/>
+          </a:p>
+        </p:txBody>
+      </p:sp>
+      <p:sp>
+        <p:nvSpPr>
+          <p:cNvPr id="30" name="TextBox 29"/>
+          <p:cNvSpPr txBox="1"/>
+          <p:nvPr/>
+        </p:nvSpPr>
+        <p:spPr>
+          <a:xfrm>
+            <a:off x="2331720" y="3739896"/>
+            <a:ext cx="6309359" cy="384048"/>
+          </a:xfrm>
+          <a:prstGeom prst="rect">
+            <a:avLst/>
+          </a:prstGeom>
+          <a:noFill/>
+        </p:spPr>
+        <p:txBody>
+          <a:bodyPr wrap="square" anchor="ctr" lIns="0" rIns="0" tIns="0" bIns="0">
+            <a:spAutoFit/>
+          </a:bodyPr>
+          <a:lstStyle/>
+          <a:p>
+            <a:pPr algn="l">
+              <a:spcAft>
+                <a:spcPts val="0"/>
+              </a:spcAft>
+            </a:pPr>
+            <a:r>
+              <a:rPr sz="1200" b="0" i="0">
+                <a:solidFill>
+                  <a:srgbClr val="17242E"/>
+                </a:solidFill>
+                <a:latin typeface="Georgia"/>
+              </a:rPr>
+              <a:t>Drug reference</a:t>
+            </a:r>
+          </a:p>
+        </p:txBody>
+      </p:sp>
+      <p:sp>
+        <p:nvSpPr>
+          <p:cNvPr id="31" name="Rounded Rectangle 30"/>
+          <p:cNvSpPr/>
+          <p:nvPr/>
+        </p:nvSpPr>
+        <p:spPr>
+          <a:xfrm>
+            <a:off x="8915400" y="4178807"/>
+            <a:ext cx="1737360" cy="256032"/>
           </a:xfrm>
           <a:prstGeom prst="roundRect">
             <a:avLst>
-              <a:gd name="adj" fmla="val 8000"/>
+              <a:gd name="adj" fmla="val 20000"/>
             </a:avLst>
           </a:prstGeom>
           <a:solidFill>
@@ -5782,14 +7200,14 @@
       </p:sp>
       <p:sp>
         <p:nvSpPr>
-          <p:cNvPr id="17" name="TextBox 16"/>
+          <p:cNvPr id="32" name="TextBox 31"/>
           <p:cNvSpPr txBox="1"/>
           <p:nvPr/>
         </p:nvSpPr>
         <p:spPr>
           <a:xfrm>
-            <a:off x="6606540" y="3502151"/>
-            <a:ext cx="1051560" cy="1325880"/>
+            <a:off x="9070848" y="4178807"/>
+            <a:ext cx="1554480" cy="256032"/>
           </a:xfrm>
           <a:prstGeom prst="rect">
             <a:avLst/>
@@ -5797,38 +7215,125 @@
           <a:noFill/>
         </p:spPr>
         <p:txBody>
-          <a:bodyPr wrap="none" anchor="ctr">
+          <a:bodyPr wrap="square" anchor="ctr" lIns="0" rIns="0" tIns="0" bIns="0">
             <a:spAutoFit/>
           </a:bodyPr>
           <a:lstStyle/>
           <a:p>
-            <a:pPr algn="ctr"/>
-            <a:r>
-              <a:rPr sz="1100" b="1">
+            <a:pPr algn="l">
+              <a:spcAft>
+                <a:spcPts val="0"/>
+              </a:spcAft>
+            </a:pPr>
+            <a:r>
+              <a:rPr sz="1100" b="1" i="0">
                 <a:solidFill>
                   <a:srgbClr val="FFFFFF"/>
                 </a:solidFill>
                 <a:latin typeface="Calibri"/>
               </a:rPr>
-              <a:t>Notes</a:t>
-            </a:r>
-          </a:p>
-        </p:txBody>
-      </p:sp>
-      <p:sp>
-        <p:nvSpPr>
-          <p:cNvPr id="18" name="Rounded Rectangle 17"/>
+              <a:t>Case notes</a:t>
+            </a:r>
+          </a:p>
+        </p:txBody>
+      </p:sp>
+      <p:sp>
+        <p:nvSpPr>
+          <p:cNvPr id="33" name="Rectangle 32"/>
           <p:cNvSpPr/>
           <p:nvPr/>
         </p:nvSpPr>
         <p:spPr>
           <a:xfrm>
-            <a:off x="7795260" y="3383279"/>
-            <a:ext cx="777240" cy="1463040"/>
+            <a:off x="2286000" y="4480559"/>
+            <a:ext cx="6400800" cy="13716"/>
+          </a:xfrm>
+          <a:prstGeom prst="rect">
+            <a:avLst/>
+          </a:prstGeom>
+          <a:solidFill>
+            <a:srgbClr val="D9E0DE"/>
+          </a:solidFill>
+          <a:ln>
+            <a:noFill/>
+          </a:ln>
+          <a:effectLst/>
+        </p:spPr>
+        <p:style>
+          <a:lnRef idx="1">
+            <a:schemeClr val="accent1"/>
+          </a:lnRef>
+          <a:fillRef idx="3">
+            <a:schemeClr val="accent1"/>
+          </a:fillRef>
+          <a:effectRef idx="2">
+            <a:schemeClr val="accent1"/>
+          </a:effectRef>
+          <a:fontRef idx="minor">
+            <a:schemeClr val="lt1"/>
+          </a:fontRef>
+        </p:style>
+        <p:txBody>
+          <a:bodyPr rtlCol="0" anchor="ctr"/>
+          <a:lstStyle/>
+          <a:p>
+            <a:pPr algn="ctr"/>
+          </a:p>
+        </p:txBody>
+      </p:sp>
+      <p:sp>
+        <p:nvSpPr>
+          <p:cNvPr id="34" name="TextBox 33"/>
+          <p:cNvSpPr txBox="1"/>
+          <p:nvPr/>
+        </p:nvSpPr>
+        <p:spPr>
+          <a:xfrm>
+            <a:off x="2331720" y="4123944"/>
+            <a:ext cx="6309359" cy="384048"/>
+          </a:xfrm>
+          <a:prstGeom prst="rect">
+            <a:avLst/>
+          </a:prstGeom>
+          <a:noFill/>
+        </p:spPr>
+        <p:txBody>
+          <a:bodyPr wrap="square" anchor="ctr" lIns="0" rIns="0" tIns="0" bIns="0">
+            <a:spAutoFit/>
+          </a:bodyPr>
+          <a:lstStyle/>
+          <a:p>
+            <a:pPr algn="l">
+              <a:spcAft>
+                <a:spcPts val="0"/>
+              </a:spcAft>
+            </a:pPr>
+            <a:r>
+              <a:rPr sz="1200" b="0" i="0">
+                <a:solidFill>
+                  <a:srgbClr val="17242E"/>
+                </a:solidFill>
+                <a:latin typeface="Georgia"/>
+              </a:rPr>
+              <a:t>Case notes</a:t>
+            </a:r>
+          </a:p>
+        </p:txBody>
+      </p:sp>
+      <p:sp>
+        <p:nvSpPr>
+          <p:cNvPr id="35" name="Rounded Rectangle 34"/>
+          <p:cNvSpPr/>
+          <p:nvPr/>
+        </p:nvSpPr>
+        <p:spPr>
+          <a:xfrm>
+            <a:off x="8915400" y="4562855"/>
+            <a:ext cx="1737360" cy="256032"/>
           </a:xfrm>
           <a:prstGeom prst="roundRect">
             <a:avLst>
-              <a:gd name="adj" fmla="val 8000"/>
+              <a:gd name="adj" fmla="val 20000"/>
             </a:avLst>
           </a:prstGeom>
           <a:solidFill>
@@ -5863,14 +7368,14 @@
       </p:sp>
       <p:sp>
         <p:nvSpPr>
-          <p:cNvPr id="19" name="TextBox 18"/>
+          <p:cNvPr id="36" name="TextBox 35"/>
           <p:cNvSpPr txBox="1"/>
           <p:nvPr/>
         </p:nvSpPr>
         <p:spPr>
           <a:xfrm>
-            <a:off x="7658100" y="3364991"/>
-            <a:ext cx="1051560" cy="1463040"/>
+            <a:off x="9070848" y="4562855"/>
+            <a:ext cx="1554480" cy="256032"/>
           </a:xfrm>
           <a:prstGeom prst="rect">
             <a:avLst/>
@@ -5878,34 +7383,121 @@
           <a:noFill/>
         </p:spPr>
         <p:txBody>
-          <a:bodyPr wrap="none" anchor="ctr">
+          <a:bodyPr wrap="square" anchor="ctr" lIns="0" rIns="0" tIns="0" bIns="0">
             <a:spAutoFit/>
           </a:bodyPr>
           <a:lstStyle/>
           <a:p>
-            <a:pPr algn="ctr"/>
-            <a:r>
-              <a:rPr sz="1100" b="1">
+            <a:pPr algn="l">
+              <a:spcAft>
+                <a:spcPts val="0"/>
+              </a:spcAft>
+            </a:pPr>
+            <a:r>
+              <a:rPr sz="1100" b="1" i="0">
                 <a:solidFill>
                   <a:srgbClr val="FFFFFF"/>
                 </a:solidFill>
                 <a:latin typeface="Calibri"/>
               </a:rPr>
-              <a:t>Society</a:t>
-            </a:r>
-          </a:p>
-        </p:txBody>
-      </p:sp>
-      <p:sp>
-        <p:nvSpPr>
-          <p:cNvPr id="20" name="TextBox 19"/>
+              <a:t>Society updates</a:t>
+            </a:r>
+          </a:p>
+        </p:txBody>
+      </p:sp>
+      <p:sp>
+        <p:nvSpPr>
+          <p:cNvPr id="37" name="Rectangle 36"/>
+          <p:cNvSpPr/>
+          <p:nvPr/>
+        </p:nvSpPr>
+        <p:spPr>
+          <a:xfrm>
+            <a:off x="2286000" y="4864607"/>
+            <a:ext cx="6400800" cy="13716"/>
+          </a:xfrm>
+          <a:prstGeom prst="rect">
+            <a:avLst/>
+          </a:prstGeom>
+          <a:solidFill>
+            <a:srgbClr val="D9E0DE"/>
+          </a:solidFill>
+          <a:ln>
+            <a:noFill/>
+          </a:ln>
+          <a:effectLst/>
+        </p:spPr>
+        <p:style>
+          <a:lnRef idx="1">
+            <a:schemeClr val="accent1"/>
+          </a:lnRef>
+          <a:fillRef idx="3">
+            <a:schemeClr val="accent1"/>
+          </a:fillRef>
+          <a:effectRef idx="2">
+            <a:schemeClr val="accent1"/>
+          </a:effectRef>
+          <a:fontRef idx="minor">
+            <a:schemeClr val="lt1"/>
+          </a:fontRef>
+        </p:style>
+        <p:txBody>
+          <a:bodyPr rtlCol="0" anchor="ctr"/>
+          <a:lstStyle/>
+          <a:p>
+            <a:pPr algn="ctr"/>
+          </a:p>
+        </p:txBody>
+      </p:sp>
+      <p:sp>
+        <p:nvSpPr>
+          <p:cNvPr id="38" name="TextBox 37"/>
           <p:cNvSpPr txBox="1"/>
           <p:nvPr/>
         </p:nvSpPr>
         <p:spPr>
           <a:xfrm>
-            <a:off x="914400" y="5257800"/>
-            <a:ext cx="10332720" cy="365760"/>
+            <a:off x="2331720" y="4507992"/>
+            <a:ext cx="6309359" cy="384048"/>
+          </a:xfrm>
+          <a:prstGeom prst="rect">
+            <a:avLst/>
+          </a:prstGeom>
+          <a:noFill/>
+        </p:spPr>
+        <p:txBody>
+          <a:bodyPr wrap="square" anchor="ctr" lIns="0" rIns="0" tIns="0" bIns="0">
+            <a:spAutoFit/>
+          </a:bodyPr>
+          <a:lstStyle/>
+          <a:p>
+            <a:pPr algn="l">
+              <a:spcAft>
+                <a:spcPts val="0"/>
+              </a:spcAft>
+            </a:pPr>
+            <a:r>
+              <a:rPr sz="1200" b="0" i="0">
+                <a:solidFill>
+                  <a:srgbClr val="17242E"/>
+                </a:solidFill>
+                <a:latin typeface="Georgia"/>
+              </a:rPr>
+              <a:t>Society updates</a:t>
+            </a:r>
+          </a:p>
+        </p:txBody>
+      </p:sp>
+      <p:sp>
+        <p:nvSpPr>
+          <p:cNvPr id="39" name="TextBox 38"/>
+          <p:cNvSpPr txBox="1"/>
+          <p:nvPr/>
+        </p:nvSpPr>
+        <p:spPr>
+          <a:xfrm>
+            <a:off x="822960" y="5257800"/>
+            <a:ext cx="10424160" cy="365760"/>
           </a:xfrm>
           <a:prstGeom prst="rect">
             <a:avLst/>
@@ -5924,13 +7516,13 @@
               </a:spcAft>
             </a:pPr>
             <a:r>
-              <a:rPr sz="1300" b="0" i="1">
-                <a:solidFill>
-                  <a:srgbClr val="566572"/>
-                </a:solidFill>
-                <a:latin typeface="Calibri"/>
+              <a:rPr sz="1250" b="0" i="1">
+                <a:solidFill>
+                  <a:srgbClr val="5A6A72"/>
+                </a:solidFill>
+                <a:latin typeface="Georgia"/>
               </a:rPr>
-              <a:t>Every book here, you put there. That's the point — I only work from what you trust.</a:t>
+              <a:t>Every tab here, you filed. That's the point — I work from your chart, not the web's.</a:t>
             </a:r>
           </a:p>
         </p:txBody>
@@ -5968,7 +7560,7 @@
             <a:avLst/>
           </a:prstGeom>
           <a:solidFill>
-            <a:srgbClr val="FBFAF9"/>
+            <a:srgbClr val="F4F6F5"/>
           </a:solidFill>
           <a:ln>
             <a:noFill/>
@@ -5999,27 +7591,23 @@
       </p:sp>
       <p:sp>
         <p:nvSpPr>
-          <p:cNvPr id="3" name="Rounded Rectangle 2"/>
+          <p:cNvPr id="3" name="Rectangle 2"/>
           <p:cNvSpPr/>
           <p:nvPr/>
         </p:nvSpPr>
         <p:spPr>
           <a:xfrm>
-            <a:off x="914400" y="566928"/>
-            <a:ext cx="457200" cy="457200"/>
-          </a:xfrm>
-          <a:prstGeom prst="roundRect">
-            <a:avLst>
-              <a:gd name="adj" fmla="val 28000"/>
-            </a:avLst>
+            <a:off x="0" y="0"/>
+            <a:ext cx="12191695" cy="658368"/>
+          </a:xfrm>
+          <a:prstGeom prst="rect">
+            <a:avLst/>
           </a:prstGeom>
           <a:solidFill>
             <a:srgbClr val="E4F0F1"/>
           </a:solidFill>
-          <a:ln w="12700">
-            <a:solidFill>
-              <a:srgbClr val="BEDDDF"/>
-            </a:solidFill>
+          <a:ln>
+            <a:noFill/>
           </a:ln>
           <a:effectLst/>
         </p:spPr>
@@ -6047,40 +7635,45 @@
       </p:sp>
       <p:sp>
         <p:nvSpPr>
-          <p:cNvPr id="4" name="TextBox 3"/>
-          <p:cNvSpPr txBox="1"/>
-          <p:nvPr/>
-        </p:nvSpPr>
-        <p:spPr>
-          <a:xfrm>
-            <a:off x="914400" y="566928"/>
-            <a:ext cx="457200" cy="457200"/>
-          </a:xfrm>
-          <a:prstGeom prst="rect">
-            <a:avLst/>
-          </a:prstGeom>
-          <a:noFill/>
-        </p:spPr>
-        <p:txBody>
-          <a:bodyPr wrap="square" anchor="ctr" lIns="0" rIns="0" tIns="0" bIns="0">
-            <a:spAutoFit/>
-          </a:bodyPr>
-          <a:lstStyle/>
-          <a:p>
-            <a:pPr algn="ctr">
-              <a:spcAft>
-                <a:spcPts val="0"/>
-              </a:spcAft>
-            </a:pPr>
-            <a:r>
-              <a:rPr sz="1500" b="1" i="0">
-                <a:solidFill>
-                  <a:srgbClr val="1F5C6B"/>
-                </a:solidFill>
-                <a:latin typeface="Consolas"/>
-              </a:rPr>
-              <a:t>4</a:t>
-            </a:r>
+          <p:cNvPr id="4" name="Rectangle 3"/>
+          <p:cNvSpPr/>
+          <p:nvPr/>
+        </p:nvSpPr>
+        <p:spPr>
+          <a:xfrm>
+            <a:off x="0" y="658368"/>
+            <a:ext cx="12191695" cy="18288"/>
+          </a:xfrm>
+          <a:prstGeom prst="rect">
+            <a:avLst/>
+          </a:prstGeom>
+          <a:solidFill>
+            <a:srgbClr val="BEDDDF"/>
+          </a:solidFill>
+          <a:ln>
+            <a:noFill/>
+          </a:ln>
+          <a:effectLst/>
+        </p:spPr>
+        <p:style>
+          <a:lnRef idx="1">
+            <a:schemeClr val="accent1"/>
+          </a:lnRef>
+          <a:fillRef idx="3">
+            <a:schemeClr val="accent1"/>
+          </a:fillRef>
+          <a:effectRef idx="2">
+            <a:schemeClr val="accent1"/>
+          </a:effectRef>
+          <a:fontRef idx="minor">
+            <a:schemeClr val="lt1"/>
+          </a:fontRef>
+        </p:style>
+        <p:txBody>
+          <a:bodyPr rtlCol="0" anchor="ctr"/>
+          <a:lstStyle/>
+          <a:p>
+            <a:pPr algn="ctr"/>
           </a:p>
         </p:txBody>
       </p:sp>
@@ -6092,8 +7685,8 @@
         </p:nvSpPr>
         <p:spPr>
           <a:xfrm>
-            <a:off x="1508760" y="548640"/>
-            <a:ext cx="9601200" cy="320040"/>
+            <a:off x="822960" y="0"/>
+            <a:ext cx="4572000" cy="658368"/>
           </a:xfrm>
           <a:prstGeom prst="rect">
             <a:avLst/>
@@ -6112,13 +7705,13 @@
               </a:spcAft>
             </a:pPr>
             <a:r>
-              <a:rPr sz="1050" b="0" i="0">
-                <a:solidFill>
-                  <a:srgbClr val="566572"/>
+              <a:rPr sz="1100" b="1" i="0">
+                <a:solidFill>
+                  <a:srgbClr val="1F5C6B"/>
                 </a:solidFill>
                 <a:latin typeface="Consolas"/>
               </a:rPr>
-              <a:t>HOW I ACTUALLY WORK</a:t>
+              <a:t>MENTIBLE CLINICAL</a:t>
             </a:r>
           </a:p>
         </p:txBody>
@@ -6131,8 +7724,8 @@
         </p:nvSpPr>
         <p:spPr>
           <a:xfrm>
-            <a:off x="1508760" y="868680"/>
-            <a:ext cx="9692640" cy="320040"/>
+            <a:off x="4206240" y="0"/>
+            <a:ext cx="5394960" cy="658368"/>
           </a:xfrm>
           <a:prstGeom prst="rect">
             <a:avLst/>
@@ -6140,38 +7733,290 @@
           <a:noFill/>
         </p:spPr>
         <p:txBody>
-          <a:bodyPr wrap="square" anchor="t" lIns="0" rIns="0" tIns="0" bIns="0">
+          <a:bodyPr wrap="square" anchor="ctr" lIns="0" rIns="0" tIns="0" bIns="0">
             <a:spAutoFit/>
           </a:bodyPr>
           <a:lstStyle/>
           <a:p>
-            <a:pPr algn="l">
+            <a:pPr algn="r">
               <a:spcAft>
                 <a:spcPts val="0"/>
               </a:spcAft>
             </a:pPr>
             <a:r>
-              <a:rPr sz="600" b="0" i="0">
-                <a:solidFill>
-                  <a:srgbClr val="17242E"/>
-                </a:solidFill>
-                <a:latin typeface="Calibri"/>
+              <a:rPr sz="1100" b="0" i="0">
+                <a:solidFill>
+                  <a:srgbClr val="5A6A72"/>
+                </a:solidFill>
+                <a:latin typeface="Consolas"/>
               </a:rPr>
-              <a:t/>
-            </a:r>
-          </a:p>
-        </p:txBody>
-      </p:sp>
-      <p:sp>
-        <p:nvSpPr>
-          <p:cNvPr id="7" name="TextBox 6"/>
+              <a:t>SECTION 04 — HOW I WORK</a:t>
+            </a:r>
+          </a:p>
+        </p:txBody>
+      </p:sp>
+      <p:cxnSp>
+        <p:nvCxnSpPr>
+          <p:cNvPr id="7" name="Connector 6"/>
+          <p:cNvCxnSpPr/>
+          <p:nvPr/>
+        </p:nvCxnSpPr>
+        <p:spPr>
+          <a:xfrm>
+            <a:off x="10058400" y="329184"/>
+            <a:ext cx="590702" cy="0"/>
+          </a:xfrm>
+          <a:prstGeom prst="line">
+            <a:avLst/>
+          </a:prstGeom>
+          <a:ln w="22225">
+            <a:solidFill>
+              <a:srgbClr val="C0483C"/>
+            </a:solidFill>
+          </a:ln>
+          <a:effectLst/>
+        </p:spPr>
+        <p:style>
+          <a:lnRef idx="2">
+            <a:schemeClr val="accent1"/>
+          </a:lnRef>
+          <a:fillRef idx="0">
+            <a:schemeClr val="accent1"/>
+          </a:fillRef>
+          <a:effectRef idx="1">
+            <a:schemeClr val="accent1"/>
+          </a:effectRef>
+          <a:fontRef idx="minor">
+            <a:schemeClr val="tx1"/>
+          </a:fontRef>
+        </p:style>
+      </p:cxnSp>
+      <p:cxnSp>
+        <p:nvCxnSpPr>
+          <p:cNvPr id="8" name="Connector 7"/>
+          <p:cNvCxnSpPr/>
+          <p:nvPr/>
+        </p:nvCxnSpPr>
+        <p:spPr>
+          <a:xfrm>
+            <a:off x="10649102" y="329184"/>
+            <a:ext cx="104242" cy="91439"/>
+          </a:xfrm>
+          <a:prstGeom prst="line">
+            <a:avLst/>
+          </a:prstGeom>
+          <a:ln w="22225">
+            <a:solidFill>
+              <a:srgbClr val="C0483C"/>
+            </a:solidFill>
+          </a:ln>
+          <a:effectLst/>
+        </p:spPr>
+        <p:style>
+          <a:lnRef idx="2">
+            <a:schemeClr val="accent1"/>
+          </a:lnRef>
+          <a:fillRef idx="0">
+            <a:schemeClr val="accent1"/>
+          </a:fillRef>
+          <a:effectRef idx="1">
+            <a:schemeClr val="accent1"/>
+          </a:effectRef>
+          <a:fontRef idx="minor">
+            <a:schemeClr val="tx1"/>
+          </a:fontRef>
+        </p:style>
+      </p:cxnSp>
+      <p:cxnSp>
+        <p:nvCxnSpPr>
+          <p:cNvPr id="9" name="Connector 8"/>
+          <p:cNvCxnSpPr/>
+          <p:nvPr/>
+        </p:nvCxnSpPr>
+        <p:spPr>
+          <a:xfrm flipV="1">
+            <a:off x="10753344" y="310896"/>
+            <a:ext cx="86868" cy="109727"/>
+          </a:xfrm>
+          <a:prstGeom prst="line">
+            <a:avLst/>
+          </a:prstGeom>
+          <a:ln w="22225">
+            <a:solidFill>
+              <a:srgbClr val="C0483C"/>
+            </a:solidFill>
+          </a:ln>
+          <a:effectLst/>
+        </p:spPr>
+        <p:style>
+          <a:lnRef idx="2">
+            <a:schemeClr val="accent1"/>
+          </a:lnRef>
+          <a:fillRef idx="0">
+            <a:schemeClr val="accent1"/>
+          </a:fillRef>
+          <a:effectRef idx="1">
+            <a:schemeClr val="accent1"/>
+          </a:effectRef>
+          <a:fontRef idx="minor">
+            <a:schemeClr val="tx1"/>
+          </a:fontRef>
+        </p:style>
+      </p:cxnSp>
+      <p:cxnSp>
+        <p:nvCxnSpPr>
+          <p:cNvPr id="10" name="Connector 9"/>
+          <p:cNvCxnSpPr/>
+          <p:nvPr/>
+        </p:nvCxnSpPr>
+        <p:spPr>
+          <a:xfrm flipV="1">
+            <a:off x="10840212" y="18287"/>
+            <a:ext cx="69494" cy="292609"/>
+          </a:xfrm>
+          <a:prstGeom prst="line">
+            <a:avLst/>
+          </a:prstGeom>
+          <a:ln w="22225">
+            <a:solidFill>
+              <a:srgbClr val="C0483C"/>
+            </a:solidFill>
+          </a:ln>
+          <a:effectLst/>
+        </p:spPr>
+        <p:style>
+          <a:lnRef idx="2">
+            <a:schemeClr val="accent1"/>
+          </a:lnRef>
+          <a:fillRef idx="0">
+            <a:schemeClr val="accent1"/>
+          </a:fillRef>
+          <a:effectRef idx="1">
+            <a:schemeClr val="accent1"/>
+          </a:effectRef>
+          <a:fontRef idx="minor">
+            <a:schemeClr val="tx1"/>
+          </a:fontRef>
+        </p:style>
+      </p:cxnSp>
+      <p:cxnSp>
+        <p:nvCxnSpPr>
+          <p:cNvPr id="11" name="Connector 10"/>
+          <p:cNvCxnSpPr/>
+          <p:nvPr/>
+        </p:nvCxnSpPr>
+        <p:spPr>
+          <a:xfrm>
+            <a:off x="10909706" y="18287"/>
+            <a:ext cx="86868" cy="438913"/>
+          </a:xfrm>
+          <a:prstGeom prst="line">
+            <a:avLst/>
+          </a:prstGeom>
+          <a:ln w="22225">
+            <a:solidFill>
+              <a:srgbClr val="C0483C"/>
+            </a:solidFill>
+          </a:ln>
+          <a:effectLst/>
+        </p:spPr>
+        <p:style>
+          <a:lnRef idx="2">
+            <a:schemeClr val="accent1"/>
+          </a:lnRef>
+          <a:fillRef idx="0">
+            <a:schemeClr val="accent1"/>
+          </a:fillRef>
+          <a:effectRef idx="1">
+            <a:schemeClr val="accent1"/>
+          </a:effectRef>
+          <a:fontRef idx="minor">
+            <a:schemeClr val="tx1"/>
+          </a:fontRef>
+        </p:style>
+      </p:cxnSp>
+      <p:cxnSp>
+        <p:nvCxnSpPr>
+          <p:cNvPr id="12" name="Connector 11"/>
+          <p:cNvCxnSpPr/>
+          <p:nvPr/>
+        </p:nvCxnSpPr>
+        <p:spPr>
+          <a:xfrm flipV="1">
+            <a:off x="10996574" y="329184"/>
+            <a:ext cx="86868" cy="128016"/>
+          </a:xfrm>
+          <a:prstGeom prst="line">
+            <a:avLst/>
+          </a:prstGeom>
+          <a:ln w="22225">
+            <a:solidFill>
+              <a:srgbClr val="C0483C"/>
+            </a:solidFill>
+          </a:ln>
+          <a:effectLst/>
+        </p:spPr>
+        <p:style>
+          <a:lnRef idx="2">
+            <a:schemeClr val="accent1"/>
+          </a:lnRef>
+          <a:fillRef idx="0">
+            <a:schemeClr val="accent1"/>
+          </a:fillRef>
+          <a:effectRef idx="1">
+            <a:schemeClr val="accent1"/>
+          </a:effectRef>
+          <a:fontRef idx="minor">
+            <a:schemeClr val="tx1"/>
+          </a:fontRef>
+        </p:style>
+      </p:cxnSp>
+      <p:cxnSp>
+        <p:nvCxnSpPr>
+          <p:cNvPr id="13" name="Connector 12"/>
+          <p:cNvCxnSpPr/>
+          <p:nvPr/>
+        </p:nvCxnSpPr>
+        <p:spPr>
+          <a:xfrm>
+            <a:off x="11083442" y="329184"/>
+            <a:ext cx="712318" cy="0"/>
+          </a:xfrm>
+          <a:prstGeom prst="line">
+            <a:avLst/>
+          </a:prstGeom>
+          <a:ln w="22225">
+            <a:solidFill>
+              <a:srgbClr val="C0483C"/>
+            </a:solidFill>
+          </a:ln>
+          <a:effectLst/>
+        </p:spPr>
+        <p:style>
+          <a:lnRef idx="2">
+            <a:schemeClr val="accent1"/>
+          </a:lnRef>
+          <a:fillRef idx="0">
+            <a:schemeClr val="accent1"/>
+          </a:fillRef>
+          <a:effectRef idx="1">
+            <a:schemeClr val="accent1"/>
+          </a:effectRef>
+          <a:fontRef idx="minor">
+            <a:schemeClr val="tx1"/>
+          </a:fontRef>
+        </p:style>
+      </p:cxnSp>
+      <p:sp>
+        <p:nvSpPr>
+          <p:cNvPr id="14" name="TextBox 13"/>
           <p:cNvSpPr txBox="1"/>
           <p:nvPr/>
         </p:nvSpPr>
         <p:spPr>
           <a:xfrm>
-            <a:off x="914400" y="1234440"/>
-            <a:ext cx="10424160" cy="822960"/>
+            <a:off x="822960" y="960120"/>
+            <a:ext cx="10607040" cy="822960"/>
           </a:xfrm>
           <a:prstGeom prst="rect">
             <a:avLst/>
@@ -6193,27 +8038,27 @@
               </a:spcAft>
             </a:pPr>
             <a:r>
-              <a:rPr sz="2500" b="1" i="0">
+              <a:rPr sz="2300" b="1" i="0">
                 <a:solidFill>
                   <a:srgbClr val="17242E"/>
                 </a:solidFill>
                 <a:latin typeface="Georgia"/>
               </a:rPr>
-              <a:t>I read your shelf first — then I answer, citing your sources</a:t>
-            </a:r>
-          </a:p>
-        </p:txBody>
-      </p:sp>
-      <p:sp>
-        <p:nvSpPr>
-          <p:cNvPr id="8" name="TextBox 7"/>
+              <a:t>I read your chart first — then I answer, citing your sources</a:t>
+            </a:r>
+          </a:p>
+        </p:txBody>
+      </p:sp>
+      <p:sp>
+        <p:nvSpPr>
+          <p:cNvPr id="15" name="TextBox 14"/>
           <p:cNvSpPr txBox="1"/>
           <p:nvPr/>
         </p:nvSpPr>
         <p:spPr>
           <a:xfrm>
-            <a:off x="914400" y="2103120"/>
-            <a:ext cx="10332720" cy="685800"/>
+            <a:off x="822960" y="1828800"/>
+            <a:ext cx="10424160" cy="502920"/>
           </a:xfrm>
           <a:prstGeom prst="rect">
             <a:avLst/>
@@ -6228,65 +8073,61 @@
           <a:p>
             <a:pPr algn="l">
               <a:lnSpc>
-                <a:spcPct val="108000"/>
+                <a:spcPct val="105000"/>
               </a:lnSpc>
               <a:spcAft>
                 <a:spcPts val="0"/>
               </a:spcAft>
             </a:pPr>
             <a:r>
-              <a:rPr sz="1350" b="0" i="0">
-                <a:solidFill>
-                  <a:srgbClr val="566572"/>
-                </a:solidFill>
-                <a:latin typeface="Calibri"/>
+              <a:rPr sz="1250" b="0" i="0">
+                <a:solidFill>
+                  <a:srgbClr val="5A6A72"/>
+                </a:solidFill>
+                <a:latin typeface="Georgia"/>
               </a:rPr>
               <a:t>Ask me a question or hand me a draft. I don't guess: I </a:t>
             </a:r>
             <a:r>
-              <a:rPr sz="1350" b="1" i="0">
+              <a:rPr sz="1250" b="1" i="0">
                 <a:solidFill>
                   <a:srgbClr val="17242E"/>
                 </a:solidFill>
-                <a:latin typeface="Calibri"/>
+                <a:latin typeface="Georgia"/>
               </a:rPr>
               <a:t>find the relevant passages in your library first</a:t>
             </a:r>
             <a:r>
-              <a:rPr sz="1350" b="0" i="0">
-                <a:solidFill>
-                  <a:srgbClr val="566572"/>
-                </a:solidFill>
-                <a:latin typeface="Calibri"/>
+              <a:rPr sz="1250" b="0" i="0">
+                <a:solidFill>
+                  <a:srgbClr val="5A6A72"/>
+                </a:solidFill>
+                <a:latin typeface="Georgia"/>
               </a:rPr>
-              <a:t>, then write grounded in them — and show you which of your sources I used. (Engineers call it RAG. You don't have to.)</a:t>
-            </a:r>
-          </a:p>
-        </p:txBody>
-      </p:sp>
-      <p:sp>
-        <p:nvSpPr>
-          <p:cNvPr id="9" name="Rounded Rectangle 8"/>
+              <a:t>, then write grounded in them — and show which of your sources I used.</a:t>
+            </a:r>
+          </a:p>
+        </p:txBody>
+      </p:sp>
+      <p:sp>
+        <p:nvSpPr>
+          <p:cNvPr id="16" name="Rectangle 15"/>
           <p:cNvSpPr/>
           <p:nvPr/>
         </p:nvSpPr>
         <p:spPr>
           <a:xfrm>
-            <a:off x="792327" y="3063240"/>
-            <a:ext cx="3200400" cy="1691640"/>
-          </a:xfrm>
-          <a:prstGeom prst="roundRect">
-            <a:avLst>
-              <a:gd name="adj" fmla="val 6000"/>
-            </a:avLst>
+            <a:off x="822960" y="2514600"/>
+            <a:ext cx="54864" cy="1901952"/>
+          </a:xfrm>
+          <a:prstGeom prst="rect">
+            <a:avLst/>
           </a:prstGeom>
           <a:solidFill>
-            <a:srgbClr val="FFFFFF"/>
+            <a:srgbClr val="C0483C"/>
           </a:solidFill>
-          <a:ln w="12700">
-            <a:solidFill>
-              <a:srgbClr val="DDDFDD"/>
-            </a:solidFill>
+          <a:ln>
+            <a:noFill/>
           </a:ln>
           <a:effectLst/>
         </p:spPr>
@@ -6314,14 +8155,14 @@
       </p:sp>
       <p:sp>
         <p:nvSpPr>
-          <p:cNvPr id="10" name="TextBox 9"/>
+          <p:cNvPr id="17" name="TextBox 16"/>
           <p:cNvSpPr txBox="1"/>
           <p:nvPr/>
         </p:nvSpPr>
         <p:spPr>
           <a:xfrm>
-            <a:off x="1048359" y="3291840"/>
-            <a:ext cx="2743200" cy="274320"/>
+            <a:off x="1097280" y="2569464"/>
+            <a:ext cx="10241280" cy="566928"/>
           </a:xfrm>
           <a:prstGeom prst="rect">
             <a:avLst/>
@@ -6335,58 +8176,37 @@
           <a:lstStyle/>
           <a:p>
             <a:pPr algn="l">
-              <a:spcAft>
-                <a:spcPts val="0"/>
-              </a:spcAft>
-            </a:pPr>
-            <a:r>
-              <a:rPr sz="950" b="1" i="0">
-                <a:solidFill>
-                  <a:srgbClr val="1F5C6B"/>
-                </a:solidFill>
-                <a:latin typeface="Consolas"/>
-              </a:rPr>
-              <a:t>YOU ASK ME</a:t>
-            </a:r>
-          </a:p>
-        </p:txBody>
-      </p:sp>
-      <p:sp>
-        <p:nvSpPr>
-          <p:cNvPr id="11" name="TextBox 10"/>
-          <p:cNvSpPr txBox="1"/>
-          <p:nvPr/>
-        </p:nvSpPr>
-        <p:spPr>
-          <a:xfrm>
-            <a:off x="1048359" y="3630168"/>
-            <a:ext cx="2688336" cy="1005840"/>
-          </a:xfrm>
-          <a:prstGeom prst="rect">
-            <a:avLst/>
-          </a:prstGeom>
-          <a:noFill/>
-        </p:spPr>
-        <p:txBody>
-          <a:bodyPr wrap="square" anchor="t" lIns="0" rIns="0" tIns="0" bIns="0">
-            <a:spAutoFit/>
-          </a:bodyPr>
-          <a:lstStyle/>
-          <a:p>
-            <a:pPr algn="l">
               <a:lnSpc>
-                <a:spcPct val="110000"/>
+                <a:spcPct val="105000"/>
               </a:lnSpc>
               <a:spcAft>
                 <a:spcPts val="0"/>
               </a:spcAft>
             </a:pPr>
             <a:r>
-              <a:rPr sz="1200" b="0" i="0">
+              <a:rPr sz="1300" b="1" i="0">
+                <a:solidFill>
+                  <a:srgbClr val="C0483C"/>
+                </a:solidFill>
+                <a:latin typeface="Consolas"/>
+              </a:rPr>
+              <a:t>▪ </a:t>
+            </a:r>
+            <a:r>
+              <a:rPr sz="1400" b="1" i="0">
                 <a:solidFill>
                   <a:srgbClr val="17242E"/>
                 </a:solidFill>
-                <a:latin typeface="Calibri"/>
+                <a:latin typeface="Georgia"/>
+              </a:rPr>
+              <a:t>YOU ASK:  </a:t>
+            </a:r>
+            <a:r>
+              <a:rPr sz="1250" b="0" i="0">
+                <a:solidFill>
+                  <a:srgbClr val="5A6A72"/>
+                </a:solidFill>
+                <a:latin typeface="Georgia"/>
               </a:rPr>
               <a:t>“Draft a patient handout on starting a DOAC — plain language.”</a:t>
             </a:r>
@@ -6395,106 +8215,14 @@
       </p:sp>
       <p:sp>
         <p:nvSpPr>
-          <p:cNvPr id="12" name="Chevron 11"/>
-          <p:cNvSpPr/>
-          <p:nvPr/>
-        </p:nvSpPr>
-        <p:spPr>
-          <a:xfrm>
-            <a:off x="4084167" y="3762756"/>
-            <a:ext cx="292608" cy="310896"/>
-          </a:xfrm>
-          <a:prstGeom prst="chevron">
-            <a:avLst/>
-          </a:prstGeom>
-          <a:solidFill>
-            <a:srgbClr val="1F5C6B"/>
-          </a:solidFill>
-          <a:ln>
-            <a:noFill/>
-          </a:ln>
-          <a:effectLst/>
-        </p:spPr>
-        <p:style>
-          <a:lnRef idx="1">
-            <a:schemeClr val="accent1"/>
-          </a:lnRef>
-          <a:fillRef idx="3">
-            <a:schemeClr val="accent1"/>
-          </a:fillRef>
-          <a:effectRef idx="2">
-            <a:schemeClr val="accent1"/>
-          </a:effectRef>
-          <a:fontRef idx="minor">
-            <a:schemeClr val="lt1"/>
-          </a:fontRef>
-        </p:style>
-        <p:txBody>
-          <a:bodyPr rtlCol="0" anchor="ctr"/>
-          <a:lstStyle/>
-          <a:p>
-            <a:pPr algn="ctr"/>
-          </a:p>
-        </p:txBody>
-      </p:sp>
-      <p:sp>
-        <p:nvSpPr>
-          <p:cNvPr id="13" name="Rounded Rectangle 12"/>
-          <p:cNvSpPr/>
-          <p:nvPr/>
-        </p:nvSpPr>
-        <p:spPr>
-          <a:xfrm>
-            <a:off x="4495647" y="3063240"/>
-            <a:ext cx="3200400" cy="1691640"/>
-          </a:xfrm>
-          <a:prstGeom prst="roundRect">
-            <a:avLst>
-              <a:gd name="adj" fmla="val 6000"/>
-            </a:avLst>
-          </a:prstGeom>
-          <a:solidFill>
-            <a:srgbClr val="E4F0F1"/>
-          </a:solidFill>
-          <a:ln w="22225">
-            <a:solidFill>
-              <a:srgbClr val="1F5C6B"/>
-            </a:solidFill>
-          </a:ln>
-          <a:effectLst/>
-        </p:spPr>
-        <p:style>
-          <a:lnRef idx="1">
-            <a:schemeClr val="accent1"/>
-          </a:lnRef>
-          <a:fillRef idx="3">
-            <a:schemeClr val="accent1"/>
-          </a:fillRef>
-          <a:effectRef idx="2">
-            <a:schemeClr val="accent1"/>
-          </a:effectRef>
-          <a:fontRef idx="minor">
-            <a:schemeClr val="lt1"/>
-          </a:fontRef>
-        </p:style>
-        <p:txBody>
-          <a:bodyPr rtlCol="0" anchor="ctr"/>
-          <a:lstStyle/>
-          <a:p>
-            <a:pPr algn="ctr"/>
-          </a:p>
-        </p:txBody>
-      </p:sp>
-      <p:sp>
-        <p:nvSpPr>
-          <p:cNvPr id="14" name="TextBox 13"/>
+          <p:cNvPr id="18" name="TextBox 17"/>
           <p:cNvSpPr txBox="1"/>
           <p:nvPr/>
         </p:nvSpPr>
         <p:spPr>
           <a:xfrm>
-            <a:off x="4751679" y="3291840"/>
-            <a:ext cx="2743200" cy="274320"/>
+            <a:off x="1097280" y="3172968"/>
+            <a:ext cx="10241280" cy="566928"/>
           </a:xfrm>
           <a:prstGeom prst="rect">
             <a:avLst/>
@@ -6508,166 +8236,53 @@
           <a:lstStyle/>
           <a:p>
             <a:pPr algn="l">
-              <a:spcAft>
-                <a:spcPts val="0"/>
-              </a:spcAft>
-            </a:pPr>
-            <a:r>
-              <a:rPr sz="950" b="1" i="0">
-                <a:solidFill>
-                  <a:srgbClr val="1F5C6B"/>
-                </a:solidFill>
-                <a:latin typeface="Consolas"/>
-              </a:rPr>
-              <a:t>I RETRIEVE FROM YOUR LIBRARY</a:t>
-            </a:r>
-          </a:p>
-        </p:txBody>
-      </p:sp>
-      <p:sp>
-        <p:nvSpPr>
-          <p:cNvPr id="15" name="TextBox 14"/>
-          <p:cNvSpPr txBox="1"/>
-          <p:nvPr/>
-        </p:nvSpPr>
-        <p:spPr>
-          <a:xfrm>
-            <a:off x="4751679" y="3630168"/>
-            <a:ext cx="2688336" cy="1005840"/>
-          </a:xfrm>
-          <a:prstGeom prst="rect">
-            <a:avLst/>
-          </a:prstGeom>
-          <a:noFill/>
-        </p:spPr>
-        <p:txBody>
-          <a:bodyPr wrap="square" anchor="t" lIns="0" rIns="0" tIns="0" bIns="0">
-            <a:spAutoFit/>
-          </a:bodyPr>
-          <a:lstStyle/>
-          <a:p>
-            <a:pPr algn="l">
               <a:lnSpc>
-                <a:spcPct val="110000"/>
+                <a:spcPct val="105000"/>
               </a:lnSpc>
               <a:spcAft>
                 <a:spcPts val="0"/>
               </a:spcAft>
             </a:pPr>
             <a:r>
-              <a:rPr sz="1200" b="0" i="0">
+              <a:rPr sz="1300" b="1" i="0">
+                <a:solidFill>
+                  <a:srgbClr val="C0483C"/>
+                </a:solidFill>
+                <a:latin typeface="Consolas"/>
+              </a:rPr>
+              <a:t>▪ </a:t>
+            </a:r>
+            <a:r>
+              <a:rPr sz="1400" b="1" i="0">
                 <a:solidFill>
                   <a:srgbClr val="17242E"/>
                 </a:solidFill>
-                <a:latin typeface="Calibri"/>
+                <a:latin typeface="Georgia"/>
               </a:rPr>
-              <a:t>I find the exact passages in YOUR anticoagulation guideline &amp; drug reference.</a:t>
-            </a:r>
-          </a:p>
-        </p:txBody>
-      </p:sp>
-      <p:sp>
-        <p:nvSpPr>
-          <p:cNvPr id="16" name="Chevron 15"/>
-          <p:cNvSpPr/>
-          <p:nvPr/>
-        </p:nvSpPr>
-        <p:spPr>
-          <a:xfrm>
-            <a:off x="7787487" y="3762756"/>
-            <a:ext cx="292608" cy="310896"/>
-          </a:xfrm>
-          <a:prstGeom prst="chevron">
-            <a:avLst/>
-          </a:prstGeom>
-          <a:solidFill>
-            <a:srgbClr val="1F5C6B"/>
-          </a:solidFill>
-          <a:ln>
-            <a:noFill/>
-          </a:ln>
-          <a:effectLst/>
-        </p:spPr>
-        <p:style>
-          <a:lnRef idx="1">
-            <a:schemeClr val="accent1"/>
-          </a:lnRef>
-          <a:fillRef idx="3">
-            <a:schemeClr val="accent1"/>
-          </a:fillRef>
-          <a:effectRef idx="2">
-            <a:schemeClr val="accent1"/>
-          </a:effectRef>
-          <a:fontRef idx="minor">
-            <a:schemeClr val="lt1"/>
-          </a:fontRef>
-        </p:style>
-        <p:txBody>
-          <a:bodyPr rtlCol="0" anchor="ctr"/>
-          <a:lstStyle/>
-          <a:p>
-            <a:pPr algn="ctr"/>
-          </a:p>
-        </p:txBody>
-      </p:sp>
-      <p:sp>
-        <p:nvSpPr>
-          <p:cNvPr id="17" name="Rounded Rectangle 16"/>
-          <p:cNvSpPr/>
-          <p:nvPr/>
-        </p:nvSpPr>
-        <p:spPr>
-          <a:xfrm>
-            <a:off x="8198967" y="3063240"/>
-            <a:ext cx="3200400" cy="1691640"/>
-          </a:xfrm>
-          <a:prstGeom prst="roundRect">
-            <a:avLst>
-              <a:gd name="adj" fmla="val 6000"/>
-            </a:avLst>
-          </a:prstGeom>
-          <a:solidFill>
-            <a:srgbClr val="FFFFFF"/>
-          </a:solidFill>
-          <a:ln w="12700">
-            <a:solidFill>
-              <a:srgbClr val="DDDFDD"/>
-            </a:solidFill>
-          </a:ln>
-          <a:effectLst/>
-        </p:spPr>
-        <p:style>
-          <a:lnRef idx="1">
-            <a:schemeClr val="accent1"/>
-          </a:lnRef>
-          <a:fillRef idx="3">
-            <a:schemeClr val="accent1"/>
-          </a:fillRef>
-          <a:effectRef idx="2">
-            <a:schemeClr val="accent1"/>
-          </a:effectRef>
-          <a:fontRef idx="minor">
-            <a:schemeClr val="lt1"/>
-          </a:fontRef>
-        </p:style>
-        <p:txBody>
-          <a:bodyPr rtlCol="0" anchor="ctr"/>
-          <a:lstStyle/>
-          <a:p>
-            <a:pPr algn="ctr"/>
-          </a:p>
-        </p:txBody>
-      </p:sp>
-      <p:sp>
-        <p:nvSpPr>
-          <p:cNvPr id="18" name="TextBox 17"/>
+              <a:t>I RETRIEVE:  </a:t>
+            </a:r>
+            <a:r>
+              <a:rPr sz="1250" b="0" i="0">
+                <a:solidFill>
+                  <a:srgbClr val="5A6A72"/>
+                </a:solidFill>
+                <a:latin typeface="Georgia"/>
+              </a:rPr>
+              <a:t>I find the exact passages in your anticoagulation guideline &amp; drug reference.</a:t>
+            </a:r>
+          </a:p>
+        </p:txBody>
+      </p:sp>
+      <p:sp>
+        <p:nvSpPr>
+          <p:cNvPr id="19" name="TextBox 18"/>
           <p:cNvSpPr txBox="1"/>
           <p:nvPr/>
         </p:nvSpPr>
         <p:spPr>
           <a:xfrm>
-            <a:off x="8454999" y="3291840"/>
-            <a:ext cx="2743200" cy="274320"/>
+            <a:off x="1097280" y="3776472"/>
+            <a:ext cx="10241280" cy="566928"/>
           </a:xfrm>
           <a:prstGeom prst="rect">
             <a:avLst/>
@@ -6681,60 +8296,39 @@
           <a:lstStyle/>
           <a:p>
             <a:pPr algn="l">
-              <a:spcAft>
-                <a:spcPts val="0"/>
-              </a:spcAft>
-            </a:pPr>
-            <a:r>
-              <a:rPr sz="950" b="1" i="0">
-                <a:solidFill>
-                  <a:srgbClr val="1F5C6B"/>
-                </a:solidFill>
-                <a:latin typeface="Consolas"/>
-              </a:rPr>
-              <a:t>I ANSWER, CITING YOUR SOURCES</a:t>
-            </a:r>
-          </a:p>
-        </p:txBody>
-      </p:sp>
-      <p:sp>
-        <p:nvSpPr>
-          <p:cNvPr id="19" name="TextBox 18"/>
-          <p:cNvSpPr txBox="1"/>
-          <p:nvPr/>
-        </p:nvSpPr>
-        <p:spPr>
-          <a:xfrm>
-            <a:off x="8454999" y="3630168"/>
-            <a:ext cx="2688336" cy="1005840"/>
-          </a:xfrm>
-          <a:prstGeom prst="rect">
-            <a:avLst/>
-          </a:prstGeom>
-          <a:noFill/>
-        </p:spPr>
-        <p:txBody>
-          <a:bodyPr wrap="square" anchor="t" lIns="0" rIns="0" tIns="0" bIns="0">
-            <a:spAutoFit/>
-          </a:bodyPr>
-          <a:lstStyle/>
-          <a:p>
-            <a:pPr algn="l">
               <a:lnSpc>
-                <a:spcPct val="110000"/>
+                <a:spcPct val="105000"/>
               </a:lnSpc>
               <a:spcAft>
                 <a:spcPts val="0"/>
               </a:spcAft>
             </a:pPr>
             <a:r>
-              <a:rPr sz="1200" b="0" i="0">
+              <a:rPr sz="1300" b="1" i="0">
+                <a:solidFill>
+                  <a:srgbClr val="C0483C"/>
+                </a:solidFill>
+                <a:latin typeface="Consolas"/>
+              </a:rPr>
+              <a:t>▪ </a:t>
+            </a:r>
+            <a:r>
+              <a:rPr sz="1400" b="1" i="0">
                 <a:solidFill>
                   <a:srgbClr val="17242E"/>
                 </a:solidFill>
-                <a:latin typeface="Calibri"/>
+                <a:latin typeface="Georgia"/>
               </a:rPr>
-              <a:t>A handout written from your evidence, citing your sources — ready for you to check &amp; hand over.</a:t>
+              <a:t>I ANSWER:  </a:t>
+            </a:r>
+            <a:r>
+              <a:rPr sz="1250" b="0" i="0">
+                <a:solidFill>
+                  <a:srgbClr val="5A6A72"/>
+                </a:solidFill>
+                <a:latin typeface="Georgia"/>
+              </a:rPr>
+              <a:t>A handout from your evidence, citing your sources — ready to check &amp; hand over.</a:t>
             </a:r>
           </a:p>
         </p:txBody>
@@ -6747,12 +8341,12 @@
         </p:nvSpPr>
         <p:spPr>
           <a:xfrm>
-            <a:off x="914400" y="5029200"/>
-            <a:ext cx="10360152" cy="777240"/>
+            <a:off x="2194560" y="4663440"/>
+            <a:ext cx="7772400" cy="1005840"/>
           </a:xfrm>
           <a:prstGeom prst="roundRect">
             <a:avLst>
-              <a:gd name="adj" fmla="val 14000"/>
+              <a:gd name="adj" fmla="val 8000"/>
             </a:avLst>
           </a:prstGeom>
           <a:solidFill>
@@ -6789,14 +8383,58 @@
       </p:sp>
       <p:sp>
         <p:nvSpPr>
-          <p:cNvPr id="21" name="TextBox 20"/>
+          <p:cNvPr id="21" name="Rectangle 20"/>
+          <p:cNvSpPr/>
+          <p:nvPr/>
+        </p:nvSpPr>
+        <p:spPr>
+          <a:xfrm>
+            <a:off x="2194560" y="4663440"/>
+            <a:ext cx="91440" cy="1005840"/>
+          </a:xfrm>
+          <a:prstGeom prst="rect">
+            <a:avLst/>
+          </a:prstGeom>
+          <a:solidFill>
+            <a:srgbClr val="1F5C6B"/>
+          </a:solidFill>
+          <a:ln>
+            <a:noFill/>
+          </a:ln>
+          <a:effectLst/>
+        </p:spPr>
+        <p:style>
+          <a:lnRef idx="1">
+            <a:schemeClr val="accent1"/>
+          </a:lnRef>
+          <a:fillRef idx="3">
+            <a:schemeClr val="accent1"/>
+          </a:fillRef>
+          <a:effectRef idx="2">
+            <a:schemeClr val="accent1"/>
+          </a:effectRef>
+          <a:fontRef idx="minor">
+            <a:schemeClr val="lt1"/>
+          </a:fontRef>
+        </p:style>
+        <p:txBody>
+          <a:bodyPr rtlCol="0" anchor="ctr"/>
+          <a:lstStyle/>
+          <a:p>
+            <a:pPr algn="ctr"/>
+          </a:p>
+        </p:txBody>
+      </p:sp>
+      <p:sp>
+        <p:nvSpPr>
+          <p:cNvPr id="22" name="TextBox 21"/>
           <p:cNvSpPr txBox="1"/>
           <p:nvPr/>
         </p:nvSpPr>
         <p:spPr>
           <a:xfrm>
-            <a:off x="1280160" y="5029200"/>
-            <a:ext cx="9692640" cy="777240"/>
+            <a:off x="2514600" y="4846320"/>
+            <a:ext cx="7223760" cy="274320"/>
           </a:xfrm>
           <a:prstGeom prst="rect">
             <a:avLst/>
@@ -6804,36 +8442,66 @@
           <a:noFill/>
         </p:spPr>
         <p:txBody>
-          <a:bodyPr wrap="square" anchor="ctr" lIns="0" rIns="0" tIns="0" bIns="0">
+          <a:bodyPr wrap="square" anchor="t" lIns="0" rIns="0" tIns="0" bIns="0">
             <a:spAutoFit/>
           </a:bodyPr>
           <a:lstStyle/>
           <a:p>
             <a:pPr algn="l">
+              <a:spcAft>
+                <a:spcPts val="0"/>
+              </a:spcAft>
+            </a:pPr>
+            <a:r>
+              <a:rPr sz="1000" b="1" i="0">
+                <a:solidFill>
+                  <a:srgbClr val="1F5C6B"/>
+                </a:solidFill>
+                <a:latin typeface="Consolas"/>
+              </a:rPr>
+              <a:t>NOTE — HOW TO THINK OF ME</a:t>
+            </a:r>
+          </a:p>
+        </p:txBody>
+      </p:sp>
+      <p:sp>
+        <p:nvSpPr>
+          <p:cNvPr id="23" name="TextBox 22"/>
+          <p:cNvSpPr txBox="1"/>
+          <p:nvPr/>
+        </p:nvSpPr>
+        <p:spPr>
+          <a:xfrm>
+            <a:off x="2514600" y="5166359"/>
+            <a:ext cx="7178040" cy="365760"/>
+          </a:xfrm>
+          <a:prstGeom prst="rect">
+            <a:avLst/>
+          </a:prstGeom>
+          <a:noFill/>
+        </p:spPr>
+        <p:txBody>
+          <a:bodyPr wrap="square" anchor="t" lIns="0" rIns="0" tIns="0" bIns="0">
+            <a:spAutoFit/>
+          </a:bodyPr>
+          <a:lstStyle/>
+          <a:p>
+            <a:pPr algn="l">
               <a:lnSpc>
-                <a:spcPct val="105000"/>
+                <a:spcPct val="112000"/>
               </a:lnSpc>
               <a:spcAft>
                 <a:spcPts val="0"/>
               </a:spcAft>
             </a:pPr>
             <a:r>
-              <a:rPr sz="1300" b="1" i="0">
-                <a:solidFill>
-                  <a:srgbClr val="1F5C6B"/>
-                </a:solidFill>
-                <a:latin typeface="Calibri"/>
+              <a:rPr sz="1500" b="0" i="0">
+                <a:solidFill>
+                  <a:srgbClr val="17242E"/>
+                </a:solidFill>
+                <a:latin typeface="Georgia"/>
               </a:rPr>
-              <a:t>Think of me as  </a:t>
-            </a:r>
-            <a:r>
-              <a:rPr sz="1300" b="0" i="0">
-                <a:solidFill>
-                  <a:srgbClr val="17242E"/>
-                </a:solidFill>
-                <a:latin typeface="Calibri"/>
-              </a:rPr>
-              <a:t>the resident who has read every guideline on your shelf and cites chapter and verse — never a stranger guessing.</a:t>
+              <a:t>The resident who's read every guideline on your chart and cites chapter and verse.</a:t>
             </a:r>
           </a:p>
         </p:txBody>
@@ -6871,7 +8539,7 @@
             <a:avLst/>
           </a:prstGeom>
           <a:solidFill>
-            <a:srgbClr val="FBFAF9"/>
+            <a:srgbClr val="F4F6F5"/>
           </a:solidFill>
           <a:ln>
             <a:noFill/>
@@ -6902,27 +8570,23 @@
       </p:sp>
       <p:sp>
         <p:nvSpPr>
-          <p:cNvPr id="3" name="Rounded Rectangle 2"/>
+          <p:cNvPr id="3" name="Rectangle 2"/>
           <p:cNvSpPr/>
           <p:nvPr/>
         </p:nvSpPr>
         <p:spPr>
           <a:xfrm>
-            <a:off x="914400" y="566928"/>
-            <a:ext cx="457200" cy="457200"/>
-          </a:xfrm>
-          <a:prstGeom prst="roundRect">
-            <a:avLst>
-              <a:gd name="adj" fmla="val 28000"/>
-            </a:avLst>
+            <a:off x="0" y="0"/>
+            <a:ext cx="12191695" cy="658368"/>
+          </a:xfrm>
+          <a:prstGeom prst="rect">
+            <a:avLst/>
           </a:prstGeom>
           <a:solidFill>
             <a:srgbClr val="E4F0F1"/>
           </a:solidFill>
-          <a:ln w="12700">
-            <a:solidFill>
-              <a:srgbClr val="BEDDDF"/>
-            </a:solidFill>
+          <a:ln>
+            <a:noFill/>
           </a:ln>
           <a:effectLst/>
         </p:spPr>
@@ -6950,14 +8614,622 @@
       </p:sp>
       <p:sp>
         <p:nvSpPr>
-          <p:cNvPr id="4" name="TextBox 3"/>
+          <p:cNvPr id="4" name="Rectangle 3"/>
+          <p:cNvSpPr/>
+          <p:nvPr/>
+        </p:nvSpPr>
+        <p:spPr>
+          <a:xfrm>
+            <a:off x="0" y="658368"/>
+            <a:ext cx="12191695" cy="18288"/>
+          </a:xfrm>
+          <a:prstGeom prst="rect">
+            <a:avLst/>
+          </a:prstGeom>
+          <a:solidFill>
+            <a:srgbClr val="BEDDDF"/>
+          </a:solidFill>
+          <a:ln>
+            <a:noFill/>
+          </a:ln>
+          <a:effectLst/>
+        </p:spPr>
+        <p:style>
+          <a:lnRef idx="1">
+            <a:schemeClr val="accent1"/>
+          </a:lnRef>
+          <a:fillRef idx="3">
+            <a:schemeClr val="accent1"/>
+          </a:fillRef>
+          <a:effectRef idx="2">
+            <a:schemeClr val="accent1"/>
+          </a:effectRef>
+          <a:fontRef idx="minor">
+            <a:schemeClr val="lt1"/>
+          </a:fontRef>
+        </p:style>
+        <p:txBody>
+          <a:bodyPr rtlCol="0" anchor="ctr"/>
+          <a:lstStyle/>
+          <a:p>
+            <a:pPr algn="ctr"/>
+          </a:p>
+        </p:txBody>
+      </p:sp>
+      <p:sp>
+        <p:nvSpPr>
+          <p:cNvPr id="5" name="TextBox 4"/>
           <p:cNvSpPr txBox="1"/>
           <p:nvPr/>
         </p:nvSpPr>
         <p:spPr>
           <a:xfrm>
-            <a:off x="914400" y="566928"/>
-            <a:ext cx="457200" cy="457200"/>
+            <a:off x="822960" y="0"/>
+            <a:ext cx="4572000" cy="658368"/>
+          </a:xfrm>
+          <a:prstGeom prst="rect">
+            <a:avLst/>
+          </a:prstGeom>
+          <a:noFill/>
+        </p:spPr>
+        <p:txBody>
+          <a:bodyPr wrap="square" anchor="ctr" lIns="0" rIns="0" tIns="0" bIns="0">
+            <a:spAutoFit/>
+          </a:bodyPr>
+          <a:lstStyle/>
+          <a:p>
+            <a:pPr algn="l">
+              <a:spcAft>
+                <a:spcPts val="0"/>
+              </a:spcAft>
+            </a:pPr>
+            <a:r>
+              <a:rPr sz="1100" b="1" i="0">
+                <a:solidFill>
+                  <a:srgbClr val="1F5C6B"/>
+                </a:solidFill>
+                <a:latin typeface="Consolas"/>
+              </a:rPr>
+              <a:t>MENTIBLE CLINICAL</a:t>
+            </a:r>
+          </a:p>
+        </p:txBody>
+      </p:sp>
+      <p:sp>
+        <p:nvSpPr>
+          <p:cNvPr id="6" name="TextBox 5"/>
+          <p:cNvSpPr txBox="1"/>
+          <p:nvPr/>
+        </p:nvSpPr>
+        <p:spPr>
+          <a:xfrm>
+            <a:off x="4206240" y="0"/>
+            <a:ext cx="5394960" cy="658368"/>
+          </a:xfrm>
+          <a:prstGeom prst="rect">
+            <a:avLst/>
+          </a:prstGeom>
+          <a:noFill/>
+        </p:spPr>
+        <p:txBody>
+          <a:bodyPr wrap="square" anchor="ctr" lIns="0" rIns="0" tIns="0" bIns="0">
+            <a:spAutoFit/>
+          </a:bodyPr>
+          <a:lstStyle/>
+          <a:p>
+            <a:pPr algn="r">
+              <a:spcAft>
+                <a:spcPts val="0"/>
+              </a:spcAft>
+            </a:pPr>
+            <a:r>
+              <a:rPr sz="1100" b="0" i="0">
+                <a:solidFill>
+                  <a:srgbClr val="5A6A72"/>
+                </a:solidFill>
+                <a:latin typeface="Consolas"/>
+              </a:rPr>
+              <a:t>SECTION 05 — BEYOND YOUR SHELF</a:t>
+            </a:r>
+          </a:p>
+        </p:txBody>
+      </p:sp>
+      <p:cxnSp>
+        <p:nvCxnSpPr>
+          <p:cNvPr id="7" name="Connector 6"/>
+          <p:cNvCxnSpPr/>
+          <p:nvPr/>
+        </p:nvCxnSpPr>
+        <p:spPr>
+          <a:xfrm>
+            <a:off x="10058400" y="329184"/>
+            <a:ext cx="590702" cy="0"/>
+          </a:xfrm>
+          <a:prstGeom prst="line">
+            <a:avLst/>
+          </a:prstGeom>
+          <a:ln w="22225">
+            <a:solidFill>
+              <a:srgbClr val="C0483C"/>
+            </a:solidFill>
+          </a:ln>
+          <a:effectLst/>
+        </p:spPr>
+        <p:style>
+          <a:lnRef idx="2">
+            <a:schemeClr val="accent1"/>
+          </a:lnRef>
+          <a:fillRef idx="0">
+            <a:schemeClr val="accent1"/>
+          </a:fillRef>
+          <a:effectRef idx="1">
+            <a:schemeClr val="accent1"/>
+          </a:effectRef>
+          <a:fontRef idx="minor">
+            <a:schemeClr val="tx1"/>
+          </a:fontRef>
+        </p:style>
+      </p:cxnSp>
+      <p:cxnSp>
+        <p:nvCxnSpPr>
+          <p:cNvPr id="8" name="Connector 7"/>
+          <p:cNvCxnSpPr/>
+          <p:nvPr/>
+        </p:nvCxnSpPr>
+        <p:spPr>
+          <a:xfrm>
+            <a:off x="10649102" y="329184"/>
+            <a:ext cx="104242" cy="91439"/>
+          </a:xfrm>
+          <a:prstGeom prst="line">
+            <a:avLst/>
+          </a:prstGeom>
+          <a:ln w="22225">
+            <a:solidFill>
+              <a:srgbClr val="C0483C"/>
+            </a:solidFill>
+          </a:ln>
+          <a:effectLst/>
+        </p:spPr>
+        <p:style>
+          <a:lnRef idx="2">
+            <a:schemeClr val="accent1"/>
+          </a:lnRef>
+          <a:fillRef idx="0">
+            <a:schemeClr val="accent1"/>
+          </a:fillRef>
+          <a:effectRef idx="1">
+            <a:schemeClr val="accent1"/>
+          </a:effectRef>
+          <a:fontRef idx="minor">
+            <a:schemeClr val="tx1"/>
+          </a:fontRef>
+        </p:style>
+      </p:cxnSp>
+      <p:cxnSp>
+        <p:nvCxnSpPr>
+          <p:cNvPr id="9" name="Connector 8"/>
+          <p:cNvCxnSpPr/>
+          <p:nvPr/>
+        </p:nvCxnSpPr>
+        <p:spPr>
+          <a:xfrm flipV="1">
+            <a:off x="10753344" y="310896"/>
+            <a:ext cx="86868" cy="109727"/>
+          </a:xfrm>
+          <a:prstGeom prst="line">
+            <a:avLst/>
+          </a:prstGeom>
+          <a:ln w="22225">
+            <a:solidFill>
+              <a:srgbClr val="C0483C"/>
+            </a:solidFill>
+          </a:ln>
+          <a:effectLst/>
+        </p:spPr>
+        <p:style>
+          <a:lnRef idx="2">
+            <a:schemeClr val="accent1"/>
+          </a:lnRef>
+          <a:fillRef idx="0">
+            <a:schemeClr val="accent1"/>
+          </a:fillRef>
+          <a:effectRef idx="1">
+            <a:schemeClr val="accent1"/>
+          </a:effectRef>
+          <a:fontRef idx="minor">
+            <a:schemeClr val="tx1"/>
+          </a:fontRef>
+        </p:style>
+      </p:cxnSp>
+      <p:cxnSp>
+        <p:nvCxnSpPr>
+          <p:cNvPr id="10" name="Connector 9"/>
+          <p:cNvCxnSpPr/>
+          <p:nvPr/>
+        </p:nvCxnSpPr>
+        <p:spPr>
+          <a:xfrm flipV="1">
+            <a:off x="10840212" y="18287"/>
+            <a:ext cx="69494" cy="292609"/>
+          </a:xfrm>
+          <a:prstGeom prst="line">
+            <a:avLst/>
+          </a:prstGeom>
+          <a:ln w="22225">
+            <a:solidFill>
+              <a:srgbClr val="C0483C"/>
+            </a:solidFill>
+          </a:ln>
+          <a:effectLst/>
+        </p:spPr>
+        <p:style>
+          <a:lnRef idx="2">
+            <a:schemeClr val="accent1"/>
+          </a:lnRef>
+          <a:fillRef idx="0">
+            <a:schemeClr val="accent1"/>
+          </a:fillRef>
+          <a:effectRef idx="1">
+            <a:schemeClr val="accent1"/>
+          </a:effectRef>
+          <a:fontRef idx="minor">
+            <a:schemeClr val="tx1"/>
+          </a:fontRef>
+        </p:style>
+      </p:cxnSp>
+      <p:cxnSp>
+        <p:nvCxnSpPr>
+          <p:cNvPr id="11" name="Connector 10"/>
+          <p:cNvCxnSpPr/>
+          <p:nvPr/>
+        </p:nvCxnSpPr>
+        <p:spPr>
+          <a:xfrm>
+            <a:off x="10909706" y="18287"/>
+            <a:ext cx="86868" cy="438913"/>
+          </a:xfrm>
+          <a:prstGeom prst="line">
+            <a:avLst/>
+          </a:prstGeom>
+          <a:ln w="22225">
+            <a:solidFill>
+              <a:srgbClr val="C0483C"/>
+            </a:solidFill>
+          </a:ln>
+          <a:effectLst/>
+        </p:spPr>
+        <p:style>
+          <a:lnRef idx="2">
+            <a:schemeClr val="accent1"/>
+          </a:lnRef>
+          <a:fillRef idx="0">
+            <a:schemeClr val="accent1"/>
+          </a:fillRef>
+          <a:effectRef idx="1">
+            <a:schemeClr val="accent1"/>
+          </a:effectRef>
+          <a:fontRef idx="minor">
+            <a:schemeClr val="tx1"/>
+          </a:fontRef>
+        </p:style>
+      </p:cxnSp>
+      <p:cxnSp>
+        <p:nvCxnSpPr>
+          <p:cNvPr id="12" name="Connector 11"/>
+          <p:cNvCxnSpPr/>
+          <p:nvPr/>
+        </p:nvCxnSpPr>
+        <p:spPr>
+          <a:xfrm flipV="1">
+            <a:off x="10996574" y="329184"/>
+            <a:ext cx="86868" cy="128016"/>
+          </a:xfrm>
+          <a:prstGeom prst="line">
+            <a:avLst/>
+          </a:prstGeom>
+          <a:ln w="22225">
+            <a:solidFill>
+              <a:srgbClr val="C0483C"/>
+            </a:solidFill>
+          </a:ln>
+          <a:effectLst/>
+        </p:spPr>
+        <p:style>
+          <a:lnRef idx="2">
+            <a:schemeClr val="accent1"/>
+          </a:lnRef>
+          <a:fillRef idx="0">
+            <a:schemeClr val="accent1"/>
+          </a:fillRef>
+          <a:effectRef idx="1">
+            <a:schemeClr val="accent1"/>
+          </a:effectRef>
+          <a:fontRef idx="minor">
+            <a:schemeClr val="tx1"/>
+          </a:fontRef>
+        </p:style>
+      </p:cxnSp>
+      <p:cxnSp>
+        <p:nvCxnSpPr>
+          <p:cNvPr id="13" name="Connector 12"/>
+          <p:cNvCxnSpPr/>
+          <p:nvPr/>
+        </p:nvCxnSpPr>
+        <p:spPr>
+          <a:xfrm>
+            <a:off x="11083442" y="329184"/>
+            <a:ext cx="712318" cy="0"/>
+          </a:xfrm>
+          <a:prstGeom prst="line">
+            <a:avLst/>
+          </a:prstGeom>
+          <a:ln w="22225">
+            <a:solidFill>
+              <a:srgbClr val="C0483C"/>
+            </a:solidFill>
+          </a:ln>
+          <a:effectLst/>
+        </p:spPr>
+        <p:style>
+          <a:lnRef idx="2">
+            <a:schemeClr val="accent1"/>
+          </a:lnRef>
+          <a:fillRef idx="0">
+            <a:schemeClr val="accent1"/>
+          </a:fillRef>
+          <a:effectRef idx="1">
+            <a:schemeClr val="accent1"/>
+          </a:effectRef>
+          <a:fontRef idx="minor">
+            <a:schemeClr val="tx1"/>
+          </a:fontRef>
+        </p:style>
+      </p:cxnSp>
+      <p:sp>
+        <p:nvSpPr>
+          <p:cNvPr id="14" name="TextBox 13"/>
+          <p:cNvSpPr txBox="1"/>
+          <p:nvPr/>
+        </p:nvSpPr>
+        <p:spPr>
+          <a:xfrm>
+            <a:off x="822960" y="960120"/>
+            <a:ext cx="10607040" cy="548640"/>
+          </a:xfrm>
+          <a:prstGeom prst="rect">
+            <a:avLst/>
+          </a:prstGeom>
+          <a:noFill/>
+        </p:spPr>
+        <p:txBody>
+          <a:bodyPr wrap="square" anchor="t" lIns="0" rIns="0" tIns="0" bIns="0">
+            <a:spAutoFit/>
+          </a:bodyPr>
+          <a:lstStyle/>
+          <a:p>
+            <a:pPr algn="l">
+              <a:spcAft>
+                <a:spcPts val="0"/>
+              </a:spcAft>
+            </a:pPr>
+            <a:r>
+              <a:rPr sz="2300" b="1" i="0">
+                <a:solidFill>
+                  <a:srgbClr val="17242E"/>
+                </a:solidFill>
+                <a:latin typeface="Georgia"/>
+              </a:rPr>
+              <a:t>Your knowledge library can outgrow your physical shelf</a:t>
+            </a:r>
+          </a:p>
+        </p:txBody>
+      </p:sp>
+      <p:sp>
+        <p:nvSpPr>
+          <p:cNvPr id="15" name="TextBox 14"/>
+          <p:cNvSpPr txBox="1"/>
+          <p:nvPr/>
+        </p:nvSpPr>
+        <p:spPr>
+          <a:xfrm>
+            <a:off x="822960" y="1554480"/>
+            <a:ext cx="10424160" cy="640080"/>
+          </a:xfrm>
+          <a:prstGeom prst="rect">
+            <a:avLst/>
+          </a:prstGeom>
+          <a:noFill/>
+        </p:spPr>
+        <p:txBody>
+          <a:bodyPr wrap="square" anchor="t" lIns="0" rIns="0" tIns="0" bIns="0">
+            <a:spAutoFit/>
+          </a:bodyPr>
+          <a:lstStyle/>
+          <a:p>
+            <a:pPr algn="l">
+              <a:lnSpc>
+                <a:spcPct val="105000"/>
+              </a:lnSpc>
+              <a:spcAft>
+                <a:spcPts val="0"/>
+              </a:spcAft>
+            </a:pPr>
+            <a:r>
+              <a:rPr sz="1250" b="0" i="0">
+                <a:solidFill>
+                  <a:srgbClr val="5A6A72"/>
+                </a:solidFill>
+                <a:latin typeface="Georgia"/>
+              </a:rPr>
+              <a:t>I can pull authoritative reference and public-domain texts into your knowledge library from </a:t>
+            </a:r>
+            <a:r>
+              <a:rPr sz="1250" b="1" i="0">
+                <a:solidFill>
+                  <a:srgbClr val="17242E"/>
+                </a:solidFill>
+                <a:latin typeface="Georgia"/>
+              </a:rPr>
+              <a:t>curated catalogs</a:t>
+            </a:r>
+            <a:r>
+              <a:rPr sz="1250" b="0" i="0">
+                <a:solidFill>
+                  <a:srgbClr val="5A6A72"/>
+                </a:solidFill>
+                <a:latin typeface="Georgia"/>
+              </a:rPr>
+              <a:t> — then ground every answer at a physician's depth.</a:t>
+            </a:r>
+          </a:p>
+        </p:txBody>
+      </p:sp>
+      <p:sp>
+        <p:nvSpPr>
+          <p:cNvPr id="16" name="Rounded Rectangle 15"/>
+          <p:cNvSpPr/>
+          <p:nvPr/>
+        </p:nvSpPr>
+        <p:spPr>
+          <a:xfrm>
+            <a:off x="1280160" y="2468880"/>
+            <a:ext cx="4206240" cy="1554480"/>
+          </a:xfrm>
+          <a:prstGeom prst="roundRect">
+            <a:avLst>
+              <a:gd name="adj" fmla="val 6000"/>
+            </a:avLst>
+          </a:prstGeom>
+          <a:solidFill>
+            <a:srgbClr val="FFFFFF"/>
+          </a:solidFill>
+          <a:ln w="12700">
+            <a:solidFill>
+              <a:srgbClr val="D9E0DE"/>
+            </a:solidFill>
+          </a:ln>
+          <a:effectLst/>
+        </p:spPr>
+        <p:style>
+          <a:lnRef idx="1">
+            <a:schemeClr val="accent1"/>
+          </a:lnRef>
+          <a:fillRef idx="3">
+            <a:schemeClr val="accent1"/>
+          </a:fillRef>
+          <a:effectRef idx="2">
+            <a:schemeClr val="accent1"/>
+          </a:effectRef>
+          <a:fontRef idx="minor">
+            <a:schemeClr val="lt1"/>
+          </a:fontRef>
+        </p:style>
+        <p:txBody>
+          <a:bodyPr rtlCol="0" anchor="ctr"/>
+          <a:lstStyle/>
+          <a:p>
+            <a:pPr algn="ctr"/>
+          </a:p>
+        </p:txBody>
+      </p:sp>
+      <p:sp>
+        <p:nvSpPr>
+          <p:cNvPr id="17" name="TextBox 16"/>
+          <p:cNvSpPr txBox="1"/>
+          <p:nvPr/>
+        </p:nvSpPr>
+        <p:spPr>
+          <a:xfrm>
+            <a:off x="1554480" y="2697480"/>
+            <a:ext cx="3657600" cy="320040"/>
+          </a:xfrm>
+          <a:prstGeom prst="rect">
+            <a:avLst/>
+          </a:prstGeom>
+          <a:noFill/>
+        </p:spPr>
+        <p:txBody>
+          <a:bodyPr wrap="square" anchor="t" lIns="0" rIns="0" tIns="0" bIns="0">
+            <a:spAutoFit/>
+          </a:bodyPr>
+          <a:lstStyle/>
+          <a:p>
+            <a:pPr algn="l">
+              <a:spcAft>
+                <a:spcPts val="0"/>
+              </a:spcAft>
+            </a:pPr>
+            <a:r>
+              <a:rPr sz="1350" b="1" i="0">
+                <a:solidFill>
+                  <a:srgbClr val="17242E"/>
+                </a:solidFill>
+                <a:latin typeface="Georgia"/>
+              </a:rPr>
+              <a:t>What you bring</a:t>
+            </a:r>
+          </a:p>
+        </p:txBody>
+      </p:sp>
+      <p:sp>
+        <p:nvSpPr>
+          <p:cNvPr id="18" name="Rounded Rectangle 17"/>
+          <p:cNvSpPr/>
+          <p:nvPr/>
+        </p:nvSpPr>
+        <p:spPr>
+          <a:xfrm>
+            <a:off x="1554480" y="3154680"/>
+            <a:ext cx="1188720" cy="365760"/>
+          </a:xfrm>
+          <a:prstGeom prst="roundRect">
+            <a:avLst>
+              <a:gd name="adj" fmla="val 30000"/>
+            </a:avLst>
+          </a:prstGeom>
+          <a:solidFill>
+            <a:srgbClr val="F4F6F5"/>
+          </a:solidFill>
+          <a:ln w="12700">
+            <a:solidFill>
+              <a:srgbClr val="D9E0DE"/>
+            </a:solidFill>
+          </a:ln>
+          <a:effectLst/>
+        </p:spPr>
+        <p:style>
+          <a:lnRef idx="1">
+            <a:schemeClr val="accent1"/>
+          </a:lnRef>
+          <a:fillRef idx="3">
+            <a:schemeClr val="accent1"/>
+          </a:fillRef>
+          <a:effectRef idx="2">
+            <a:schemeClr val="accent1"/>
+          </a:effectRef>
+          <a:fontRef idx="minor">
+            <a:schemeClr val="lt1"/>
+          </a:fontRef>
+        </p:style>
+        <p:txBody>
+          <a:bodyPr rtlCol="0" anchor="ctr"/>
+          <a:lstStyle/>
+          <a:p>
+            <a:pPr algn="ctr"/>
+          </a:p>
+        </p:txBody>
+      </p:sp>
+      <p:sp>
+        <p:nvSpPr>
+          <p:cNvPr id="19" name="TextBox 18"/>
+          <p:cNvSpPr txBox="1"/>
+          <p:nvPr/>
+        </p:nvSpPr>
+        <p:spPr>
+          <a:xfrm>
+            <a:off x="1554480" y="3154680"/>
+            <a:ext cx="1188720" cy="365760"/>
           </a:xfrm>
           <a:prstGeom prst="rect">
             <a:avLst/>
@@ -6976,27 +9248,75 @@
               </a:spcAft>
             </a:pPr>
             <a:r>
-              <a:rPr sz="1500" b="1" i="0">
-                <a:solidFill>
-                  <a:srgbClr val="1F5C6B"/>
+              <a:rPr sz="1000" b="0" i="0">
+                <a:solidFill>
+                  <a:srgbClr val="17242E"/>
                 </a:solidFill>
                 <a:latin typeface="Consolas"/>
               </a:rPr>
-              <a:t>5</a:t>
-            </a:r>
-          </a:p>
-        </p:txBody>
-      </p:sp>
-      <p:sp>
-        <p:nvSpPr>
-          <p:cNvPr id="5" name="TextBox 4"/>
+              <a:t>guidelines</a:t>
+            </a:r>
+          </a:p>
+        </p:txBody>
+      </p:sp>
+      <p:sp>
+        <p:nvSpPr>
+          <p:cNvPr id="20" name="Rounded Rectangle 19"/>
+          <p:cNvSpPr/>
+          <p:nvPr/>
+        </p:nvSpPr>
+        <p:spPr>
+          <a:xfrm>
+            <a:off x="2880360" y="3154680"/>
+            <a:ext cx="822960" cy="365760"/>
+          </a:xfrm>
+          <a:prstGeom prst="roundRect">
+            <a:avLst>
+              <a:gd name="adj" fmla="val 30000"/>
+            </a:avLst>
+          </a:prstGeom>
+          <a:solidFill>
+            <a:srgbClr val="F4F6F5"/>
+          </a:solidFill>
+          <a:ln w="12700">
+            <a:solidFill>
+              <a:srgbClr val="D9E0DE"/>
+            </a:solidFill>
+          </a:ln>
+          <a:effectLst/>
+        </p:spPr>
+        <p:style>
+          <a:lnRef idx="1">
+            <a:schemeClr val="accent1"/>
+          </a:lnRef>
+          <a:fillRef idx="3">
+            <a:schemeClr val="accent1"/>
+          </a:fillRef>
+          <a:effectRef idx="2">
+            <a:schemeClr val="accent1"/>
+          </a:effectRef>
+          <a:fontRef idx="minor">
+            <a:schemeClr val="lt1"/>
+          </a:fontRef>
+        </p:style>
+        <p:txBody>
+          <a:bodyPr rtlCol="0" anchor="ctr"/>
+          <a:lstStyle/>
+          <a:p>
+            <a:pPr algn="ctr"/>
+          </a:p>
+        </p:txBody>
+      </p:sp>
+      <p:sp>
+        <p:nvSpPr>
+          <p:cNvPr id="21" name="TextBox 20"/>
           <p:cNvSpPr txBox="1"/>
           <p:nvPr/>
         </p:nvSpPr>
         <p:spPr>
           <a:xfrm>
-            <a:off x="1508760" y="548640"/>
-            <a:ext cx="9601200" cy="320040"/>
+            <a:off x="2880360" y="3154680"/>
+            <a:ext cx="822960" cy="365760"/>
           </a:xfrm>
           <a:prstGeom prst="rect">
             <a:avLst/>
@@ -7005,6 +9325,219 @@
         </p:spPr>
         <p:txBody>
           <a:bodyPr wrap="square" anchor="ctr" lIns="0" rIns="0" tIns="0" bIns="0">
+            <a:spAutoFit/>
+          </a:bodyPr>
+          <a:lstStyle/>
+          <a:p>
+            <a:pPr algn="ctr">
+              <a:spcAft>
+                <a:spcPts val="0"/>
+              </a:spcAft>
+            </a:pPr>
+            <a:r>
+              <a:rPr sz="1000" b="0" i="0">
+                <a:solidFill>
+                  <a:srgbClr val="17242E"/>
+                </a:solidFill>
+                <a:latin typeface="Consolas"/>
+              </a:rPr>
+              <a:t>papers</a:t>
+            </a:r>
+          </a:p>
+        </p:txBody>
+      </p:sp>
+      <p:sp>
+        <p:nvSpPr>
+          <p:cNvPr id="22" name="Rounded Rectangle 21"/>
+          <p:cNvSpPr/>
+          <p:nvPr/>
+        </p:nvSpPr>
+        <p:spPr>
+          <a:xfrm>
+            <a:off x="3840480" y="3154680"/>
+            <a:ext cx="731520" cy="365760"/>
+          </a:xfrm>
+          <a:prstGeom prst="roundRect">
+            <a:avLst>
+              <a:gd name="adj" fmla="val 30000"/>
+            </a:avLst>
+          </a:prstGeom>
+          <a:solidFill>
+            <a:srgbClr val="F4F6F5"/>
+          </a:solidFill>
+          <a:ln w="12700">
+            <a:solidFill>
+              <a:srgbClr val="D9E0DE"/>
+            </a:solidFill>
+          </a:ln>
+          <a:effectLst/>
+        </p:spPr>
+        <p:style>
+          <a:lnRef idx="1">
+            <a:schemeClr val="accent1"/>
+          </a:lnRef>
+          <a:fillRef idx="3">
+            <a:schemeClr val="accent1"/>
+          </a:fillRef>
+          <a:effectRef idx="2">
+            <a:schemeClr val="accent1"/>
+          </a:effectRef>
+          <a:fontRef idx="minor">
+            <a:schemeClr val="lt1"/>
+          </a:fontRef>
+        </p:style>
+        <p:txBody>
+          <a:bodyPr rtlCol="0" anchor="ctr"/>
+          <a:lstStyle/>
+          <a:p>
+            <a:pPr algn="ctr"/>
+          </a:p>
+        </p:txBody>
+      </p:sp>
+      <p:sp>
+        <p:nvSpPr>
+          <p:cNvPr id="23" name="TextBox 22"/>
+          <p:cNvSpPr txBox="1"/>
+          <p:nvPr/>
+        </p:nvSpPr>
+        <p:spPr>
+          <a:xfrm>
+            <a:off x="3840480" y="3154680"/>
+            <a:ext cx="731520" cy="365760"/>
+          </a:xfrm>
+          <a:prstGeom prst="rect">
+            <a:avLst/>
+          </a:prstGeom>
+          <a:noFill/>
+        </p:spPr>
+        <p:txBody>
+          <a:bodyPr wrap="square" anchor="ctr" lIns="0" rIns="0" tIns="0" bIns="0">
+            <a:spAutoFit/>
+          </a:bodyPr>
+          <a:lstStyle/>
+          <a:p>
+            <a:pPr algn="ctr">
+              <a:spcAft>
+                <a:spcPts val="0"/>
+              </a:spcAft>
+            </a:pPr>
+            <a:r>
+              <a:rPr sz="1000" b="0" i="0">
+                <a:solidFill>
+                  <a:srgbClr val="17242E"/>
+                </a:solidFill>
+                <a:latin typeface="Consolas"/>
+              </a:rPr>
+              <a:t>notes</a:t>
+            </a:r>
+          </a:p>
+        </p:txBody>
+      </p:sp>
+      <p:sp>
+        <p:nvSpPr>
+          <p:cNvPr id="24" name="TextBox 23"/>
+          <p:cNvSpPr txBox="1"/>
+          <p:nvPr/>
+        </p:nvSpPr>
+        <p:spPr>
+          <a:xfrm>
+            <a:off x="5669280" y="2468880"/>
+            <a:ext cx="914400" cy="1554480"/>
+          </a:xfrm>
+          <a:prstGeom prst="rect">
+            <a:avLst/>
+          </a:prstGeom>
+          <a:noFill/>
+        </p:spPr>
+        <p:txBody>
+          <a:bodyPr wrap="square" anchor="ctr" lIns="0" rIns="0" tIns="0" bIns="0">
+            <a:spAutoFit/>
+          </a:bodyPr>
+          <a:lstStyle/>
+          <a:p>
+            <a:pPr algn="ctr">
+              <a:spcAft>
+                <a:spcPts val="0"/>
+              </a:spcAft>
+            </a:pPr>
+            <a:r>
+              <a:rPr sz="2800" b="0" i="0">
+                <a:solidFill>
+                  <a:srgbClr val="5A6A72"/>
+                </a:solidFill>
+                <a:latin typeface="Consolas"/>
+              </a:rPr>
+              <a:t>＋</a:t>
+            </a:r>
+          </a:p>
+        </p:txBody>
+      </p:sp>
+      <p:sp>
+        <p:nvSpPr>
+          <p:cNvPr id="25" name="Rounded Rectangle 24"/>
+          <p:cNvSpPr/>
+          <p:nvPr/>
+        </p:nvSpPr>
+        <p:spPr>
+          <a:xfrm>
+            <a:off x="6720840" y="2468880"/>
+            <a:ext cx="4206240" cy="1554480"/>
+          </a:xfrm>
+          <a:prstGeom prst="roundRect">
+            <a:avLst>
+              <a:gd name="adj" fmla="val 6000"/>
+            </a:avLst>
+          </a:prstGeom>
+          <a:solidFill>
+            <a:srgbClr val="FFFFFF"/>
+          </a:solidFill>
+          <a:ln w="12700">
+            <a:solidFill>
+              <a:srgbClr val="D9E0DE"/>
+            </a:solidFill>
+          </a:ln>
+          <a:effectLst/>
+        </p:spPr>
+        <p:style>
+          <a:lnRef idx="1">
+            <a:schemeClr val="accent1"/>
+          </a:lnRef>
+          <a:fillRef idx="3">
+            <a:schemeClr val="accent1"/>
+          </a:fillRef>
+          <a:effectRef idx="2">
+            <a:schemeClr val="accent1"/>
+          </a:effectRef>
+          <a:fontRef idx="minor">
+            <a:schemeClr val="lt1"/>
+          </a:fontRef>
+        </p:style>
+        <p:txBody>
+          <a:bodyPr rtlCol="0" anchor="ctr"/>
+          <a:lstStyle/>
+          <a:p>
+            <a:pPr algn="ctr"/>
+          </a:p>
+        </p:txBody>
+      </p:sp>
+      <p:sp>
+        <p:nvSpPr>
+          <p:cNvPr id="26" name="TextBox 25"/>
+          <p:cNvSpPr txBox="1"/>
+          <p:nvPr/>
+        </p:nvSpPr>
+        <p:spPr>
+          <a:xfrm>
+            <a:off x="6995159" y="2697480"/>
+            <a:ext cx="3657600" cy="320040"/>
+          </a:xfrm>
+          <a:prstGeom prst="rect">
+            <a:avLst/>
+          </a:prstGeom>
+          <a:noFill/>
+        </p:spPr>
+        <p:txBody>
+          <a:bodyPr wrap="square" anchor="t" lIns="0" rIns="0" tIns="0" bIns="0">
             <a:spAutoFit/>
           </a:bodyPr>
           <a:lstStyle/>
@@ -7015,180 +9548,39 @@
               </a:spcAft>
             </a:pPr>
             <a:r>
-              <a:rPr sz="1050" b="0" i="0">
-                <a:solidFill>
-                  <a:srgbClr val="566572"/>
-                </a:solidFill>
-                <a:latin typeface="Consolas"/>
-              </a:rPr>
-              <a:t>BIGGER THAN THE BOOKS ON YOUR DESK</a:t>
-            </a:r>
-          </a:p>
-        </p:txBody>
-      </p:sp>
-      <p:sp>
-        <p:nvSpPr>
-          <p:cNvPr id="6" name="TextBox 5"/>
-          <p:cNvSpPr txBox="1"/>
-          <p:nvPr/>
-        </p:nvSpPr>
-        <p:spPr>
-          <a:xfrm>
-            <a:off x="1508760" y="868680"/>
-            <a:ext cx="9692640" cy="320040"/>
-          </a:xfrm>
-          <a:prstGeom prst="rect">
-            <a:avLst/>
-          </a:prstGeom>
-          <a:noFill/>
-        </p:spPr>
-        <p:txBody>
-          <a:bodyPr wrap="square" anchor="t" lIns="0" rIns="0" tIns="0" bIns="0">
-            <a:spAutoFit/>
-          </a:bodyPr>
-          <a:lstStyle/>
-          <a:p>
-            <a:pPr algn="l">
-              <a:spcAft>
-                <a:spcPts val="0"/>
-              </a:spcAft>
-            </a:pPr>
-            <a:r>
-              <a:rPr sz="600" b="0" i="0">
-                <a:solidFill>
-                  <a:srgbClr val="17242E"/>
-                </a:solidFill>
-                <a:latin typeface="Calibri"/>
-              </a:rPr>
-              <a:t/>
-            </a:r>
-          </a:p>
-        </p:txBody>
-      </p:sp>
-      <p:sp>
-        <p:nvSpPr>
-          <p:cNvPr id="7" name="TextBox 6"/>
-          <p:cNvSpPr txBox="1"/>
-          <p:nvPr/>
-        </p:nvSpPr>
-        <p:spPr>
-          <a:xfrm>
-            <a:off x="914400" y="1234440"/>
-            <a:ext cx="10424160" cy="822960"/>
-          </a:xfrm>
-          <a:prstGeom prst="rect">
-            <a:avLst/>
-          </a:prstGeom>
-          <a:noFill/>
-        </p:spPr>
-        <p:txBody>
-          <a:bodyPr wrap="square" anchor="t" lIns="0" rIns="0" tIns="0" bIns="0">
-            <a:spAutoFit/>
-          </a:bodyPr>
-          <a:lstStyle/>
-          <a:p>
-            <a:pPr algn="l">
-              <a:lnSpc>
-                <a:spcPct val="100000"/>
-              </a:lnSpc>
-              <a:spcAft>
-                <a:spcPts val="0"/>
-              </a:spcAft>
-            </a:pPr>
-            <a:r>
-              <a:rPr sz="2500" b="1" i="0">
+              <a:rPr sz="1350" b="1" i="0">
                 <a:solidFill>
                   <a:srgbClr val="17242E"/>
                 </a:solidFill>
                 <a:latin typeface="Georgia"/>
               </a:rPr>
-              <a:t>Your knowledge library can outgrow your physical shelf</a:t>
-            </a:r>
-          </a:p>
-        </p:txBody>
-      </p:sp>
-      <p:sp>
-        <p:nvSpPr>
-          <p:cNvPr id="8" name="TextBox 7"/>
-          <p:cNvSpPr txBox="1"/>
-          <p:nvPr/>
-        </p:nvSpPr>
-        <p:spPr>
-          <a:xfrm>
-            <a:off x="914400" y="2103120"/>
-            <a:ext cx="10332720" cy="685800"/>
-          </a:xfrm>
-          <a:prstGeom prst="rect">
-            <a:avLst/>
-          </a:prstGeom>
-          <a:noFill/>
-        </p:spPr>
-        <p:txBody>
-          <a:bodyPr wrap="square" anchor="t" lIns="0" rIns="0" tIns="0" bIns="0">
-            <a:spAutoFit/>
-          </a:bodyPr>
-          <a:lstStyle/>
-          <a:p>
-            <a:pPr algn="l">
-              <a:lnSpc>
-                <a:spcPct val="108000"/>
-              </a:lnSpc>
-              <a:spcAft>
-                <a:spcPts val="0"/>
-              </a:spcAft>
-            </a:pPr>
-            <a:r>
-              <a:rPr sz="1350" b="0" i="0">
-                <a:solidFill>
-                  <a:srgbClr val="566572"/>
-                </a:solidFill>
-                <a:latin typeface="Calibri"/>
-              </a:rPr>
-              <a:t>I can pull authoritative reference and public-domain texts into your knowledge library from </a:t>
-            </a:r>
-            <a:r>
-              <a:rPr sz="1350" b="1" i="0">
-                <a:solidFill>
-                  <a:srgbClr val="17242E"/>
-                </a:solidFill>
-                <a:latin typeface="Calibri"/>
-              </a:rPr>
-              <a:t>curated catalogs</a:t>
-            </a:r>
-            <a:r>
-              <a:rPr sz="1350" b="0" i="0">
-                <a:solidFill>
-                  <a:srgbClr val="566572"/>
-                </a:solidFill>
-                <a:latin typeface="Calibri"/>
-              </a:rPr>
-              <a:t> — straight to your device — then ground every answer in the combined whole, at a physician's depth.</a:t>
-            </a:r>
-          </a:p>
-        </p:txBody>
-      </p:sp>
-      <p:sp>
-        <p:nvSpPr>
-          <p:cNvPr id="9" name="Rounded Rectangle 8"/>
+              <a:t>What I pull in</a:t>
+            </a:r>
+          </a:p>
+        </p:txBody>
+      </p:sp>
+      <p:sp>
+        <p:nvSpPr>
+          <p:cNvPr id="27" name="Rounded Rectangle 26"/>
           <p:cNvSpPr/>
           <p:nvPr/>
         </p:nvSpPr>
         <p:spPr>
           <a:xfrm>
-            <a:off x="1280160" y="3063240"/>
-            <a:ext cx="3931920" cy="1600200"/>
+            <a:off x="6995159" y="3154680"/>
+            <a:ext cx="1645920" cy="365760"/>
           </a:xfrm>
           <a:prstGeom prst="roundRect">
             <a:avLst>
-              <a:gd name="adj" fmla="val 7000"/>
+              <a:gd name="adj" fmla="val 30000"/>
             </a:avLst>
           </a:prstGeom>
           <a:solidFill>
-            <a:srgbClr val="FFFFFF"/>
+            <a:srgbClr val="F4F6F5"/>
           </a:solidFill>
           <a:ln w="12700">
             <a:solidFill>
-              <a:srgbClr val="DDDFDD"/>
+              <a:srgbClr val="D9E0DE"/>
             </a:solidFill>
           </a:ln>
           <a:effectLst/>
@@ -7217,14 +9609,14 @@
       </p:sp>
       <p:sp>
         <p:nvSpPr>
-          <p:cNvPr id="10" name="TextBox 9"/>
+          <p:cNvPr id="28" name="TextBox 27"/>
           <p:cNvSpPr txBox="1"/>
           <p:nvPr/>
         </p:nvSpPr>
         <p:spPr>
           <a:xfrm>
-            <a:off x="1554480" y="3291840"/>
-            <a:ext cx="3474720" cy="320040"/>
+            <a:off x="6995159" y="3154680"/>
+            <a:ext cx="1645920" cy="365760"/>
           </a:xfrm>
           <a:prstGeom prst="rect">
             <a:avLst/>
@@ -7232,50 +9624,50 @@
           <a:noFill/>
         </p:spPr>
         <p:txBody>
-          <a:bodyPr wrap="square" anchor="t" lIns="0" rIns="0" tIns="0" bIns="0">
+          <a:bodyPr wrap="square" anchor="ctr" lIns="0" rIns="0" tIns="0" bIns="0">
             <a:spAutoFit/>
           </a:bodyPr>
           <a:lstStyle/>
           <a:p>
-            <a:pPr algn="l">
+            <a:pPr algn="ctr">
               <a:spcAft>
                 <a:spcPts val="0"/>
               </a:spcAft>
             </a:pPr>
             <a:r>
-              <a:rPr sz="1350" b="1" i="0">
+              <a:rPr sz="1000" b="0" i="0">
                 <a:solidFill>
                   <a:srgbClr val="17242E"/>
                 </a:solidFill>
-                <a:latin typeface="Calibri"/>
+                <a:latin typeface="Consolas"/>
               </a:rPr>
-              <a:t>What you bring</a:t>
-            </a:r>
-          </a:p>
-        </p:txBody>
-      </p:sp>
-      <p:sp>
-        <p:nvSpPr>
-          <p:cNvPr id="11" name="Rounded Rectangle 10"/>
+              <a:t>reference texts</a:t>
+            </a:r>
+          </a:p>
+        </p:txBody>
+      </p:sp>
+      <p:sp>
+        <p:nvSpPr>
+          <p:cNvPr id="29" name="Rounded Rectangle 28"/>
           <p:cNvSpPr/>
           <p:nvPr/>
         </p:nvSpPr>
         <p:spPr>
           <a:xfrm>
-            <a:off x="1554480" y="3749039"/>
-            <a:ext cx="1115568" cy="365760"/>
+            <a:off x="8778240" y="3154680"/>
+            <a:ext cx="1737360" cy="365760"/>
           </a:xfrm>
           <a:prstGeom prst="roundRect">
             <a:avLst>
-              <a:gd name="adj" fmla="val 50000"/>
+              <a:gd name="adj" fmla="val 30000"/>
             </a:avLst>
           </a:prstGeom>
           <a:solidFill>
-            <a:srgbClr val="FBFAF9"/>
+            <a:srgbClr val="F4F6F5"/>
           </a:solidFill>
           <a:ln w="12700">
             <a:solidFill>
-              <a:srgbClr val="DDDFDD"/>
+              <a:srgbClr val="D9E0DE"/>
             </a:solidFill>
           </a:ln>
           <a:effectLst/>
@@ -7304,14 +9696,14 @@
       </p:sp>
       <p:sp>
         <p:nvSpPr>
-          <p:cNvPr id="12" name="TextBox 11"/>
+          <p:cNvPr id="30" name="TextBox 29"/>
           <p:cNvSpPr txBox="1"/>
           <p:nvPr/>
         </p:nvSpPr>
         <p:spPr>
           <a:xfrm>
-            <a:off x="1554480" y="3749039"/>
-            <a:ext cx="1115568" cy="365760"/>
+            <a:off x="8778240" y="3154680"/>
+            <a:ext cx="1737360" cy="365760"/>
           </a:xfrm>
           <a:prstGeom prst="rect">
             <a:avLst/>
@@ -7334,497 +9726,23 @@
                 <a:solidFill>
                   <a:srgbClr val="17242E"/>
                 </a:solidFill>
-                <a:latin typeface="Calibri"/>
+                <a:latin typeface="Consolas"/>
               </a:rPr>
-              <a:t>Guidelines</a:t>
-            </a:r>
-          </a:p>
-        </p:txBody>
-      </p:sp>
-      <p:sp>
-        <p:nvSpPr>
-          <p:cNvPr id="13" name="Rounded Rectangle 12"/>
+              <a:t>curated catalogs</a:t>
+            </a:r>
+          </a:p>
+        </p:txBody>
+      </p:sp>
+      <p:sp>
+        <p:nvSpPr>
+          <p:cNvPr id="31" name="Rounded Rectangle 30"/>
           <p:cNvSpPr/>
           <p:nvPr/>
         </p:nvSpPr>
         <p:spPr>
           <a:xfrm>
-            <a:off x="2807208" y="3749039"/>
-            <a:ext cx="1199692" cy="365760"/>
-          </a:xfrm>
-          <a:prstGeom prst="roundRect">
-            <a:avLst>
-              <a:gd name="adj" fmla="val 50000"/>
-            </a:avLst>
-          </a:prstGeom>
-          <a:solidFill>
-            <a:srgbClr val="FBFAF9"/>
-          </a:solidFill>
-          <a:ln w="12700">
-            <a:solidFill>
-              <a:srgbClr val="DDDFDD"/>
-            </a:solidFill>
-          </a:ln>
-          <a:effectLst/>
-        </p:spPr>
-        <p:style>
-          <a:lnRef idx="1">
-            <a:schemeClr val="accent1"/>
-          </a:lnRef>
-          <a:fillRef idx="3">
-            <a:schemeClr val="accent1"/>
-          </a:fillRef>
-          <a:effectRef idx="2">
-            <a:schemeClr val="accent1"/>
-          </a:effectRef>
-          <a:fontRef idx="minor">
-            <a:schemeClr val="lt1"/>
-          </a:fontRef>
-        </p:style>
-        <p:txBody>
-          <a:bodyPr rtlCol="0" anchor="ctr"/>
-          <a:lstStyle/>
-          <a:p>
-            <a:pPr algn="ctr"/>
-          </a:p>
-        </p:txBody>
-      </p:sp>
-      <p:sp>
-        <p:nvSpPr>
-          <p:cNvPr id="14" name="TextBox 13"/>
-          <p:cNvSpPr txBox="1"/>
-          <p:nvPr/>
-        </p:nvSpPr>
-        <p:spPr>
-          <a:xfrm>
-            <a:off x="2807208" y="3749039"/>
-            <a:ext cx="1199692" cy="365760"/>
-          </a:xfrm>
-          <a:prstGeom prst="rect">
-            <a:avLst/>
-          </a:prstGeom>
-          <a:noFill/>
-        </p:spPr>
-        <p:txBody>
-          <a:bodyPr wrap="square" anchor="ctr" lIns="0" rIns="0" tIns="0" bIns="0">
-            <a:spAutoFit/>
-          </a:bodyPr>
-          <a:lstStyle/>
-          <a:p>
-            <a:pPr algn="ctr">
-              <a:spcAft>
-                <a:spcPts val="0"/>
-              </a:spcAft>
-            </a:pPr>
-            <a:r>
-              <a:rPr sz="1000" b="0" i="0">
-                <a:solidFill>
-                  <a:srgbClr val="17242E"/>
-                </a:solidFill>
-                <a:latin typeface="Calibri"/>
-              </a:rPr>
-              <a:t>Your papers</a:t>
-            </a:r>
-          </a:p>
-        </p:txBody>
-      </p:sp>
-      <p:sp>
-        <p:nvSpPr>
-          <p:cNvPr id="15" name="Rounded Rectangle 14"/>
-          <p:cNvSpPr/>
-          <p:nvPr/>
-        </p:nvSpPr>
-        <p:spPr>
-          <a:xfrm>
-            <a:off x="4144060" y="3749039"/>
-            <a:ext cx="694944" cy="365760"/>
-          </a:xfrm>
-          <a:prstGeom prst="roundRect">
-            <a:avLst>
-              <a:gd name="adj" fmla="val 50000"/>
-            </a:avLst>
-          </a:prstGeom>
-          <a:solidFill>
-            <a:srgbClr val="FBFAF9"/>
-          </a:solidFill>
-          <a:ln w="12700">
-            <a:solidFill>
-              <a:srgbClr val="DDDFDD"/>
-            </a:solidFill>
-          </a:ln>
-          <a:effectLst/>
-        </p:spPr>
-        <p:style>
-          <a:lnRef idx="1">
-            <a:schemeClr val="accent1"/>
-          </a:lnRef>
-          <a:fillRef idx="3">
-            <a:schemeClr val="accent1"/>
-          </a:fillRef>
-          <a:effectRef idx="2">
-            <a:schemeClr val="accent1"/>
-          </a:effectRef>
-          <a:fontRef idx="minor">
-            <a:schemeClr val="lt1"/>
-          </a:fontRef>
-        </p:style>
-        <p:txBody>
-          <a:bodyPr rtlCol="0" anchor="ctr"/>
-          <a:lstStyle/>
-          <a:p>
-            <a:pPr algn="ctr"/>
-          </a:p>
-        </p:txBody>
-      </p:sp>
-      <p:sp>
-        <p:nvSpPr>
-          <p:cNvPr id="16" name="TextBox 15"/>
-          <p:cNvSpPr txBox="1"/>
-          <p:nvPr/>
-        </p:nvSpPr>
-        <p:spPr>
-          <a:xfrm>
-            <a:off x="4144060" y="3749039"/>
-            <a:ext cx="694944" cy="365760"/>
-          </a:xfrm>
-          <a:prstGeom prst="rect">
-            <a:avLst/>
-          </a:prstGeom>
-          <a:noFill/>
-        </p:spPr>
-        <p:txBody>
-          <a:bodyPr wrap="square" anchor="ctr" lIns="0" rIns="0" tIns="0" bIns="0">
-            <a:spAutoFit/>
-          </a:bodyPr>
-          <a:lstStyle/>
-          <a:p>
-            <a:pPr algn="ctr">
-              <a:spcAft>
-                <a:spcPts val="0"/>
-              </a:spcAft>
-            </a:pPr>
-            <a:r>
-              <a:rPr sz="1000" b="0" i="0">
-                <a:solidFill>
-                  <a:srgbClr val="17242E"/>
-                </a:solidFill>
-                <a:latin typeface="Calibri"/>
-              </a:rPr>
-              <a:t>Notes</a:t>
-            </a:r>
-          </a:p>
-        </p:txBody>
-      </p:sp>
-      <p:sp>
-        <p:nvSpPr>
-          <p:cNvPr id="17" name="TextBox 16"/>
-          <p:cNvSpPr txBox="1"/>
-          <p:nvPr/>
-        </p:nvSpPr>
-        <p:spPr>
-          <a:xfrm>
-            <a:off x="5440680" y="3063240"/>
-            <a:ext cx="1280160" cy="1600200"/>
-          </a:xfrm>
-          <a:prstGeom prst="rect">
-            <a:avLst/>
-          </a:prstGeom>
-          <a:noFill/>
-        </p:spPr>
-        <p:txBody>
-          <a:bodyPr wrap="square" anchor="ctr" lIns="0" rIns="0" tIns="0" bIns="0">
-            <a:spAutoFit/>
-          </a:bodyPr>
-          <a:lstStyle/>
-          <a:p>
-            <a:pPr algn="ctr">
-              <a:spcAft>
-                <a:spcPts val="0"/>
-              </a:spcAft>
-            </a:pPr>
-            <a:r>
-              <a:rPr sz="3000" b="0" i="0">
-                <a:solidFill>
-                  <a:srgbClr val="566572"/>
-                </a:solidFill>
-                <a:latin typeface="Calibri"/>
-              </a:rPr>
-              <a:t>＋</a:t>
-            </a:r>
-          </a:p>
-        </p:txBody>
-      </p:sp>
-      <p:sp>
-        <p:nvSpPr>
-          <p:cNvPr id="18" name="Rounded Rectangle 17"/>
-          <p:cNvSpPr/>
-          <p:nvPr/>
-        </p:nvSpPr>
-        <p:spPr>
-          <a:xfrm>
-            <a:off x="6949440" y="3063240"/>
-            <a:ext cx="3931920" cy="1600200"/>
-          </a:xfrm>
-          <a:prstGeom prst="roundRect">
-            <a:avLst>
-              <a:gd name="adj" fmla="val 7000"/>
-            </a:avLst>
-          </a:prstGeom>
-          <a:solidFill>
-            <a:srgbClr val="FFFFFF"/>
-          </a:solidFill>
-          <a:ln w="12700">
-            <a:solidFill>
-              <a:srgbClr val="DDDFDD"/>
-            </a:solidFill>
-          </a:ln>
-          <a:effectLst/>
-        </p:spPr>
-        <p:style>
-          <a:lnRef idx="1">
-            <a:schemeClr val="accent1"/>
-          </a:lnRef>
-          <a:fillRef idx="3">
-            <a:schemeClr val="accent1"/>
-          </a:fillRef>
-          <a:effectRef idx="2">
-            <a:schemeClr val="accent1"/>
-          </a:effectRef>
-          <a:fontRef idx="minor">
-            <a:schemeClr val="lt1"/>
-          </a:fontRef>
-        </p:style>
-        <p:txBody>
-          <a:bodyPr rtlCol="0" anchor="ctr"/>
-          <a:lstStyle/>
-          <a:p>
-            <a:pPr algn="ctr"/>
-          </a:p>
-        </p:txBody>
-      </p:sp>
-      <p:sp>
-        <p:nvSpPr>
-          <p:cNvPr id="19" name="TextBox 18"/>
-          <p:cNvSpPr txBox="1"/>
-          <p:nvPr/>
-        </p:nvSpPr>
-        <p:spPr>
-          <a:xfrm>
-            <a:off x="7223759" y="3291840"/>
-            <a:ext cx="3474720" cy="320040"/>
-          </a:xfrm>
-          <a:prstGeom prst="rect">
-            <a:avLst/>
-          </a:prstGeom>
-          <a:noFill/>
-        </p:spPr>
-        <p:txBody>
-          <a:bodyPr wrap="square" anchor="t" lIns="0" rIns="0" tIns="0" bIns="0">
-            <a:spAutoFit/>
-          </a:bodyPr>
-          <a:lstStyle/>
-          <a:p>
-            <a:pPr algn="l">
-              <a:spcAft>
-                <a:spcPts val="0"/>
-              </a:spcAft>
-            </a:pPr>
-            <a:r>
-              <a:rPr sz="1350" b="1" i="0">
-                <a:solidFill>
-                  <a:srgbClr val="17242E"/>
-                </a:solidFill>
-                <a:latin typeface="Calibri"/>
-              </a:rPr>
-              <a:t>What I pull in</a:t>
-            </a:r>
-          </a:p>
-        </p:txBody>
-      </p:sp>
-      <p:sp>
-        <p:nvSpPr>
-          <p:cNvPr id="20" name="Rounded Rectangle 19"/>
-          <p:cNvSpPr/>
-          <p:nvPr/>
-        </p:nvSpPr>
-        <p:spPr>
-          <a:xfrm>
-            <a:off x="7223759" y="3749039"/>
-            <a:ext cx="1536192" cy="365760"/>
-          </a:xfrm>
-          <a:prstGeom prst="roundRect">
-            <a:avLst>
-              <a:gd name="adj" fmla="val 50000"/>
-            </a:avLst>
-          </a:prstGeom>
-          <a:solidFill>
-            <a:srgbClr val="FBFAF9"/>
-          </a:solidFill>
-          <a:ln w="12700">
-            <a:solidFill>
-              <a:srgbClr val="DDDFDD"/>
-            </a:solidFill>
-          </a:ln>
-          <a:effectLst/>
-        </p:spPr>
-        <p:style>
-          <a:lnRef idx="1">
-            <a:schemeClr val="accent1"/>
-          </a:lnRef>
-          <a:fillRef idx="3">
-            <a:schemeClr val="accent1"/>
-          </a:fillRef>
-          <a:effectRef idx="2">
-            <a:schemeClr val="accent1"/>
-          </a:effectRef>
-          <a:fontRef idx="minor">
-            <a:schemeClr val="lt1"/>
-          </a:fontRef>
-        </p:style>
-        <p:txBody>
-          <a:bodyPr rtlCol="0" anchor="ctr"/>
-          <a:lstStyle/>
-          <a:p>
-            <a:pPr algn="ctr"/>
-          </a:p>
-        </p:txBody>
-      </p:sp>
-      <p:sp>
-        <p:nvSpPr>
-          <p:cNvPr id="21" name="TextBox 20"/>
-          <p:cNvSpPr txBox="1"/>
-          <p:nvPr/>
-        </p:nvSpPr>
-        <p:spPr>
-          <a:xfrm>
-            <a:off x="7223759" y="3749039"/>
-            <a:ext cx="1536192" cy="365760"/>
-          </a:xfrm>
-          <a:prstGeom prst="rect">
-            <a:avLst/>
-          </a:prstGeom>
-          <a:noFill/>
-        </p:spPr>
-        <p:txBody>
-          <a:bodyPr wrap="square" anchor="ctr" lIns="0" rIns="0" tIns="0" bIns="0">
-            <a:spAutoFit/>
-          </a:bodyPr>
-          <a:lstStyle/>
-          <a:p>
-            <a:pPr algn="ctr">
-              <a:spcAft>
-                <a:spcPts val="0"/>
-              </a:spcAft>
-            </a:pPr>
-            <a:r>
-              <a:rPr sz="1000" b="0" i="0">
-                <a:solidFill>
-                  <a:srgbClr val="17242E"/>
-                </a:solidFill>
-                <a:latin typeface="Calibri"/>
-              </a:rPr>
-              <a:t>Reference texts</a:t>
-            </a:r>
-          </a:p>
-        </p:txBody>
-      </p:sp>
-      <p:sp>
-        <p:nvSpPr>
-          <p:cNvPr id="22" name="Rounded Rectangle 21"/>
-          <p:cNvSpPr/>
-          <p:nvPr/>
-        </p:nvSpPr>
-        <p:spPr>
-          <a:xfrm>
-            <a:off x="8897111" y="3749039"/>
-            <a:ext cx="1620316" cy="365760"/>
-          </a:xfrm>
-          <a:prstGeom prst="roundRect">
-            <a:avLst>
-              <a:gd name="adj" fmla="val 50000"/>
-            </a:avLst>
-          </a:prstGeom>
-          <a:solidFill>
-            <a:srgbClr val="FBFAF9"/>
-          </a:solidFill>
-          <a:ln w="12700">
-            <a:solidFill>
-              <a:srgbClr val="DDDFDD"/>
-            </a:solidFill>
-          </a:ln>
-          <a:effectLst/>
-        </p:spPr>
-        <p:style>
-          <a:lnRef idx="1">
-            <a:schemeClr val="accent1"/>
-          </a:lnRef>
-          <a:fillRef idx="3">
-            <a:schemeClr val="accent1"/>
-          </a:fillRef>
-          <a:effectRef idx="2">
-            <a:schemeClr val="accent1"/>
-          </a:effectRef>
-          <a:fontRef idx="minor">
-            <a:schemeClr val="lt1"/>
-          </a:fontRef>
-        </p:style>
-        <p:txBody>
-          <a:bodyPr rtlCol="0" anchor="ctr"/>
-          <a:lstStyle/>
-          <a:p>
-            <a:pPr algn="ctr"/>
-          </a:p>
-        </p:txBody>
-      </p:sp>
-      <p:sp>
-        <p:nvSpPr>
-          <p:cNvPr id="23" name="TextBox 22"/>
-          <p:cNvSpPr txBox="1"/>
-          <p:nvPr/>
-        </p:nvSpPr>
-        <p:spPr>
-          <a:xfrm>
-            <a:off x="8897111" y="3749039"/>
-            <a:ext cx="1620316" cy="365760"/>
-          </a:xfrm>
-          <a:prstGeom prst="rect">
-            <a:avLst/>
-          </a:prstGeom>
-          <a:noFill/>
-        </p:spPr>
-        <p:txBody>
-          <a:bodyPr wrap="square" anchor="ctr" lIns="0" rIns="0" tIns="0" bIns="0">
-            <a:spAutoFit/>
-          </a:bodyPr>
-          <a:lstStyle/>
-          <a:p>
-            <a:pPr algn="ctr">
-              <a:spcAft>
-                <a:spcPts val="0"/>
-              </a:spcAft>
-            </a:pPr>
-            <a:r>
-              <a:rPr sz="1000" b="0" i="0">
-                <a:solidFill>
-                  <a:srgbClr val="17242E"/>
-                </a:solidFill>
-                <a:latin typeface="Calibri"/>
-              </a:rPr>
-              <a:t>Curated catalogs</a:t>
-            </a:r>
-          </a:p>
-        </p:txBody>
-      </p:sp>
-      <p:sp>
-        <p:nvSpPr>
-          <p:cNvPr id="24" name="Rounded Rectangle 23"/>
-          <p:cNvSpPr/>
-          <p:nvPr/>
-        </p:nvSpPr>
-        <p:spPr>
-          <a:xfrm>
-            <a:off x="2651760" y="4892040"/>
-            <a:ext cx="6858000" cy="822960"/>
+            <a:off x="2560320" y="4434840"/>
+            <a:ext cx="7040880" cy="822960"/>
           </a:xfrm>
           <a:prstGeom prst="roundRect">
             <a:avLst>
@@ -7865,14 +9783,14 @@
       </p:sp>
       <p:sp>
         <p:nvSpPr>
-          <p:cNvPr id="25" name="TextBox 24"/>
+          <p:cNvPr id="32" name="TextBox 31"/>
           <p:cNvSpPr txBox="1"/>
           <p:nvPr/>
         </p:nvSpPr>
         <p:spPr>
           <a:xfrm>
-            <a:off x="2834640" y="4892040"/>
-            <a:ext cx="6492240" cy="822960"/>
+            <a:off x="2743200" y="4434840"/>
+            <a:ext cx="6675120" cy="822960"/>
           </a:xfrm>
           <a:prstGeom prst="rect">
             <a:avLst/>
@@ -7886,9 +9804,6 @@
           <a:lstStyle/>
           <a:p>
             <a:pPr algn="ctr">
-              <a:lnSpc>
-                <a:spcPct val="105000"/>
-              </a:lnSpc>
               <a:spcAft>
                 <a:spcPts val="0"/>
               </a:spcAft>
@@ -7898,18 +9813,18 @@
                 <a:solidFill>
                   <a:srgbClr val="1F5C6B"/>
                 </a:solidFill>
-                <a:latin typeface="Calibri"/>
+                <a:latin typeface="Georgia"/>
               </a:rPr>
               <a:t>= one knowledge library  </a:t>
             </a:r>
             <a:r>
-              <a:rPr sz="1300" b="0" i="0">
+              <a:rPr sz="1250" b="0" i="0">
                 <a:solidFill>
                   <a:srgbClr val="17242E"/>
                 </a:solidFill>
-                <a:latin typeface="Calibri"/>
+                <a:latin typeface="Georgia"/>
               </a:rPr>
-              <a:t>— broader than your physical shelf, still curated, still yours.</a:t>
+              <a:t>— broader than your shelf, still curated, still private.</a:t>
             </a:r>
           </a:p>
         </p:txBody>
@@ -7947,7 +9862,7 @@
             <a:avLst/>
           </a:prstGeom>
           <a:solidFill>
-            <a:srgbClr val="FBFAF9"/>
+            <a:srgbClr val="F4F6F5"/>
           </a:solidFill>
           <a:ln>
             <a:noFill/>
@@ -7978,27 +9893,23 @@
       </p:sp>
       <p:sp>
         <p:nvSpPr>
-          <p:cNvPr id="3" name="Rounded Rectangle 2"/>
+          <p:cNvPr id="3" name="Rectangle 2"/>
           <p:cNvSpPr/>
           <p:nvPr/>
         </p:nvSpPr>
         <p:spPr>
           <a:xfrm>
-            <a:off x="914400" y="566928"/>
-            <a:ext cx="457200" cy="457200"/>
-          </a:xfrm>
-          <a:prstGeom prst="roundRect">
-            <a:avLst>
-              <a:gd name="adj" fmla="val 28000"/>
-            </a:avLst>
+            <a:off x="0" y="0"/>
+            <a:ext cx="12191695" cy="658368"/>
+          </a:xfrm>
+          <a:prstGeom prst="rect">
+            <a:avLst/>
           </a:prstGeom>
           <a:solidFill>
             <a:srgbClr val="E4F0F1"/>
           </a:solidFill>
-          <a:ln w="12700">
-            <a:solidFill>
-              <a:srgbClr val="BEDDDF"/>
-            </a:solidFill>
+          <a:ln>
+            <a:noFill/>
           </a:ln>
           <a:effectLst/>
         </p:spPr>
@@ -8026,40 +9937,45 @@
       </p:sp>
       <p:sp>
         <p:nvSpPr>
-          <p:cNvPr id="4" name="TextBox 3"/>
-          <p:cNvSpPr txBox="1"/>
-          <p:nvPr/>
-        </p:nvSpPr>
-        <p:spPr>
-          <a:xfrm>
-            <a:off x="914400" y="566928"/>
-            <a:ext cx="457200" cy="457200"/>
-          </a:xfrm>
-          <a:prstGeom prst="rect">
-            <a:avLst/>
-          </a:prstGeom>
-          <a:noFill/>
-        </p:spPr>
-        <p:txBody>
-          <a:bodyPr wrap="square" anchor="ctr" lIns="0" rIns="0" tIns="0" bIns="0">
-            <a:spAutoFit/>
-          </a:bodyPr>
-          <a:lstStyle/>
-          <a:p>
-            <a:pPr algn="ctr">
-              <a:spcAft>
-                <a:spcPts val="0"/>
-              </a:spcAft>
-            </a:pPr>
-            <a:r>
-              <a:rPr sz="1500" b="1" i="0">
-                <a:solidFill>
-                  <a:srgbClr val="1F5C6B"/>
-                </a:solidFill>
-                <a:latin typeface="Consolas"/>
-              </a:rPr>
-              <a:t>6</a:t>
-            </a:r>
+          <p:cNvPr id="4" name="Rectangle 3"/>
+          <p:cNvSpPr/>
+          <p:nvPr/>
+        </p:nvSpPr>
+        <p:spPr>
+          <a:xfrm>
+            <a:off x="0" y="658368"/>
+            <a:ext cx="12191695" cy="18288"/>
+          </a:xfrm>
+          <a:prstGeom prst="rect">
+            <a:avLst/>
+          </a:prstGeom>
+          <a:solidFill>
+            <a:srgbClr val="BEDDDF"/>
+          </a:solidFill>
+          <a:ln>
+            <a:noFill/>
+          </a:ln>
+          <a:effectLst/>
+        </p:spPr>
+        <p:style>
+          <a:lnRef idx="1">
+            <a:schemeClr val="accent1"/>
+          </a:lnRef>
+          <a:fillRef idx="3">
+            <a:schemeClr val="accent1"/>
+          </a:fillRef>
+          <a:effectRef idx="2">
+            <a:schemeClr val="accent1"/>
+          </a:effectRef>
+          <a:fontRef idx="minor">
+            <a:schemeClr val="lt1"/>
+          </a:fontRef>
+        </p:style>
+        <p:txBody>
+          <a:bodyPr rtlCol="0" anchor="ctr"/>
+          <a:lstStyle/>
+          <a:p>
+            <a:pPr algn="ctr"/>
           </a:p>
         </p:txBody>
       </p:sp>
@@ -8071,8 +9987,8 @@
         </p:nvSpPr>
         <p:spPr>
           <a:xfrm>
-            <a:off x="1508760" y="548640"/>
-            <a:ext cx="9601200" cy="320040"/>
+            <a:off x="822960" y="0"/>
+            <a:ext cx="4572000" cy="658368"/>
           </a:xfrm>
           <a:prstGeom prst="rect">
             <a:avLst/>
@@ -8091,13 +10007,13 @@
               </a:spcAft>
             </a:pPr>
             <a:r>
-              <a:rPr sz="1050" b="0" i="0">
-                <a:solidFill>
-                  <a:srgbClr val="566572"/>
+              <a:rPr sz="1100" b="1" i="0">
+                <a:solidFill>
+                  <a:srgbClr val="1F5C6B"/>
                 </a:solidFill>
                 <a:latin typeface="Consolas"/>
               </a:rPr>
-              <a:t>WHEN YOU'RE READY FOR MORE</a:t>
+              <a:t>MENTIBLE CLINICAL</a:t>
             </a:r>
           </a:p>
         </p:txBody>
@@ -8110,8 +10026,299 @@
         </p:nvSpPr>
         <p:spPr>
           <a:xfrm>
-            <a:off x="1508760" y="868680"/>
-            <a:ext cx="9692640" cy="320040"/>
+            <a:off x="4206240" y="0"/>
+            <a:ext cx="5394960" cy="658368"/>
+          </a:xfrm>
+          <a:prstGeom prst="rect">
+            <a:avLst/>
+          </a:prstGeom>
+          <a:noFill/>
+        </p:spPr>
+        <p:txBody>
+          <a:bodyPr wrap="square" anchor="ctr" lIns="0" rIns="0" tIns="0" bIns="0">
+            <a:spAutoFit/>
+          </a:bodyPr>
+          <a:lstStyle/>
+          <a:p>
+            <a:pPr algn="r">
+              <a:spcAft>
+                <a:spcPts val="0"/>
+              </a:spcAft>
+            </a:pPr>
+            <a:r>
+              <a:rPr sz="1100" b="0" i="0">
+                <a:solidFill>
+                  <a:srgbClr val="5A6A72"/>
+                </a:solidFill>
+                <a:latin typeface="Consolas"/>
+              </a:rPr>
+              <a:t>SECTION 06 — PLAN · UPGRADE</a:t>
+            </a:r>
+          </a:p>
+        </p:txBody>
+      </p:sp>
+      <p:cxnSp>
+        <p:nvCxnSpPr>
+          <p:cNvPr id="7" name="Connector 6"/>
+          <p:cNvCxnSpPr/>
+          <p:nvPr/>
+        </p:nvCxnSpPr>
+        <p:spPr>
+          <a:xfrm>
+            <a:off x="10058400" y="329184"/>
+            <a:ext cx="590702" cy="0"/>
+          </a:xfrm>
+          <a:prstGeom prst="line">
+            <a:avLst/>
+          </a:prstGeom>
+          <a:ln w="22225">
+            <a:solidFill>
+              <a:srgbClr val="C0483C"/>
+            </a:solidFill>
+          </a:ln>
+          <a:effectLst/>
+        </p:spPr>
+        <p:style>
+          <a:lnRef idx="2">
+            <a:schemeClr val="accent1"/>
+          </a:lnRef>
+          <a:fillRef idx="0">
+            <a:schemeClr val="accent1"/>
+          </a:fillRef>
+          <a:effectRef idx="1">
+            <a:schemeClr val="accent1"/>
+          </a:effectRef>
+          <a:fontRef idx="minor">
+            <a:schemeClr val="tx1"/>
+          </a:fontRef>
+        </p:style>
+      </p:cxnSp>
+      <p:cxnSp>
+        <p:nvCxnSpPr>
+          <p:cNvPr id="8" name="Connector 7"/>
+          <p:cNvCxnSpPr/>
+          <p:nvPr/>
+        </p:nvCxnSpPr>
+        <p:spPr>
+          <a:xfrm>
+            <a:off x="10649102" y="329184"/>
+            <a:ext cx="104242" cy="91439"/>
+          </a:xfrm>
+          <a:prstGeom prst="line">
+            <a:avLst/>
+          </a:prstGeom>
+          <a:ln w="22225">
+            <a:solidFill>
+              <a:srgbClr val="C0483C"/>
+            </a:solidFill>
+          </a:ln>
+          <a:effectLst/>
+        </p:spPr>
+        <p:style>
+          <a:lnRef idx="2">
+            <a:schemeClr val="accent1"/>
+          </a:lnRef>
+          <a:fillRef idx="0">
+            <a:schemeClr val="accent1"/>
+          </a:fillRef>
+          <a:effectRef idx="1">
+            <a:schemeClr val="accent1"/>
+          </a:effectRef>
+          <a:fontRef idx="minor">
+            <a:schemeClr val="tx1"/>
+          </a:fontRef>
+        </p:style>
+      </p:cxnSp>
+      <p:cxnSp>
+        <p:nvCxnSpPr>
+          <p:cNvPr id="9" name="Connector 8"/>
+          <p:cNvCxnSpPr/>
+          <p:nvPr/>
+        </p:nvCxnSpPr>
+        <p:spPr>
+          <a:xfrm flipV="1">
+            <a:off x="10753344" y="310896"/>
+            <a:ext cx="86868" cy="109727"/>
+          </a:xfrm>
+          <a:prstGeom prst="line">
+            <a:avLst/>
+          </a:prstGeom>
+          <a:ln w="22225">
+            <a:solidFill>
+              <a:srgbClr val="C0483C"/>
+            </a:solidFill>
+          </a:ln>
+          <a:effectLst/>
+        </p:spPr>
+        <p:style>
+          <a:lnRef idx="2">
+            <a:schemeClr val="accent1"/>
+          </a:lnRef>
+          <a:fillRef idx="0">
+            <a:schemeClr val="accent1"/>
+          </a:fillRef>
+          <a:effectRef idx="1">
+            <a:schemeClr val="accent1"/>
+          </a:effectRef>
+          <a:fontRef idx="minor">
+            <a:schemeClr val="tx1"/>
+          </a:fontRef>
+        </p:style>
+      </p:cxnSp>
+      <p:cxnSp>
+        <p:nvCxnSpPr>
+          <p:cNvPr id="10" name="Connector 9"/>
+          <p:cNvCxnSpPr/>
+          <p:nvPr/>
+        </p:nvCxnSpPr>
+        <p:spPr>
+          <a:xfrm flipV="1">
+            <a:off x="10840212" y="18287"/>
+            <a:ext cx="69494" cy="292609"/>
+          </a:xfrm>
+          <a:prstGeom prst="line">
+            <a:avLst/>
+          </a:prstGeom>
+          <a:ln w="22225">
+            <a:solidFill>
+              <a:srgbClr val="C0483C"/>
+            </a:solidFill>
+          </a:ln>
+          <a:effectLst/>
+        </p:spPr>
+        <p:style>
+          <a:lnRef idx="2">
+            <a:schemeClr val="accent1"/>
+          </a:lnRef>
+          <a:fillRef idx="0">
+            <a:schemeClr val="accent1"/>
+          </a:fillRef>
+          <a:effectRef idx="1">
+            <a:schemeClr val="accent1"/>
+          </a:effectRef>
+          <a:fontRef idx="minor">
+            <a:schemeClr val="tx1"/>
+          </a:fontRef>
+        </p:style>
+      </p:cxnSp>
+      <p:cxnSp>
+        <p:nvCxnSpPr>
+          <p:cNvPr id="11" name="Connector 10"/>
+          <p:cNvCxnSpPr/>
+          <p:nvPr/>
+        </p:nvCxnSpPr>
+        <p:spPr>
+          <a:xfrm>
+            <a:off x="10909706" y="18287"/>
+            <a:ext cx="86868" cy="438913"/>
+          </a:xfrm>
+          <a:prstGeom prst="line">
+            <a:avLst/>
+          </a:prstGeom>
+          <a:ln w="22225">
+            <a:solidFill>
+              <a:srgbClr val="C0483C"/>
+            </a:solidFill>
+          </a:ln>
+          <a:effectLst/>
+        </p:spPr>
+        <p:style>
+          <a:lnRef idx="2">
+            <a:schemeClr val="accent1"/>
+          </a:lnRef>
+          <a:fillRef idx="0">
+            <a:schemeClr val="accent1"/>
+          </a:fillRef>
+          <a:effectRef idx="1">
+            <a:schemeClr val="accent1"/>
+          </a:effectRef>
+          <a:fontRef idx="minor">
+            <a:schemeClr val="tx1"/>
+          </a:fontRef>
+        </p:style>
+      </p:cxnSp>
+      <p:cxnSp>
+        <p:nvCxnSpPr>
+          <p:cNvPr id="12" name="Connector 11"/>
+          <p:cNvCxnSpPr/>
+          <p:nvPr/>
+        </p:nvCxnSpPr>
+        <p:spPr>
+          <a:xfrm flipV="1">
+            <a:off x="10996574" y="329184"/>
+            <a:ext cx="86868" cy="128016"/>
+          </a:xfrm>
+          <a:prstGeom prst="line">
+            <a:avLst/>
+          </a:prstGeom>
+          <a:ln w="22225">
+            <a:solidFill>
+              <a:srgbClr val="C0483C"/>
+            </a:solidFill>
+          </a:ln>
+          <a:effectLst/>
+        </p:spPr>
+        <p:style>
+          <a:lnRef idx="2">
+            <a:schemeClr val="accent1"/>
+          </a:lnRef>
+          <a:fillRef idx="0">
+            <a:schemeClr val="accent1"/>
+          </a:fillRef>
+          <a:effectRef idx="1">
+            <a:schemeClr val="accent1"/>
+          </a:effectRef>
+          <a:fontRef idx="minor">
+            <a:schemeClr val="tx1"/>
+          </a:fontRef>
+        </p:style>
+      </p:cxnSp>
+      <p:cxnSp>
+        <p:nvCxnSpPr>
+          <p:cNvPr id="13" name="Connector 12"/>
+          <p:cNvCxnSpPr/>
+          <p:nvPr/>
+        </p:nvCxnSpPr>
+        <p:spPr>
+          <a:xfrm>
+            <a:off x="11083442" y="329184"/>
+            <a:ext cx="712318" cy="0"/>
+          </a:xfrm>
+          <a:prstGeom prst="line">
+            <a:avLst/>
+          </a:prstGeom>
+          <a:ln w="22225">
+            <a:solidFill>
+              <a:srgbClr val="C0483C"/>
+            </a:solidFill>
+          </a:ln>
+          <a:effectLst/>
+        </p:spPr>
+        <p:style>
+          <a:lnRef idx="2">
+            <a:schemeClr val="accent1"/>
+          </a:lnRef>
+          <a:fillRef idx="0">
+            <a:schemeClr val="accent1"/>
+          </a:fillRef>
+          <a:effectRef idx="1">
+            <a:schemeClr val="accent1"/>
+          </a:effectRef>
+          <a:fontRef idx="minor">
+            <a:schemeClr val="tx1"/>
+          </a:fontRef>
+        </p:style>
+      </p:cxnSp>
+      <p:sp>
+        <p:nvSpPr>
+          <p:cNvPr id="14" name="TextBox 13"/>
+          <p:cNvSpPr txBox="1"/>
+          <p:nvPr/>
+        </p:nvSpPr>
+        <p:spPr>
+          <a:xfrm>
+            <a:off x="822960" y="960120"/>
+            <a:ext cx="10607040" cy="548640"/>
           </a:xfrm>
           <a:prstGeom prst="rect">
             <a:avLst/>
@@ -8130,49 +10337,7 @@
               </a:spcAft>
             </a:pPr>
             <a:r>
-              <a:rPr sz="600" b="0" i="0">
-                <a:solidFill>
-                  <a:srgbClr val="17242E"/>
-                </a:solidFill>
-                <a:latin typeface="Calibri"/>
-              </a:rPr>
-              <a:t/>
-            </a:r>
-          </a:p>
-        </p:txBody>
-      </p:sp>
-      <p:sp>
-        <p:nvSpPr>
-          <p:cNvPr id="7" name="TextBox 6"/>
-          <p:cNvSpPr txBox="1"/>
-          <p:nvPr/>
-        </p:nvSpPr>
-        <p:spPr>
-          <a:xfrm>
-            <a:off x="914400" y="1234440"/>
-            <a:ext cx="10424160" cy="822960"/>
-          </a:xfrm>
-          <a:prstGeom prst="rect">
-            <a:avLst/>
-          </a:prstGeom>
-          <a:noFill/>
-        </p:spPr>
-        <p:txBody>
-          <a:bodyPr wrap="square" anchor="t" lIns="0" rIns="0" tIns="0" bIns="0">
-            <a:spAutoFit/>
-          </a:bodyPr>
-          <a:lstStyle/>
-          <a:p>
-            <a:pPr algn="l">
-              <a:lnSpc>
-                <a:spcPct val="100000"/>
-              </a:lnSpc>
-              <a:spcAft>
-                <a:spcPts val="0"/>
-              </a:spcAft>
-            </a:pPr>
-            <a:r>
-              <a:rPr sz="2500" b="1" i="0">
+              <a:rPr sz="2300" b="1" i="0">
                 <a:solidFill>
                   <a:srgbClr val="17242E"/>
                 </a:solidFill>
@@ -8185,18 +10350,18 @@
       </p:sp>
       <p:sp>
         <p:nvSpPr>
-          <p:cNvPr id="8" name="Rounded Rectangle 7"/>
+          <p:cNvPr id="15" name="Rounded Rectangle 14"/>
           <p:cNvSpPr/>
           <p:nvPr/>
         </p:nvSpPr>
         <p:spPr>
           <a:xfrm>
-            <a:off x="914400" y="2240280"/>
-            <a:ext cx="10360152" cy="2788920"/>
+            <a:off x="822960" y="1737360"/>
+            <a:ext cx="10515600" cy="3108960"/>
           </a:xfrm>
           <a:prstGeom prst="roundRect">
             <a:avLst>
-              <a:gd name="adj" fmla="val 5000"/>
+              <a:gd name="adj" fmla="val 4000"/>
             </a:avLst>
           </a:prstGeom>
           <a:solidFill>
@@ -8233,14 +10398,14 @@
       </p:sp>
       <p:sp>
         <p:nvSpPr>
-          <p:cNvPr id="9" name="TextBox 8"/>
+          <p:cNvPr id="16" name="TextBox 15"/>
           <p:cNvSpPr txBox="1"/>
           <p:nvPr/>
         </p:nvSpPr>
         <p:spPr>
           <a:xfrm>
-            <a:off x="1280160" y="2514600"/>
-            <a:ext cx="9692640" cy="640080"/>
+            <a:off x="1188720" y="2011680"/>
+            <a:ext cx="9784080" cy="685800"/>
           </a:xfrm>
           <a:prstGeom prst="rect">
             <a:avLst/>
@@ -8255,34 +10420,34 @@
           <a:p>
             <a:pPr algn="l">
               <a:lnSpc>
-                <a:spcPct val="110000"/>
+                <a:spcPct val="108000"/>
               </a:lnSpc>
               <a:spcAft>
                 <a:spcPts val="0"/>
               </a:spcAft>
             </a:pPr>
             <a:r>
-              <a:rPr sz="1500" b="0" i="1">
+              <a:rPr sz="1400" b="0" i="1">
                 <a:solidFill>
                   <a:srgbClr val="17242E"/>
                 </a:solidFill>
-                <a:latin typeface="Calibri"/>
+                <a:latin typeface="Georgia"/>
               </a:rPr>
-              <a:t>One day you'll want your knowledge library not at your desk, but at the bedside — on the ward tablet, the clinic PC, and your phone. That's when you'll upgrade me.</a:t>
-            </a:r>
-          </a:p>
-        </p:txBody>
-      </p:sp>
-      <p:sp>
-        <p:nvSpPr>
-          <p:cNvPr id="10" name="TextBox 9"/>
+              <a:t>One day you'll want your knowledge library not at your desk, but at the bedside — the ward tablet, the clinic PC, your phone. That's when you'll upgrade me.</a:t>
+            </a:r>
+          </a:p>
+        </p:txBody>
+      </p:sp>
+      <p:sp>
+        <p:nvSpPr>
+          <p:cNvPr id="17" name="TextBox 16"/>
           <p:cNvSpPr txBox="1"/>
           <p:nvPr/>
         </p:nvSpPr>
         <p:spPr>
           <a:xfrm>
-            <a:off x="1371600" y="3429000"/>
-            <a:ext cx="9509760" cy="411480"/>
+            <a:off x="1280160" y="2926080"/>
+            <a:ext cx="9601200" cy="411480"/>
           </a:xfrm>
           <a:prstGeom prst="rect">
             <a:avLst/>
@@ -8305,25 +10470,25 @@
                 <a:solidFill>
                   <a:srgbClr val="B5822E"/>
                 </a:solidFill>
-                <a:latin typeface="Calibri"/>
+                <a:latin typeface="Georgia"/>
               </a:rPr>
-              <a:t>›  </a:t>
-            </a:r>
-            <a:r>
-              <a:rPr sz="1350" b="1" i="0">
+              <a:t>› </a:t>
+            </a:r>
+            <a:r>
+              <a:rPr sz="1300" b="1" i="0">
                 <a:solidFill>
                   <a:srgbClr val="17242E"/>
                 </a:solidFill>
-                <a:latin typeface="Calibri"/>
+                <a:latin typeface="Georgia"/>
               </a:rPr>
               <a:t>One private library, every device </a:t>
             </a:r>
             <a:r>
-              <a:rPr sz="1300" b="0" i="0">
+              <a:rPr sz="1250" b="0" i="0">
                 <a:solidFill>
                   <a:srgbClr val="17242E"/>
                 </a:solidFill>
-                <a:latin typeface="Calibri"/>
+                <a:latin typeface="Georgia"/>
               </a:rPr>
               <a:t>— I carry your whole knowledge library and its search across your devices, in sync.</a:t>
             </a:r>
@@ -8332,14 +10497,14 @@
       </p:sp>
       <p:sp>
         <p:nvSpPr>
-          <p:cNvPr id="11" name="TextBox 10"/>
+          <p:cNvPr id="18" name="TextBox 17"/>
           <p:cNvSpPr txBox="1"/>
           <p:nvPr/>
         </p:nvSpPr>
         <p:spPr>
           <a:xfrm>
-            <a:off x="1371600" y="3886200"/>
-            <a:ext cx="9509760" cy="411480"/>
+            <a:off x="1280160" y="3383280"/>
+            <a:ext cx="9601200" cy="411480"/>
           </a:xfrm>
           <a:prstGeom prst="rect">
             <a:avLst/>
@@ -8362,25 +10527,25 @@
                 <a:solidFill>
                   <a:srgbClr val="B5822E"/>
                 </a:solidFill>
-                <a:latin typeface="Calibri"/>
+                <a:latin typeface="Georgia"/>
               </a:rPr>
-              <a:t>›  </a:t>
-            </a:r>
-            <a:r>
-              <a:rPr sz="1350" b="1" i="0">
+              <a:t>› </a:t>
+            </a:r>
+            <a:r>
+              <a:rPr sz="1300" b="1" i="0">
                 <a:solidFill>
                   <a:srgbClr val="17242E"/>
                 </a:solidFill>
-                <a:latin typeface="Calibri"/>
+                <a:latin typeface="Georgia"/>
               </a:rPr>
               <a:t>Search everything, anywhere </a:t>
             </a:r>
             <a:r>
-              <a:rPr sz="1300" b="0" i="0">
+              <a:rPr sz="1250" b="0" i="0">
                 <a:solidFill>
                   <a:srgbClr val="17242E"/>
                 </a:solidFill>
-                <a:latin typeface="Calibri"/>
+                <a:latin typeface="Georgia"/>
               </a:rPr>
               <a:t>— “where did I cover this?” answered from your full library, at the point of care.</a:t>
             </a:r>
@@ -8389,14 +10554,14 @@
       </p:sp>
       <p:sp>
         <p:nvSpPr>
-          <p:cNvPr id="12" name="TextBox 11"/>
+          <p:cNvPr id="19" name="TextBox 18"/>
           <p:cNvSpPr txBox="1"/>
           <p:nvPr/>
         </p:nvSpPr>
         <p:spPr>
           <a:xfrm>
-            <a:off x="1371600" y="4343400"/>
-            <a:ext cx="9509760" cy="411480"/>
+            <a:off x="1280160" y="3840480"/>
+            <a:ext cx="9601200" cy="411480"/>
           </a:xfrm>
           <a:prstGeom prst="rect">
             <a:avLst/>
@@ -8419,25 +10584,25 @@
                 <a:solidFill>
                   <a:srgbClr val="B5822E"/>
                 </a:solidFill>
-                <a:latin typeface="Calibri"/>
+                <a:latin typeface="Georgia"/>
               </a:rPr>
-              <a:t>›  </a:t>
-            </a:r>
-            <a:r>
-              <a:rPr sz="1350" b="1" i="0">
+              <a:t>› </a:t>
+            </a:r>
+            <a:r>
+              <a:rPr sz="1300" b="1" i="0">
                 <a:solidFill>
                   <a:srgbClr val="17242E"/>
                 </a:solidFill>
-                <a:latin typeface="Calibri"/>
+                <a:latin typeface="Georgia"/>
               </a:rPr>
               <a:t>Still yours alone </a:t>
             </a:r>
             <a:r>
-              <a:rPr sz="1300" b="0" i="0">
+              <a:rPr sz="1250" b="0" i="0">
                 <a:solidFill>
                   <a:srgbClr val="17242E"/>
                 </a:solidFill>
-                <a:latin typeface="Calibri"/>
+                <a:latin typeface="Georgia"/>
               </a:rPr>
               <a:t>— private, encrypted, never shared, never used to profile you or your patients.</a:t>
             </a:r>
@@ -8446,14 +10611,14 @@
       </p:sp>
       <p:sp>
         <p:nvSpPr>
-          <p:cNvPr id="13" name="TextBox 12"/>
+          <p:cNvPr id="20" name="TextBox 19"/>
           <p:cNvSpPr txBox="1"/>
           <p:nvPr/>
         </p:nvSpPr>
         <p:spPr>
           <a:xfrm>
-            <a:off x="1371600" y="4800600"/>
-            <a:ext cx="9509760" cy="320040"/>
+            <a:off x="1280160" y="4480560"/>
+            <a:ext cx="9601200" cy="320040"/>
           </a:xfrm>
           <a:prstGeom prst="rect">
             <a:avLst/>
@@ -8472,13 +10637,13 @@
               </a:spcAft>
             </a:pPr>
             <a:r>
-              <a:rPr sz="1100" b="0" i="1">
-                <a:solidFill>
-                  <a:srgbClr val="566572"/>
-                </a:solidFill>
-                <a:latin typeface="Calibri"/>
+              <a:rPr sz="1050" b="0" i="1">
+                <a:solidFill>
+                  <a:srgbClr val="5A6A72"/>
+                </a:solidFill>
+                <a:latin typeface="Georgia"/>
               </a:rPr>
-              <a:t>Upgrading makes me a private hosted library that follows you. The free device-only version stays exactly as it is.</a:t>
+              <a:t>Upgrading makes me a private hosted library that follows you. The free device-only version stays as it is.</a:t>
             </a:r>
           </a:p>
         </p:txBody>
@@ -8516,50 +10681,6 @@
             <a:avLst/>
           </a:prstGeom>
           <a:solidFill>
-            <a:srgbClr val="FBFAF9"/>
-          </a:solidFill>
-          <a:ln>
-            <a:noFill/>
-          </a:ln>
-          <a:effectLst/>
-        </p:spPr>
-        <p:style>
-          <a:lnRef idx="1">
-            <a:schemeClr val="accent1"/>
-          </a:lnRef>
-          <a:fillRef idx="3">
-            <a:schemeClr val="accent1"/>
-          </a:fillRef>
-          <a:effectRef idx="2">
-            <a:schemeClr val="accent1"/>
-          </a:effectRef>
-          <a:fontRef idx="minor">
-            <a:schemeClr val="lt1"/>
-          </a:fontRef>
-        </p:style>
-        <p:txBody>
-          <a:bodyPr rtlCol="0" anchor="ctr"/>
-          <a:lstStyle/>
-          <a:p>
-            <a:pPr algn="ctr"/>
-          </a:p>
-        </p:txBody>
-      </p:sp>
-      <p:sp>
-        <p:nvSpPr>
-          <p:cNvPr id="3" name="Rectangle 2"/>
-          <p:cNvSpPr/>
-          <p:nvPr/>
-        </p:nvSpPr>
-        <p:spPr>
-          <a:xfrm>
-            <a:off x="0" y="0"/>
-            <a:ext cx="12191695" cy="6858000"/>
-          </a:xfrm>
-          <a:prstGeom prst="rect">
-            <a:avLst/>
-          </a:prstGeom>
-          <a:solidFill>
             <a:srgbClr val="1F5C6B"/>
           </a:solidFill>
           <a:ln>
@@ -8589,15 +10710,267 @@
           </a:p>
         </p:txBody>
       </p:sp>
-      <p:sp>
-        <p:nvSpPr>
-          <p:cNvPr id="4" name="TextBox 3"/>
+      <p:cxnSp>
+        <p:nvCxnSpPr>
+          <p:cNvPr id="3" name="Connector 2"/>
+          <p:cNvCxnSpPr/>
+          <p:nvPr/>
+        </p:nvCxnSpPr>
+        <p:spPr>
+          <a:xfrm>
+            <a:off x="1097280" y="1554480"/>
+            <a:ext cx="3388766" cy="0"/>
+          </a:xfrm>
+          <a:prstGeom prst="line">
+            <a:avLst/>
+          </a:prstGeom>
+          <a:ln w="22225">
+            <a:solidFill>
+              <a:srgbClr val="BEDDDF"/>
+            </a:solidFill>
+          </a:ln>
+          <a:effectLst/>
+        </p:spPr>
+        <p:style>
+          <a:lnRef idx="2">
+            <a:schemeClr val="accent1"/>
+          </a:lnRef>
+          <a:fillRef idx="0">
+            <a:schemeClr val="accent1"/>
+          </a:fillRef>
+          <a:effectRef idx="1">
+            <a:schemeClr val="accent1"/>
+          </a:effectRef>
+          <a:fontRef idx="minor">
+            <a:schemeClr val="tx1"/>
+          </a:fontRef>
+        </p:style>
+      </p:cxnSp>
+      <p:cxnSp>
+        <p:nvCxnSpPr>
+          <p:cNvPr id="4" name="Connector 3"/>
+          <p:cNvCxnSpPr/>
+          <p:nvPr/>
+        </p:nvCxnSpPr>
+        <p:spPr>
+          <a:xfrm>
+            <a:off x="4486046" y="1554480"/>
+            <a:ext cx="598018" cy="91440"/>
+          </a:xfrm>
+          <a:prstGeom prst="line">
+            <a:avLst/>
+          </a:prstGeom>
+          <a:ln w="22225">
+            <a:solidFill>
+              <a:srgbClr val="BEDDDF"/>
+            </a:solidFill>
+          </a:ln>
+          <a:effectLst/>
+        </p:spPr>
+        <p:style>
+          <a:lnRef idx="2">
+            <a:schemeClr val="accent1"/>
+          </a:lnRef>
+          <a:fillRef idx="0">
+            <a:schemeClr val="accent1"/>
+          </a:fillRef>
+          <a:effectRef idx="1">
+            <a:schemeClr val="accent1"/>
+          </a:effectRef>
+          <a:fontRef idx="minor">
+            <a:schemeClr val="tx1"/>
+          </a:fontRef>
+        </p:style>
+      </p:cxnSp>
+      <p:cxnSp>
+        <p:nvCxnSpPr>
+          <p:cNvPr id="5" name="Connector 4"/>
+          <p:cNvCxnSpPr/>
+          <p:nvPr/>
+        </p:nvCxnSpPr>
+        <p:spPr>
+          <a:xfrm flipV="1">
+            <a:off x="5084064" y="1536192"/>
+            <a:ext cx="498348" cy="109728"/>
+          </a:xfrm>
+          <a:prstGeom prst="line">
+            <a:avLst/>
+          </a:prstGeom>
+          <a:ln w="22225">
+            <a:solidFill>
+              <a:srgbClr val="BEDDDF"/>
+            </a:solidFill>
+          </a:ln>
+          <a:effectLst/>
+        </p:spPr>
+        <p:style>
+          <a:lnRef idx="2">
+            <a:schemeClr val="accent1"/>
+          </a:lnRef>
+          <a:fillRef idx="0">
+            <a:schemeClr val="accent1"/>
+          </a:fillRef>
+          <a:effectRef idx="1">
+            <a:schemeClr val="accent1"/>
+          </a:effectRef>
+          <a:fontRef idx="minor">
+            <a:schemeClr val="tx1"/>
+          </a:fontRef>
+        </p:style>
+      </p:cxnSp>
+      <p:cxnSp>
+        <p:nvCxnSpPr>
+          <p:cNvPr id="6" name="Connector 5"/>
+          <p:cNvCxnSpPr/>
+          <p:nvPr/>
+        </p:nvCxnSpPr>
+        <p:spPr>
+          <a:xfrm flipV="1">
+            <a:off x="5582412" y="1243584"/>
+            <a:ext cx="398678" cy="292608"/>
+          </a:xfrm>
+          <a:prstGeom prst="line">
+            <a:avLst/>
+          </a:prstGeom>
+          <a:ln w="22225">
+            <a:solidFill>
+              <a:srgbClr val="BEDDDF"/>
+            </a:solidFill>
+          </a:ln>
+          <a:effectLst/>
+        </p:spPr>
+        <p:style>
+          <a:lnRef idx="2">
+            <a:schemeClr val="accent1"/>
+          </a:lnRef>
+          <a:fillRef idx="0">
+            <a:schemeClr val="accent1"/>
+          </a:fillRef>
+          <a:effectRef idx="1">
+            <a:schemeClr val="accent1"/>
+          </a:effectRef>
+          <a:fontRef idx="minor">
+            <a:schemeClr val="tx1"/>
+          </a:fontRef>
+        </p:style>
+      </p:cxnSp>
+      <p:cxnSp>
+        <p:nvCxnSpPr>
+          <p:cNvPr id="7" name="Connector 6"/>
+          <p:cNvCxnSpPr/>
+          <p:nvPr/>
+        </p:nvCxnSpPr>
+        <p:spPr>
+          <a:xfrm>
+            <a:off x="5981090" y="1243584"/>
+            <a:ext cx="498348" cy="438911"/>
+          </a:xfrm>
+          <a:prstGeom prst="line">
+            <a:avLst/>
+          </a:prstGeom>
+          <a:ln w="22225">
+            <a:solidFill>
+              <a:srgbClr val="BEDDDF"/>
+            </a:solidFill>
+          </a:ln>
+          <a:effectLst/>
+        </p:spPr>
+        <p:style>
+          <a:lnRef idx="2">
+            <a:schemeClr val="accent1"/>
+          </a:lnRef>
+          <a:fillRef idx="0">
+            <a:schemeClr val="accent1"/>
+          </a:fillRef>
+          <a:effectRef idx="1">
+            <a:schemeClr val="accent1"/>
+          </a:effectRef>
+          <a:fontRef idx="minor">
+            <a:schemeClr val="tx1"/>
+          </a:fontRef>
+        </p:style>
+      </p:cxnSp>
+      <p:cxnSp>
+        <p:nvCxnSpPr>
+          <p:cNvPr id="8" name="Connector 7"/>
+          <p:cNvCxnSpPr/>
+          <p:nvPr/>
+        </p:nvCxnSpPr>
+        <p:spPr>
+          <a:xfrm flipV="1">
+            <a:off x="6479438" y="1554480"/>
+            <a:ext cx="498348" cy="128015"/>
+          </a:xfrm>
+          <a:prstGeom prst="line">
+            <a:avLst/>
+          </a:prstGeom>
+          <a:ln w="22225">
+            <a:solidFill>
+              <a:srgbClr val="BEDDDF"/>
+            </a:solidFill>
+          </a:ln>
+          <a:effectLst/>
+        </p:spPr>
+        <p:style>
+          <a:lnRef idx="2">
+            <a:schemeClr val="accent1"/>
+          </a:lnRef>
+          <a:fillRef idx="0">
+            <a:schemeClr val="accent1"/>
+          </a:fillRef>
+          <a:effectRef idx="1">
+            <a:schemeClr val="accent1"/>
+          </a:effectRef>
+          <a:fontRef idx="minor">
+            <a:schemeClr val="tx1"/>
+          </a:fontRef>
+        </p:style>
+      </p:cxnSp>
+      <p:cxnSp>
+        <p:nvCxnSpPr>
+          <p:cNvPr id="9" name="Connector 8"/>
+          <p:cNvCxnSpPr/>
+          <p:nvPr/>
+        </p:nvCxnSpPr>
+        <p:spPr>
+          <a:xfrm>
+            <a:off x="6977786" y="1554480"/>
+            <a:ext cx="4086454" cy="0"/>
+          </a:xfrm>
+          <a:prstGeom prst="line">
+            <a:avLst/>
+          </a:prstGeom>
+          <a:ln w="22225">
+            <a:solidFill>
+              <a:srgbClr val="BEDDDF"/>
+            </a:solidFill>
+          </a:ln>
+          <a:effectLst/>
+        </p:spPr>
+        <p:style>
+          <a:lnRef idx="2">
+            <a:schemeClr val="accent1"/>
+          </a:lnRef>
+          <a:fillRef idx="0">
+            <a:schemeClr val="accent1"/>
+          </a:fillRef>
+          <a:effectRef idx="1">
+            <a:schemeClr val="accent1"/>
+          </a:effectRef>
+          <a:fontRef idx="minor">
+            <a:schemeClr val="tx1"/>
+          </a:fontRef>
+        </p:style>
+      </p:cxnSp>
+      <p:sp>
+        <p:nvSpPr>
+          <p:cNvPr id="10" name="TextBox 9"/>
           <p:cNvSpPr txBox="1"/>
           <p:nvPr/>
         </p:nvSpPr>
         <p:spPr>
           <a:xfrm>
-            <a:off x="1097280" y="2194560"/>
+            <a:off x="1097280" y="2103120"/>
             <a:ext cx="10058400" cy="457200"/>
           </a:xfrm>
           <a:prstGeom prst="rect">
@@ -8617,27 +10990,27 @@
               </a:spcAft>
             </a:pPr>
             <a:r>
-              <a:rPr sz="1300" b="0" i="0">
+              <a:rPr sz="1200" b="0" i="0">
                 <a:solidFill>
                   <a:srgbClr val="BEDDDF"/>
                 </a:solidFill>
                 <a:latin typeface="Consolas"/>
               </a:rPr>
-              <a:t>MY PROMISE TO YOU</a:t>
-            </a:r>
-          </a:p>
-        </p:txBody>
-      </p:sp>
-      <p:sp>
-        <p:nvSpPr>
-          <p:cNvPr id="5" name="TextBox 4"/>
+              <a:t>ASSESSMENT &amp; PLAN — MY PROMISE TO YOU</a:t>
+            </a:r>
+          </a:p>
+        </p:txBody>
+      </p:sp>
+      <p:sp>
+        <p:nvSpPr>
+          <p:cNvPr id="11" name="TextBox 10"/>
           <p:cNvSpPr txBox="1"/>
           <p:nvPr/>
         </p:nvSpPr>
         <p:spPr>
           <a:xfrm>
-            <a:off x="1097280" y="2743200"/>
-            <a:ext cx="10058400" cy="2011680"/>
+            <a:off x="1097280" y="2697480"/>
+            <a:ext cx="10058400" cy="2103120"/>
           </a:xfrm>
           <a:prstGeom prst="rect">
             <a:avLst/>
@@ -8672,13 +11045,13 @@
       </p:sp>
       <p:sp>
         <p:nvSpPr>
-          <p:cNvPr id="6" name="TextBox 5"/>
+          <p:cNvPr id="12" name="TextBox 11"/>
           <p:cNvSpPr txBox="1"/>
           <p:nvPr/>
         </p:nvSpPr>
         <p:spPr>
           <a:xfrm>
-            <a:off x="1097280" y="5989320"/>
+            <a:off x="1097280" y="5943600"/>
             <a:ext cx="10058400" cy="365760"/>
           </a:xfrm>
           <a:prstGeom prst="rect">
@@ -8702,9 +11075,9 @@
                 <a:solidFill>
                   <a:srgbClr val="BEDDDF"/>
                 </a:solidFill>
-                <a:latin typeface="Calibri"/>
+                <a:latin typeface="Consolas"/>
               </a:rPr>
-              <a:t>Learn → Author → Carry, privately.  Free on your device · paid across every device.</a:t>
+              <a:t>Free on your device · paid across every device. Learn → Author → Carry, privately.</a:t>
             </a:r>
           </a:p>
         </p:txBody>
